--- a/docs/example-deck-showship.pptx
+++ b/docs/example-deck-showship.pptx
@@ -2271,7 +2271,7 @@
       </p:grpSpPr>
       <p:pic>
         <p:nvPicPr>
-          <p:cNvPr id="2" name="Image 0" descr="/sessions/beautiful-vigilant-darwin/tmp/showship-deck-zktDWi/trail_bookend.png">    </p:cNvPr>
+          <p:cNvPr id="2" name="Image 0" descr="/sessions/beautiful-vigilant-darwin/tmp/showship-deck-1uRcfa/trail_bookend.png">    </p:cNvPr>
           <p:cNvPicPr>
             <a:picLocks noChangeAspect="1"/>
           </p:cNvPicPr>
@@ -2295,7 +2295,7 @@
       </p:pic>
       <p:pic>
         <p:nvPicPr>
-          <p:cNvPr id="3" name="Image 1" descr="/sessions/beautiful-vigilant-darwin/tmp/showship-deck-zktDWi/logo_trimmed.png">    </p:cNvPr>
+          <p:cNvPr id="3" name="Image 1" descr="/sessions/beautiful-vigilant-darwin/tmp/showship-deck-1uRcfa/logo_trimmed.png">    </p:cNvPr>
           <p:cNvPicPr>
             <a:picLocks noChangeAspect="1"/>
           </p:cNvPicPr>
@@ -2627,7 +2627,7 @@
       </p:sp>
       <p:pic>
         <p:nvPicPr>
-          <p:cNvPr id="11" name="Image 2" descr="/sessions/beautiful-vigilant-darwin/tmp/showship-deck-zktDWi/trail_mark.png">    </p:cNvPr>
+          <p:cNvPr id="11" name="Image 2" descr="/sessions/beautiful-vigilant-darwin/tmp/showship-deck-1uRcfa/trail_mark.png">    </p:cNvPr>
           <p:cNvPicPr>
             <a:picLocks noChangeAspect="1"/>
           </p:cNvPicPr>
@@ -2736,7 +2736,7 @@
       </p:grpSpPr>
       <p:pic>
         <p:nvPicPr>
-          <p:cNvPr id="2" name="Image 0" descr="/sessions/beautiful-vigilant-darwin/tmp/showship-deck-zktDWi/trail_corner.png">    </p:cNvPr>
+          <p:cNvPr id="2" name="Image 0" descr="/sessions/beautiful-vigilant-darwin/tmp/showship-deck-1uRcfa/trail_corner.png">    </p:cNvPr>
           <p:cNvPicPr>
             <a:picLocks noChangeAspect="1"/>
           </p:cNvPicPr>
@@ -2860,7 +2860,7 @@
       </p:sp>
       <p:pic>
         <p:nvPicPr>
-          <p:cNvPr id="6" name="Image 1" descr="/sessions/beautiful-vigilant-darwin/tmp/showship-deck-zktDWi/trail_mark.png">    </p:cNvPr>
+          <p:cNvPr id="6" name="Image 1" descr="/sessions/beautiful-vigilant-darwin/tmp/showship-deck-1uRcfa/trail_mark.png">    </p:cNvPr>
           <p:cNvPicPr>
             <a:picLocks noChangeAspect="1"/>
           </p:cNvPicPr>
@@ -4360,7 +4360,7 @@
       </p:grpSpPr>
       <p:pic>
         <p:nvPicPr>
-          <p:cNvPr id="2" name="Image 0" descr="/sessions/beautiful-vigilant-darwin/tmp/showship-deck-zktDWi/trail_bookend.png">    </p:cNvPr>
+          <p:cNvPr id="2" name="Image 0" descr="/sessions/beautiful-vigilant-darwin/tmp/showship-deck-1uRcfa/trail_bookend.png">    </p:cNvPr>
           <p:cNvPicPr>
             <a:picLocks noChangeAspect="1"/>
           </p:cNvPicPr>
@@ -4384,7 +4384,7 @@
       </p:pic>
       <p:pic>
         <p:nvPicPr>
-          <p:cNvPr id="3" name="Image 1" descr="/sessions/beautiful-vigilant-darwin/tmp/showship-deck-zktDWi/logo_trimmed.png">    </p:cNvPr>
+          <p:cNvPr id="3" name="Image 1" descr="/sessions/beautiful-vigilant-darwin/tmp/showship-deck-1uRcfa/logo_trimmed.png">    </p:cNvPr>
           <p:cNvPicPr>
             <a:picLocks noChangeAspect="1"/>
           </p:cNvPicPr>
@@ -4693,7 +4693,7 @@
       </p:sp>
       <p:pic>
         <p:nvPicPr>
-          <p:cNvPr id="11" name="Image 2" descr="/sessions/beautiful-vigilant-darwin/tmp/showship-deck-zktDWi/trail_mark.png">    </p:cNvPr>
+          <p:cNvPr id="11" name="Image 2" descr="/sessions/beautiful-vigilant-darwin/tmp/showship-deck-1uRcfa/trail_mark.png">    </p:cNvPr>
           <p:cNvPicPr>
             <a:picLocks noChangeAspect="1"/>
           </p:cNvPicPr>
@@ -4802,7 +4802,7 @@
       </p:grpSpPr>
       <p:pic>
         <p:nvPicPr>
-          <p:cNvPr id="2" name="Image 0" descr="/sessions/beautiful-vigilant-darwin/tmp/showship-deck-zktDWi/trail_corner.png">    </p:cNvPr>
+          <p:cNvPr id="2" name="Image 0" descr="/sessions/beautiful-vigilant-darwin/tmp/showship-deck-1uRcfa/trail_corner.png">    </p:cNvPr>
           <p:cNvPicPr>
             <a:picLocks noChangeAspect="1"/>
           </p:cNvPicPr>
@@ -4926,7 +4926,7 @@
       </p:sp>
       <p:pic>
         <p:nvPicPr>
-          <p:cNvPr id="6" name="Image 1" descr="/sessions/beautiful-vigilant-darwin/tmp/showship-deck-zktDWi/trail_mark.png">    </p:cNvPr>
+          <p:cNvPr id="6" name="Image 1" descr="/sessions/beautiful-vigilant-darwin/tmp/showship-deck-1uRcfa/trail_mark.png">    </p:cNvPr>
           <p:cNvPicPr>
             <a:picLocks noChangeAspect="1"/>
           </p:cNvPicPr>
@@ -6244,7 +6244,7 @@
       </p:grpSpPr>
       <p:pic>
         <p:nvPicPr>
-          <p:cNvPr id="2" name="Image 0" descr="/sessions/beautiful-vigilant-darwin/tmp/showship-deck-zktDWi/trail_corner.png">    </p:cNvPr>
+          <p:cNvPr id="2" name="Image 0" descr="/sessions/beautiful-vigilant-darwin/tmp/showship-deck-1uRcfa/trail_corner.png">    </p:cNvPr>
           <p:cNvPicPr>
             <a:picLocks noChangeAspect="1"/>
           </p:cNvPicPr>
@@ -6368,7 +6368,7 @@
       </p:sp>
       <p:pic>
         <p:nvPicPr>
-          <p:cNvPr id="6" name="Image 1" descr="/sessions/beautiful-vigilant-darwin/tmp/showship-deck-zktDWi/trail_mark.png">    </p:cNvPr>
+          <p:cNvPr id="6" name="Image 1" descr="/sessions/beautiful-vigilant-darwin/tmp/showship-deck-1uRcfa/trail_mark.png">    </p:cNvPr>
           <p:cNvPicPr>
             <a:picLocks noChangeAspect="1"/>
           </p:cNvPicPr>
@@ -6545,7 +6545,7 @@
       </p:sp>
       <p:pic>
         <p:nvPicPr>
-          <p:cNvPr id="11" name="Image 2" descr="/sessions/beautiful-vigilant-darwin/tmp/showship-deck-zktDWi/trail_tl_1.png">    </p:cNvPr>
+          <p:cNvPr id="11" name="Image 2" descr="/sessions/beautiful-vigilant-darwin/tmp/showship-deck-1uRcfa/trail_tl_1.png">    </p:cNvPr>
           <p:cNvPicPr>
             <a:picLocks noChangeAspect="1"/>
           </p:cNvPicPr>
@@ -7505,7 +7505,7 @@
       </p:grpSpPr>
       <p:pic>
         <p:nvPicPr>
-          <p:cNvPr id="2" name="Image 0" descr="/sessions/beautiful-vigilant-darwin/tmp/showship-deck-zktDWi/trail_corner.png">    </p:cNvPr>
+          <p:cNvPr id="2" name="Image 0" descr="/sessions/beautiful-vigilant-darwin/tmp/showship-deck-1uRcfa/trail_corner.png">    </p:cNvPr>
           <p:cNvPicPr>
             <a:picLocks noChangeAspect="1"/>
           </p:cNvPicPr>
@@ -7629,7 +7629,7 @@
       </p:sp>
       <p:pic>
         <p:nvPicPr>
-          <p:cNvPr id="6" name="Image 1" descr="/sessions/beautiful-vigilant-darwin/tmp/showship-deck-zktDWi/trail_mark.png">    </p:cNvPr>
+          <p:cNvPr id="6" name="Image 1" descr="/sessions/beautiful-vigilant-darwin/tmp/showship-deck-1uRcfa/trail_mark.png">    </p:cNvPr>
           <p:cNvPicPr>
             <a:picLocks noChangeAspect="1"/>
           </p:cNvPicPr>
@@ -8903,7 +8903,7 @@
       </p:grpSpPr>
       <p:pic>
         <p:nvPicPr>
-          <p:cNvPr id="2" name="Image 0" descr="/sessions/beautiful-vigilant-darwin/tmp/showship-deck-zktDWi/trail_corner.png">    </p:cNvPr>
+          <p:cNvPr id="2" name="Image 0" descr="/sessions/beautiful-vigilant-darwin/tmp/showship-deck-1uRcfa/trail_corner.png">    </p:cNvPr>
           <p:cNvPicPr>
             <a:picLocks noChangeAspect="1"/>
           </p:cNvPicPr>
@@ -9027,7 +9027,7 @@
       </p:sp>
       <p:pic>
         <p:nvPicPr>
-          <p:cNvPr id="6" name="Image 1" descr="/sessions/beautiful-vigilant-darwin/tmp/showship-deck-zktDWi/trail_mark.png">    </p:cNvPr>
+          <p:cNvPr id="6" name="Image 1" descr="/sessions/beautiful-vigilant-darwin/tmp/showship-deck-1uRcfa/trail_mark.png">    </p:cNvPr>
           <p:cNvPicPr>
             <a:picLocks noChangeAspect="1"/>
           </p:cNvPicPr>
@@ -10567,7 +10567,7 @@
       </p:grpSpPr>
       <p:pic>
         <p:nvPicPr>
-          <p:cNvPr id="2" name="Image 0" descr="/sessions/beautiful-vigilant-darwin/tmp/showship-deck-zktDWi/trail_corner.png">    </p:cNvPr>
+          <p:cNvPr id="2" name="Image 0" descr="/sessions/beautiful-vigilant-darwin/tmp/showship-deck-1uRcfa/trail_corner.png">    </p:cNvPr>
           <p:cNvPicPr>
             <a:picLocks noChangeAspect="1"/>
           </p:cNvPicPr>
@@ -10691,7 +10691,7 @@
       </p:sp>
       <p:pic>
         <p:nvPicPr>
-          <p:cNvPr id="6" name="Image 1" descr="/sessions/beautiful-vigilant-darwin/tmp/showship-deck-zktDWi/trail_mark.png">    </p:cNvPr>
+          <p:cNvPr id="6" name="Image 1" descr="/sessions/beautiful-vigilant-darwin/tmp/showship-deck-1uRcfa/trail_mark.png">    </p:cNvPr>
           <p:cNvPicPr>
             <a:picLocks noChangeAspect="1"/>
           </p:cNvPicPr>
@@ -11183,7 +11183,7 @@
       </p:sp>
       <p:pic>
         <p:nvPicPr>
-          <p:cNvPr id="20" name="Image 2" descr="/sessions/beautiful-vigilant-darwin/tmp/showship-deck-zktDWi/iconc_Check_FFFFFF.png">    </p:cNvPr>
+          <p:cNvPr id="20" name="Image 2" descr="/sessions/beautiful-vigilant-darwin/tmp/showship-deck-1uRcfa/iconc_Check_FFFFFF.png">    </p:cNvPr>
           <p:cNvPicPr>
             <a:picLocks noChangeAspect="1"/>
           </p:cNvPicPr>
@@ -11405,7 +11405,7 @@
       </p:sp>
       <p:pic>
         <p:nvPicPr>
-          <p:cNvPr id="27" name="Image 3" descr="/sessions/beautiful-vigilant-darwin/tmp/showship-deck-zktDWi/iconc_Wrench_FFFFFF.png">    </p:cNvPr>
+          <p:cNvPr id="27" name="Image 3" descr="/sessions/beautiful-vigilant-darwin/tmp/showship-deck-1uRcfa/iconc_Wrench_FFFFFF.png">    </p:cNvPr>
           <p:cNvPicPr>
             <a:picLocks noChangeAspect="1"/>
           </p:cNvPicPr>
@@ -11627,7 +11627,7 @@
       </p:sp>
       <p:pic>
         <p:nvPicPr>
-          <p:cNvPr id="34" name="Image 4" descr="/sessions/beautiful-vigilant-darwin/tmp/showship-deck-zktDWi/iconc_Check_FFFFFF.png">    </p:cNvPr>
+          <p:cNvPr id="34" name="Image 4" descr="/sessions/beautiful-vigilant-darwin/tmp/showship-deck-1uRcfa/iconc_Check_FFFFFF.png">    </p:cNvPr>
           <p:cNvPicPr>
             <a:picLocks noChangeAspect="1"/>
           </p:cNvPicPr>
@@ -11866,7 +11866,7 @@
       </p:grpSpPr>
       <p:pic>
         <p:nvPicPr>
-          <p:cNvPr id="2" name="Image 0" descr="/sessions/beautiful-vigilant-darwin/tmp/showship-deck-zktDWi/trail_corner.png">    </p:cNvPr>
+          <p:cNvPr id="2" name="Image 0" descr="/sessions/beautiful-vigilant-darwin/tmp/showship-deck-1uRcfa/trail_corner.png">    </p:cNvPr>
           <p:cNvPicPr>
             <a:picLocks noChangeAspect="1"/>
           </p:cNvPicPr>
@@ -11990,7 +11990,7 @@
       </p:sp>
       <p:pic>
         <p:nvPicPr>
-          <p:cNvPr id="6" name="Image 1" descr="/sessions/beautiful-vigilant-darwin/tmp/showship-deck-zktDWi/trail_mark.png">    </p:cNvPr>
+          <p:cNvPr id="6" name="Image 1" descr="/sessions/beautiful-vigilant-darwin/tmp/showship-deck-1uRcfa/trail_mark.png">    </p:cNvPr>
           <p:cNvPicPr>
             <a:picLocks noChangeAspect="1"/>
           </p:cNvPicPr>
@@ -12182,7 +12182,7 @@
       </p:sp>
       <p:pic>
         <p:nvPicPr>
-          <p:cNvPr id="12" name="Image 2" descr="/sessions/beautiful-vigilant-darwin/tmp/showship-deck-zktDWi/iconc_TriangleAlert_FFFFFF.png">    </p:cNvPr>
+          <p:cNvPr id="12" name="Image 2" descr="/sessions/beautiful-vigilant-darwin/tmp/showship-deck-1uRcfa/iconc_TriangleAlert_FFFFFF.png">    </p:cNvPr>
           <p:cNvPicPr>
             <a:picLocks noChangeAspect="1"/>
           </p:cNvPicPr>
@@ -12512,7 +12512,7 @@
       </p:sp>
       <p:pic>
         <p:nvPicPr>
-          <p:cNvPr id="21" name="Image 3" descr="/sessions/beautiful-vigilant-darwin/tmp/showship-deck-zktDWi/iconc_MessageCircleQuestion_FFFFFF.png">    </p:cNvPr>
+          <p:cNvPr id="21" name="Image 3" descr="/sessions/beautiful-vigilant-darwin/tmp/showship-deck-1uRcfa/iconc_MessageCircleQuestion_FFFFFF.png">    </p:cNvPr>
           <p:cNvPicPr>
             <a:picLocks noChangeAspect="1"/>
           </p:cNvPicPr>
@@ -12798,7 +12798,7 @@
       </p:grpSpPr>
       <p:pic>
         <p:nvPicPr>
-          <p:cNvPr id="2" name="Image 0" descr="/sessions/beautiful-vigilant-darwin/tmp/showship-deck-zktDWi/trail_corner.png">    </p:cNvPr>
+          <p:cNvPr id="2" name="Image 0" descr="/sessions/beautiful-vigilant-darwin/tmp/showship-deck-1uRcfa/trail_corner.png">    </p:cNvPr>
           <p:cNvPicPr>
             <a:picLocks noChangeAspect="1"/>
           </p:cNvPicPr>
@@ -12922,7 +12922,7 @@
       </p:sp>
       <p:pic>
         <p:nvPicPr>
-          <p:cNvPr id="6" name="Image 1" descr="/sessions/beautiful-vigilant-darwin/tmp/showship-deck-zktDWi/trail_mark.png">    </p:cNvPr>
+          <p:cNvPr id="6" name="Image 1" descr="/sessions/beautiful-vigilant-darwin/tmp/showship-deck-1uRcfa/trail_mark.png">    </p:cNvPr>
           <p:cNvPicPr>
             <a:picLocks noChangeAspect="1"/>
           </p:cNvPicPr>
@@ -14442,7 +14442,7 @@
                 <a:ea typeface="Poppins" pitchFamily="34" charset="-122"/>
                 <a:cs typeface="Poppins" pitchFamily="34" charset="-120"/>
               </a:rPr>
-              <a:t>P4 · Reminders — in review (5/5)</a:t>
+              <a:t>P4 · Reminders, in review (5/5)</a:t>
             </a:r>
             <a:endParaRPr lang="en-US" sz="1000" dirty="0"/>
           </a:p>
@@ -15343,7 +15343,7 @@
       </p:grpSpPr>
       <p:pic>
         <p:nvPicPr>
-          <p:cNvPr id="2" name="Image 0" descr="/sessions/beautiful-vigilant-darwin/tmp/showship-deck-zktDWi/trail_corner.png">    </p:cNvPr>
+          <p:cNvPr id="2" name="Image 0" descr="/sessions/beautiful-vigilant-darwin/tmp/showship-deck-1uRcfa/trail_corner.png">    </p:cNvPr>
           <p:cNvPicPr>
             <a:picLocks noChangeAspect="1"/>
           </p:cNvPicPr>
@@ -15467,7 +15467,7 @@
       </p:sp>
       <p:pic>
         <p:nvPicPr>
-          <p:cNvPr id="6" name="Image 1" descr="/sessions/beautiful-vigilant-darwin/tmp/showship-deck-zktDWi/trail_mark.png">    </p:cNvPr>
+          <p:cNvPr id="6" name="Image 1" descr="/sessions/beautiful-vigilant-darwin/tmp/showship-deck-1uRcfa/trail_mark.png">    </p:cNvPr>
           <p:cNvPicPr>
             <a:picLocks noChangeAspect="1"/>
           </p:cNvPicPr>

--- a/docs/example-deck-showship.pptx
+++ b/docs/example-deck-showship.pptx
@@ -289,7 +289,7 @@
                   <c:v>2</c:v>
                 </c:pt>
                 <c:pt idx="2">
-                  <c:v>0</c:v>
+                  <c:v>1</c:v>
                 </c:pt>
               </c:numCache>
             </c:numRef>
@@ -372,7 +372,7 @@
                   <c:v>1</c:v>
                 </c:pt>
                 <c:pt idx="2">
-                  <c:v>0</c:v>
+                  <c:v>1</c:v>
                 </c:pt>
               </c:numCache>
             </c:numRef>
@@ -452,10 +452,10 @@
                   <c:v>0</c:v>
                 </c:pt>
                 <c:pt idx="1">
-                  <c:v>0</c:v>
+                  <c:v>3</c:v>
                 </c:pt>
                 <c:pt idx="2">
-                  <c:v>7</c:v>
+                  <c:v>4</c:v>
                 </c:pt>
               </c:numCache>
             </c:numRef>
@@ -2271,7 +2271,7 @@
       </p:grpSpPr>
       <p:pic>
         <p:nvPicPr>
-          <p:cNvPr id="2" name="Image 0" descr="/sessions/beautiful-vigilant-darwin/tmp/showship-deck-1uRcfa/trail_bookend.png">    </p:cNvPr>
+          <p:cNvPr id="2" name="Image 0" descr="/var/folders/lw/rmylcyvd5rjfxk9g1z9rrm8w0000gq/T/showship-deck-SxFlm7/trail_bookend.png">    </p:cNvPr>
           <p:cNvPicPr>
             <a:picLocks noChangeAspect="1"/>
           </p:cNvPicPr>
@@ -2295,7 +2295,7 @@
       </p:pic>
       <p:pic>
         <p:nvPicPr>
-          <p:cNvPr id="3" name="Image 1" descr="/sessions/beautiful-vigilant-darwin/tmp/showship-deck-1uRcfa/logo_trimmed.png">    </p:cNvPr>
+          <p:cNvPr id="3" name="Image 1" descr="/var/folders/lw/rmylcyvd5rjfxk9g1z9rrm8w0000gq/T/showship-deck-SxFlm7/logo_trimmed.png">    </p:cNvPr>
           <p:cNvPicPr>
             <a:picLocks noChangeAspect="1"/>
           </p:cNvPicPr>
@@ -2309,8 +2309,8 @@
         </p:blipFill>
         <p:spPr>
           <a:xfrm>
-            <a:off x="790475" y="658368"/>
-            <a:ext cx="522169" cy="603504"/>
+            <a:off x="790944" y="658368"/>
+            <a:ext cx="521232" cy="603504"/>
           </a:xfrm>
           <a:prstGeom prst="rect">
             <a:avLst/>
@@ -2341,17 +2341,6 @@
             <a:pPr indent="0" marL="0">
               <a:buNone/>
             </a:pPr>
-            <a:r>
-              <a:rPr lang="en-US" sz="1400" b="1" dirty="0">
-                <a:solidFill>
-                  <a:srgbClr val="FFFFFF"/>
-                </a:solidFill>
-                <a:latin typeface="Poppins" pitchFamily="34" charset="0"/>
-                <a:ea typeface="Poppins" pitchFamily="34" charset="-122"/>
-                <a:cs typeface="Poppins" pitchFamily="34" charset="-120"/>
-              </a:rPr>
-              <a:t>Acme Digital Co., Ltd.</a:t>
-            </a:r>
             <a:endParaRPr lang="en-US" sz="1400" dirty="0"/>
           </a:p>
         </p:txBody>
@@ -2381,7 +2370,7 @@
               <a:buNone/>
             </a:pPr>
             <a:r>
-              <a:rPr lang="en-US" sz="1400" b="1" spc="300" kern="0" dirty="0">
+              <a:rPr lang="en-US" sz="1400" b="1" dirty="0">
                 <a:solidFill>
                   <a:srgbClr val="FFC94A"/>
                 </a:solidFill>
@@ -2389,7 +2378,7 @@
                 <a:ea typeface="Poppins" pitchFamily="34" charset="-122"/>
                 <a:cs typeface="Poppins" pitchFamily="34" charset="-120"/>
               </a:rPr>
-              <a:t>PROGRESS REPORT</a:t>
+              <a:t>Progress report</a:t>
             </a:r>
             <a:endParaRPr lang="en-US" sz="1400" dirty="0"/>
           </a:p>
@@ -2513,7 +2502,7 @@
               <a:buNone/>
             </a:pPr>
             <a:r>
-              <a:rPr lang="en-US" sz="1000" dirty="0">
+              <a:rPr lang="en-US" sz="1100" dirty="0">
                 <a:solidFill>
                   <a:srgbClr val="B9B5E8"/>
                 </a:solidFill>
@@ -2537,7 +2526,7 @@
               </a:rPr>
               <a:t>Maya Lin @Maya</a:t>
             </a:r>
-            <a:endParaRPr lang="en-US" sz="1000" dirty="0"/>
+            <a:endParaRPr lang="en-US" sz="1100" dirty="0"/>
           </a:p>
         </p:txBody>
       </p:sp>
@@ -2597,7 +2586,7 @@
               <a:buNone/>
             </a:pPr>
             <a:r>
-              <a:rPr lang="en-US" sz="1000" dirty="0">
+              <a:rPr lang="en-US" sz="1100" dirty="0">
                 <a:solidFill>
                   <a:srgbClr val="B9B5E8"/>
                 </a:solidFill>
@@ -2621,13 +2610,13 @@
               </a:rPr>
               <a:t>October 9, 2026</a:t>
             </a:r>
-            <a:endParaRPr lang="en-US" sz="1000" dirty="0"/>
+            <a:endParaRPr lang="en-US" sz="1100" dirty="0"/>
           </a:p>
         </p:txBody>
       </p:sp>
       <p:pic>
         <p:nvPicPr>
-          <p:cNvPr id="11" name="Image 2" descr="/sessions/beautiful-vigilant-darwin/tmp/showship-deck-1uRcfa/trail_mark.png">    </p:cNvPr>
+          <p:cNvPr id="11" name="Image 2" descr="/var/folders/lw/rmylcyvd5rjfxk9g1z9rrm8w0000gq/T/showship-deck-SxFlm7/trail_mark.png">    </p:cNvPr>
           <p:cNvPicPr>
             <a:picLocks noChangeAspect="1"/>
           </p:cNvPicPr>
@@ -2736,7 +2725,7 @@
       </p:grpSpPr>
       <p:pic>
         <p:nvPicPr>
-          <p:cNvPr id="2" name="Image 0" descr="/sessions/beautiful-vigilant-darwin/tmp/showship-deck-1uRcfa/trail_corner.png">    </p:cNvPr>
+          <p:cNvPr id="2" name="Image 0" descr="/var/folders/lw/rmylcyvd5rjfxk9g1z9rrm8w0000gq/T/showship-deck-SxFlm7/trail_corner.png">    </p:cNvPr>
           <p:cNvPicPr>
             <a:picLocks noChangeAspect="1"/>
           </p:cNvPicPr>
@@ -2803,7 +2792,7 @@
               <a:buNone/>
             </a:pPr>
             <a:r>
-              <a:rPr lang="en-US" sz="1150" b="1" spc="200" kern="0" dirty="0">
+              <a:rPr lang="en-US" sz="1150" b="1" dirty="0">
                 <a:solidFill>
                   <a:srgbClr val="6C4CF5"/>
                 </a:solidFill>
@@ -2811,7 +2800,7 @@
                 <a:ea typeface="Poppins" pitchFamily="34" charset="-122"/>
                 <a:cs typeface="Poppins" pitchFamily="34" charset="-120"/>
               </a:rPr>
-              <a:t>LOOKING AHEAD</a:t>
+              <a:t>Looking Ahead</a:t>
             </a:r>
             <a:endParaRPr lang="en-US" sz="1150" dirty="0"/>
           </a:p>
@@ -2860,7 +2849,7 @@
       </p:sp>
       <p:pic>
         <p:nvPicPr>
-          <p:cNvPr id="6" name="Image 1" descr="/sessions/beautiful-vigilant-darwin/tmp/showship-deck-1uRcfa/trail_mark.png">    </p:cNvPr>
+          <p:cNvPr id="6" name="Image 1" descr="/var/folders/lw/rmylcyvd5rjfxk9g1z9rrm8w0000gq/T/showship-deck-SxFlm7/trail_mark.png">    </p:cNvPr>
           <p:cNvPicPr>
             <a:picLocks noChangeAspect="1"/>
           </p:cNvPicPr>
@@ -2907,7 +2896,7 @@
               <a:buNone/>
             </a:pPr>
             <a:r>
-              <a:rPr lang="en-US" sz="900" dirty="0">
+              <a:rPr lang="en-US" sz="1100" dirty="0">
                 <a:solidFill>
                   <a:srgbClr val="9A98B0"/>
                 </a:solidFill>
@@ -2921,7 +2910,7 @@
               <a:buNone/>
             </a:pPr>
             <a:r>
-              <a:rPr lang="en-US" sz="900" b="1" dirty="0">
+              <a:rPr lang="en-US" sz="1100" b="1" dirty="0">
                 <a:solidFill>
                   <a:srgbClr val="17153A"/>
                 </a:solidFill>
@@ -2931,7 +2920,7 @@
               </a:rPr>
               <a:t>Showship</a:t>
             </a:r>
-            <a:endParaRPr lang="en-US" sz="900" dirty="0"/>
+            <a:endParaRPr lang="en-US" sz="1100" dirty="0"/>
           </a:p>
         </p:txBody>
       </p:sp>
@@ -2960,7 +2949,7 @@
               <a:buNone/>
             </a:pPr>
             <a:r>
-              <a:rPr lang="en-US" sz="900" b="1" dirty="0">
+              <a:rPr lang="en-US" sz="1100" b="1" dirty="0">
                 <a:solidFill>
                   <a:srgbClr val="9A98B0"/>
                 </a:solidFill>
@@ -2970,7 +2959,7 @@
               </a:rPr>
               <a:t>10</a:t>
             </a:r>
-            <a:endParaRPr lang="en-US" sz="900" dirty="0"/>
+            <a:endParaRPr lang="en-US" sz="1100" dirty="0"/>
           </a:p>
         </p:txBody>
       </p:sp>
@@ -2999,7 +2988,7 @@
               <a:buNone/>
             </a:pPr>
             <a:r>
-              <a:rPr lang="en-US" sz="950" b="1" spc="200" kern="0" dirty="0">
+              <a:rPr lang="en-US" sz="1100" b="1" dirty="0">
                 <a:solidFill>
                   <a:srgbClr val="9A98B0"/>
                 </a:solidFill>
@@ -3007,9 +2996,9 @@
                 <a:ea typeface="Poppins" pitchFamily="34" charset="-122"/>
                 <a:cs typeface="Poppins" pitchFamily="34" charset="-120"/>
               </a:rPr>
-              <a:t>PROJECT / TRACK</a:t>
-            </a:r>
-            <a:endParaRPr lang="en-US" sz="950" dirty="0"/>
+              <a:t>Project / track</a:t>
+            </a:r>
+            <a:endParaRPr lang="en-US" sz="1100" dirty="0"/>
           </a:p>
         </p:txBody>
       </p:sp>
@@ -3038,7 +3027,7 @@
               <a:buNone/>
             </a:pPr>
             <a:r>
-              <a:rPr lang="en-US" sz="950" b="1" spc="200" kern="0" dirty="0">
+              <a:rPr lang="en-US" sz="1100" b="1" dirty="0">
                 <a:solidFill>
                   <a:srgbClr val="9A98B0"/>
                 </a:solidFill>
@@ -3046,9 +3035,9 @@
                 <a:ea typeface="Poppins" pitchFamily="34" charset="-122"/>
                 <a:cs typeface="Poppins" pitchFamily="34" charset="-120"/>
               </a:rPr>
-              <a:t>OWNER</a:t>
-            </a:r>
-            <a:endParaRPr lang="en-US" sz="950" dirty="0"/>
+              <a:t>Owner</a:t>
+            </a:r>
+            <a:endParaRPr lang="en-US" sz="1100" dirty="0"/>
           </a:p>
         </p:txBody>
       </p:sp>
@@ -3077,7 +3066,7 @@
               <a:buNone/>
             </a:pPr>
             <a:r>
-              <a:rPr lang="en-US" sz="950" b="1" spc="200" kern="0" dirty="0">
+              <a:rPr lang="en-US" sz="1100" b="1" dirty="0">
                 <a:solidFill>
                   <a:srgbClr val="9A98B0"/>
                 </a:solidFill>
@@ -3085,9 +3074,9 @@
                 <a:ea typeface="Poppins" pitchFamily="34" charset="-122"/>
                 <a:cs typeface="Poppins" pitchFamily="34" charset="-120"/>
               </a:rPr>
-              <a:t>NEXT FOCUS</a:t>
-            </a:r>
-            <a:endParaRPr lang="en-US" sz="950" dirty="0"/>
+              <a:t>Next focus</a:t>
+            </a:r>
+            <a:endParaRPr lang="en-US" sz="1100" dirty="0"/>
           </a:p>
         </p:txBody>
       </p:sp>
@@ -3116,7 +3105,7 @@
               <a:buNone/>
             </a:pPr>
             <a:r>
-              <a:rPr lang="en-US" sz="950" b="1" spc="200" kern="0" dirty="0">
+              <a:rPr lang="en-US" sz="1100" b="1" dirty="0">
                 <a:solidFill>
                   <a:srgbClr val="9A98B0"/>
                 </a:solidFill>
@@ -3124,9 +3113,9 @@
                 <a:ea typeface="Poppins" pitchFamily="34" charset="-122"/>
                 <a:cs typeface="Poppins" pitchFamily="34" charset="-120"/>
               </a:rPr>
-              <a:t>STATUS</a:t>
-            </a:r>
-            <a:endParaRPr lang="en-US" sz="950" dirty="0"/>
+              <a:t>Status</a:t>
+            </a:r>
+            <a:endParaRPr lang="en-US" sz="1100" dirty="0"/>
           </a:p>
         </p:txBody>
       </p:sp>
@@ -3272,7 +3261,7 @@
               <a:buNone/>
             </a:pPr>
             <a:r>
-              <a:rPr lang="en-US" sz="950" b="1" dirty="0">
+              <a:rPr lang="en-US" sz="1100" b="1" dirty="0">
                 <a:solidFill>
                   <a:srgbClr val="10A6A0"/>
                 </a:solidFill>
@@ -3282,7 +3271,7 @@
               </a:rPr>
               <a:t>LP</a:t>
             </a:r>
-            <a:endParaRPr lang="en-US" sz="950" dirty="0"/>
+            <a:endParaRPr lang="en-US" sz="1100" dirty="0"/>
           </a:p>
         </p:txBody>
       </p:sp>
@@ -3415,7 +3404,7 @@
               <a:buNone/>
             </a:pPr>
             <a:r>
-              <a:rPr lang="en-US" sz="900" b="1" spc="100" kern="0" dirty="0">
+              <a:rPr lang="en-US" sz="1100" b="1" dirty="0">
                 <a:solidFill>
                   <a:srgbClr val="10A6A0"/>
                 </a:solidFill>
@@ -3425,7 +3414,7 @@
               </a:rPr>
               <a:t>P3 · 40%</a:t>
             </a:r>
-            <a:endParaRPr lang="en-US" sz="900" dirty="0"/>
+            <a:endParaRPr lang="en-US" sz="1100" dirty="0"/>
           </a:p>
         </p:txBody>
       </p:sp>
@@ -3571,7 +3560,7 @@
               <a:buNone/>
             </a:pPr>
             <a:r>
-              <a:rPr lang="en-US" sz="950" b="1" dirty="0">
+              <a:rPr lang="en-US" sz="1100" b="1" dirty="0">
                 <a:solidFill>
                   <a:srgbClr val="10A6A0"/>
                 </a:solidFill>
@@ -3581,7 +3570,7 @@
               </a:rPr>
               <a:t>NR</a:t>
             </a:r>
-            <a:endParaRPr lang="en-US" sz="950" dirty="0"/>
+            <a:endParaRPr lang="en-US" sz="1100" dirty="0"/>
           </a:p>
         </p:txBody>
       </p:sp>
@@ -3714,7 +3703,7 @@
               <a:buNone/>
             </a:pPr>
             <a:r>
-              <a:rPr lang="en-US" sz="900" b="1" spc="100" kern="0" dirty="0">
+              <a:rPr lang="en-US" sz="1100" b="1" dirty="0">
                 <a:solidFill>
                   <a:srgbClr val="10A6A0"/>
                 </a:solidFill>
@@ -3724,7 +3713,7 @@
               </a:rPr>
               <a:t>P4 · 80%</a:t>
             </a:r>
-            <a:endParaRPr lang="en-US" sz="900" dirty="0"/>
+            <a:endParaRPr lang="en-US" sz="1100" dirty="0"/>
           </a:p>
         </p:txBody>
       </p:sp>
@@ -3870,7 +3859,7 @@
               <a:buNone/>
             </a:pPr>
             <a:r>
-              <a:rPr lang="en-US" sz="950" b="1" dirty="0">
+              <a:rPr lang="en-US" sz="1100" b="1" dirty="0">
                 <a:solidFill>
                   <a:srgbClr val="FF6B4A"/>
                 </a:solidFill>
@@ -3880,7 +3869,7 @@
               </a:rPr>
               <a:t>ML</a:t>
             </a:r>
-            <a:endParaRPr lang="en-US" sz="950" dirty="0"/>
+            <a:endParaRPr lang="en-US" sz="1100" dirty="0"/>
           </a:p>
         </p:txBody>
       </p:sp>
@@ -4013,7 +4002,7 @@
               <a:buNone/>
             </a:pPr>
             <a:r>
-              <a:rPr lang="en-US" sz="900" b="1" spc="100" kern="0" dirty="0">
+              <a:rPr lang="en-US" sz="1100" b="1" dirty="0">
                 <a:solidFill>
                   <a:srgbClr val="FF6B4A"/>
                 </a:solidFill>
@@ -4021,9 +4010,9 @@
                 <a:ea typeface="Poppins" pitchFamily="34" charset="-122"/>
                 <a:cs typeface="Poppins" pitchFamily="34" charset="-120"/>
               </a:rPr>
-              <a:t>IN PROGRESS</a:t>
-            </a:r>
-            <a:endParaRPr lang="en-US" sz="900" dirty="0"/>
+              <a:t>In progress</a:t>
+            </a:r>
+            <a:endParaRPr lang="en-US" sz="1100" dirty="0"/>
           </a:p>
         </p:txBody>
       </p:sp>
@@ -4169,7 +4158,7 @@
               <a:buNone/>
             </a:pPr>
             <a:r>
-              <a:rPr lang="en-US" sz="950" b="1" dirty="0">
+              <a:rPr lang="en-US" sz="1100" b="1" dirty="0">
                 <a:solidFill>
                   <a:srgbClr val="6C4CF5"/>
                 </a:solidFill>
@@ -4179,7 +4168,7 @@
               </a:rPr>
               <a:t>ML</a:t>
             </a:r>
-            <a:endParaRPr lang="en-US" sz="950" dirty="0"/>
+            <a:endParaRPr lang="en-US" sz="1100" dirty="0"/>
           </a:p>
         </p:txBody>
       </p:sp>
@@ -4312,7 +4301,7 @@
               <a:buNone/>
             </a:pPr>
             <a:r>
-              <a:rPr lang="en-US" sz="900" b="1" spc="100" kern="0" dirty="0">
+              <a:rPr lang="en-US" sz="1100" b="1" dirty="0">
                 <a:solidFill>
                   <a:srgbClr val="FFFFFF"/>
                 </a:solidFill>
@@ -4320,9 +4309,9 @@
                 <a:ea typeface="Poppins" pitchFamily="34" charset="-122"/>
                 <a:cs typeface="Poppins" pitchFamily="34" charset="-120"/>
               </a:rPr>
-              <a:t>DONE</a:t>
-            </a:r>
-            <a:endParaRPr lang="en-US" sz="900" dirty="0"/>
+              <a:t>Done</a:t>
+            </a:r>
+            <a:endParaRPr lang="en-US" sz="1100" dirty="0"/>
           </a:p>
         </p:txBody>
       </p:sp>
@@ -4360,7 +4349,7 @@
       </p:grpSpPr>
       <p:pic>
         <p:nvPicPr>
-          <p:cNvPr id="2" name="Image 0" descr="/sessions/beautiful-vigilant-darwin/tmp/showship-deck-1uRcfa/trail_bookend.png">    </p:cNvPr>
+          <p:cNvPr id="2" name="Image 0" descr="/var/folders/lw/rmylcyvd5rjfxk9g1z9rrm8w0000gq/T/showship-deck-SxFlm7/trail_bookend.png">    </p:cNvPr>
           <p:cNvPicPr>
             <a:picLocks noChangeAspect="1"/>
           </p:cNvPicPr>
@@ -4384,7 +4373,7 @@
       </p:pic>
       <p:pic>
         <p:nvPicPr>
-          <p:cNvPr id="3" name="Image 1" descr="/sessions/beautiful-vigilant-darwin/tmp/showship-deck-1uRcfa/logo_trimmed.png">    </p:cNvPr>
+          <p:cNvPr id="3" name="Image 1" descr="/var/folders/lw/rmylcyvd5rjfxk9g1z9rrm8w0000gq/T/showship-deck-SxFlm7/logo_trimmed.png">    </p:cNvPr>
           <p:cNvPicPr>
             <a:picLocks noChangeAspect="1"/>
           </p:cNvPicPr>
@@ -4398,8 +4387,8 @@
         </p:blipFill>
         <p:spPr>
           <a:xfrm>
-            <a:off x="790475" y="658368"/>
-            <a:ext cx="522169" cy="603504"/>
+            <a:off x="790944" y="658368"/>
+            <a:ext cx="521232" cy="603504"/>
           </a:xfrm>
           <a:prstGeom prst="rect">
             <a:avLst/>
@@ -4430,17 +4419,6 @@
             <a:pPr indent="0" marL="0">
               <a:buNone/>
             </a:pPr>
-            <a:r>
-              <a:rPr lang="en-US" sz="1400" b="1" dirty="0">
-                <a:solidFill>
-                  <a:srgbClr val="FFFFFF"/>
-                </a:solidFill>
-                <a:latin typeface="Poppins" pitchFamily="34" charset="0"/>
-                <a:ea typeface="Poppins" pitchFamily="34" charset="-122"/>
-                <a:cs typeface="Poppins" pitchFamily="34" charset="-120"/>
-              </a:rPr>
-              <a:t>Acme Digital Co., Ltd.</a:t>
-            </a:r>
             <a:endParaRPr lang="en-US" sz="1400" dirty="0"/>
           </a:p>
         </p:txBody>
@@ -4579,7 +4557,7 @@
               <a:buNone/>
             </a:pPr>
             <a:r>
-              <a:rPr lang="en-US" sz="1000" dirty="0">
+              <a:rPr lang="en-US" sz="1100" dirty="0">
                 <a:solidFill>
                   <a:srgbClr val="B9B5E8"/>
                 </a:solidFill>
@@ -4603,7 +4581,7 @@
               </a:rPr>
               <a:t>Maya Lin</a:t>
             </a:r>
-            <a:endParaRPr lang="en-US" sz="1000" dirty="0"/>
+            <a:endParaRPr lang="en-US" sz="1100" dirty="0"/>
           </a:p>
         </p:txBody>
       </p:sp>
@@ -4663,7 +4641,7 @@
               <a:buNone/>
             </a:pPr>
             <a:r>
-              <a:rPr lang="en-US" sz="1000" dirty="0">
+              <a:rPr lang="en-US" sz="1100" dirty="0">
                 <a:solidFill>
                   <a:srgbClr val="B9B5E8"/>
                 </a:solidFill>
@@ -4687,13 +4665,13 @@
               </a:rPr>
               <a:t>October 9, 2026</a:t>
             </a:r>
-            <a:endParaRPr lang="en-US" sz="1000" dirty="0"/>
+            <a:endParaRPr lang="en-US" sz="1100" dirty="0"/>
           </a:p>
         </p:txBody>
       </p:sp>
       <p:pic>
         <p:nvPicPr>
-          <p:cNvPr id="11" name="Image 2" descr="/sessions/beautiful-vigilant-darwin/tmp/showship-deck-1uRcfa/trail_mark.png">    </p:cNvPr>
+          <p:cNvPr id="11" name="Image 2" descr="/var/folders/lw/rmylcyvd5rjfxk9g1z9rrm8w0000gq/T/showship-deck-SxFlm7/trail_mark.png">    </p:cNvPr>
           <p:cNvPicPr>
             <a:picLocks noChangeAspect="1"/>
           </p:cNvPicPr>
@@ -4802,7 +4780,7 @@
       </p:grpSpPr>
       <p:pic>
         <p:nvPicPr>
-          <p:cNvPr id="2" name="Image 0" descr="/sessions/beautiful-vigilant-darwin/tmp/showship-deck-1uRcfa/trail_corner.png">    </p:cNvPr>
+          <p:cNvPr id="2" name="Image 0" descr="/var/folders/lw/rmylcyvd5rjfxk9g1z9rrm8w0000gq/T/showship-deck-SxFlm7/trail_corner.png">    </p:cNvPr>
           <p:cNvPicPr>
             <a:picLocks noChangeAspect="1"/>
           </p:cNvPicPr>
@@ -4869,7 +4847,7 @@
               <a:buNone/>
             </a:pPr>
             <a:r>
-              <a:rPr lang="en-US" sz="1150" b="1" spc="200" kern="0" dirty="0">
+              <a:rPr lang="en-US" sz="1150" b="1" dirty="0">
                 <a:solidFill>
                   <a:srgbClr val="6C4CF5"/>
                 </a:solidFill>
@@ -4877,7 +4855,7 @@
                 <a:ea typeface="Poppins" pitchFamily="34" charset="-122"/>
                 <a:cs typeface="Poppins" pitchFamily="34" charset="-120"/>
               </a:rPr>
-              <a:t>EXECUTIVE SUMMARY</a:t>
+              <a:t>Executive Summary</a:t>
             </a:r>
             <a:endParaRPr lang="en-US" sz="1150" dirty="0"/>
           </a:p>
@@ -4926,7 +4904,7 @@
       </p:sp>
       <p:pic>
         <p:nvPicPr>
-          <p:cNvPr id="6" name="Image 1" descr="/sessions/beautiful-vigilant-darwin/tmp/showship-deck-1uRcfa/trail_mark.png">    </p:cNvPr>
+          <p:cNvPr id="6" name="Image 1" descr="/var/folders/lw/rmylcyvd5rjfxk9g1z9rrm8w0000gq/T/showship-deck-SxFlm7/trail_mark.png">    </p:cNvPr>
           <p:cNvPicPr>
             <a:picLocks noChangeAspect="1"/>
           </p:cNvPicPr>
@@ -4973,7 +4951,7 @@
               <a:buNone/>
             </a:pPr>
             <a:r>
-              <a:rPr lang="en-US" sz="900" dirty="0">
+              <a:rPr lang="en-US" sz="1100" dirty="0">
                 <a:solidFill>
                   <a:srgbClr val="9A98B0"/>
                 </a:solidFill>
@@ -4987,7 +4965,7 @@
               <a:buNone/>
             </a:pPr>
             <a:r>
-              <a:rPr lang="en-US" sz="900" b="1" dirty="0">
+              <a:rPr lang="en-US" sz="1100" b="1" dirty="0">
                 <a:solidFill>
                   <a:srgbClr val="17153A"/>
                 </a:solidFill>
@@ -4997,7 +4975,7 @@
               </a:rPr>
               <a:t>Showship</a:t>
             </a:r>
-            <a:endParaRPr lang="en-US" sz="900" dirty="0"/>
+            <a:endParaRPr lang="en-US" sz="1100" dirty="0"/>
           </a:p>
         </p:txBody>
       </p:sp>
@@ -5026,7 +5004,7 @@
               <a:buNone/>
             </a:pPr>
             <a:r>
-              <a:rPr lang="en-US" sz="900" b="1" dirty="0">
+              <a:rPr lang="en-US" sz="1100" b="1" dirty="0">
                 <a:solidFill>
                   <a:srgbClr val="9A98B0"/>
                 </a:solidFill>
@@ -5036,7 +5014,7 @@
               </a:rPr>
               <a:t>2</a:t>
             </a:r>
-            <a:endParaRPr lang="en-US" sz="900" dirty="0"/>
+            <a:endParaRPr lang="en-US" sz="1100" dirty="0"/>
           </a:p>
         </p:txBody>
       </p:sp>
@@ -5143,7 +5121,7 @@
               <a:buNone/>
             </a:pPr>
             <a:r>
-              <a:rPr lang="en-US" sz="950" b="1" spc="100" kern="0" dirty="0">
+              <a:rPr lang="en-US" sz="1100" b="1" dirty="0">
                 <a:solidFill>
                   <a:srgbClr val="6C4CF5"/>
                 </a:solidFill>
@@ -5151,9 +5129,9 @@
                 <a:ea typeface="Poppins" pitchFamily="34" charset="-122"/>
                 <a:cs typeface="Poppins" pitchFamily="34" charset="-120"/>
               </a:rPr>
-              <a:t>APP STORE RELEASE</a:t>
-            </a:r>
-            <a:endParaRPr lang="en-US" sz="950" dirty="0"/>
+              <a:t>App Store Release</a:t>
+            </a:r>
+            <a:endParaRPr lang="en-US" sz="1100" dirty="0"/>
           </a:p>
         </p:txBody>
       </p:sp>
@@ -5291,7 +5269,7 @@
               <a:buNone/>
             </a:pPr>
             <a:r>
-              <a:rPr lang="en-US" sz="900" b="1" spc="100" kern="0" dirty="0">
+              <a:rPr lang="en-US" sz="1100" b="1" dirty="0">
                 <a:solidFill>
                   <a:srgbClr val="FFFFFF"/>
                 </a:solidFill>
@@ -5299,9 +5277,9 @@
                 <a:ea typeface="Poppins" pitchFamily="34" charset="-122"/>
                 <a:cs typeface="Poppins" pitchFamily="34" charset="-120"/>
               </a:rPr>
-              <a:t>COMPLETED</a:t>
-            </a:r>
-            <a:endParaRPr lang="en-US" sz="900" dirty="0"/>
+              <a:t>Completed</a:t>
+            </a:r>
+            <a:endParaRPr lang="en-US" sz="1100" dirty="0"/>
           </a:p>
         </p:txBody>
       </p:sp>
@@ -5493,7 +5471,7 @@
               <a:buNone/>
             </a:pPr>
             <a:r>
-              <a:rPr lang="en-US" sz="950" b="1" spc="100" kern="0" dirty="0">
+              <a:rPr lang="en-US" sz="1100" b="1" dirty="0">
                 <a:solidFill>
                   <a:srgbClr val="10A6A0"/>
                 </a:solidFill>
@@ -5501,9 +5479,9 @@
                 <a:ea typeface="Poppins" pitchFamily="34" charset="-122"/>
                 <a:cs typeface="Poppins" pitchFamily="34" charset="-120"/>
               </a:rPr>
-              <a:t>CLINICBOOK · PATIENT &amp; CLINIC</a:t>
-            </a:r>
-            <a:endParaRPr lang="en-US" sz="950" dirty="0"/>
+              <a:t>ClinicBook · Patient &amp; Clinic</a:t>
+            </a:r>
+            <a:endParaRPr lang="en-US" sz="1100" dirty="0"/>
           </a:p>
         </p:txBody>
       </p:sp>
@@ -5641,7 +5619,7 @@
               <a:buNone/>
             </a:pPr>
             <a:r>
-              <a:rPr lang="en-US" sz="900" b="1" spc="100" kern="0" dirty="0">
+              <a:rPr lang="en-US" sz="1100" b="1" dirty="0">
                 <a:solidFill>
                   <a:srgbClr val="10A6A0"/>
                 </a:solidFill>
@@ -5649,9 +5627,9 @@
                 <a:ea typeface="Poppins" pitchFamily="34" charset="-122"/>
                 <a:cs typeface="Poppins" pitchFamily="34" charset="-120"/>
               </a:rPr>
-              <a:t>ON TRACK</a:t>
-            </a:r>
-            <a:endParaRPr lang="en-US" sz="900" dirty="0"/>
+              <a:t>On track</a:t>
+            </a:r>
+            <a:endParaRPr lang="en-US" sz="1100" dirty="0"/>
           </a:p>
         </p:txBody>
       </p:sp>
@@ -5843,7 +5821,7 @@
               <a:buNone/>
             </a:pPr>
             <a:r>
-              <a:rPr lang="en-US" sz="950" b="1" spc="100" kern="0" dirty="0">
+              <a:rPr lang="en-US" sz="1100" b="1" dirty="0">
                 <a:solidFill>
                   <a:srgbClr val="FF6B4A"/>
                 </a:solidFill>
@@ -5851,9 +5829,9 @@
                 <a:ea typeface="Poppins" pitchFamily="34" charset="-122"/>
                 <a:cs typeface="Poppins" pitchFamily="34" charset="-120"/>
               </a:rPr>
-              <a:t>PULSEBOARD ANALYTICS</a:t>
-            </a:r>
-            <a:endParaRPr lang="en-US" sz="950" dirty="0"/>
+              <a:t>PulseBoard Analytics</a:t>
+            </a:r>
+            <a:endParaRPr lang="en-US" sz="1100" dirty="0"/>
           </a:p>
         </p:txBody>
       </p:sp>
@@ -5987,7 +5965,7 @@
               <a:buNone/>
             </a:pPr>
             <a:r>
-              <a:rPr lang="en-US" sz="900" b="1" spc="100" kern="0" dirty="0">
+              <a:rPr lang="en-US" sz="1100" b="1" dirty="0">
                 <a:solidFill>
                   <a:srgbClr val="FF6B4A"/>
                 </a:solidFill>
@@ -5995,9 +5973,9 @@
                 <a:ea typeface="Poppins" pitchFamily="34" charset="-122"/>
                 <a:cs typeface="Poppins" pitchFamily="34" charset="-120"/>
               </a:rPr>
-              <a:t>ON TRACK</a:t>
-            </a:r>
-            <a:endParaRPr lang="en-US" sz="900" dirty="0"/>
+              <a:t>On track</a:t>
+            </a:r>
+            <a:endParaRPr lang="en-US" sz="1100" dirty="0"/>
           </a:p>
         </p:txBody>
       </p:sp>
@@ -6080,7 +6058,7 @@
                 <a:ea typeface="Arial" pitchFamily="34" charset="-122"/>
                 <a:cs typeface="Arial" pitchFamily="34" charset="-120"/>
               </a:rPr>
-              <a:t>Data transfer finished; usage tracking is being rolled out.</a:t>
+              <a:t>Data transfer to the new system finished; usage tracking is being rolled out.</a:t>
             </a:r>
             <a:endParaRPr lang="en-US" sz="1150" dirty="0"/>
           </a:p>
@@ -6155,7 +6133,7 @@
               <a:buNone/>
             </a:pPr>
             <a:r>
-              <a:rPr lang="en-US" sz="1050" b="1" spc="150" kern="0" dirty="0">
+              <a:rPr lang="en-US" sz="1100" b="1" dirty="0">
                 <a:solidFill>
                   <a:srgbClr val="17153A"/>
                 </a:solidFill>
@@ -6163,9 +6141,9 @@
                 <a:ea typeface="Poppins" pitchFamily="34" charset="-122"/>
                 <a:cs typeface="Poppins" pitchFamily="34" charset="-120"/>
               </a:rPr>
-              <a:t>KEY UPDATE</a:t>
-            </a:r>
-            <a:endParaRPr lang="en-US" sz="1050" dirty="0"/>
+              <a:t>Key update</a:t>
+            </a:r>
+            <a:endParaRPr lang="en-US" sz="1100" dirty="0"/>
           </a:p>
         </p:txBody>
       </p:sp>
@@ -6244,7 +6222,7 @@
       </p:grpSpPr>
       <p:pic>
         <p:nvPicPr>
-          <p:cNvPr id="2" name="Image 0" descr="/sessions/beautiful-vigilant-darwin/tmp/showship-deck-1uRcfa/trail_corner.png">    </p:cNvPr>
+          <p:cNvPr id="2" name="Image 0" descr="/var/folders/lw/rmylcyvd5rjfxk9g1z9rrm8w0000gq/T/showship-deck-SxFlm7/trail_corner.png">    </p:cNvPr>
           <p:cNvPicPr>
             <a:picLocks noChangeAspect="1"/>
           </p:cNvPicPr>
@@ -6311,7 +6289,7 @@
               <a:buNone/>
             </a:pPr>
             <a:r>
-              <a:rPr lang="en-US" sz="1150" b="1" spc="200" kern="0" dirty="0">
+              <a:rPr lang="en-US" sz="1150" b="1" dirty="0">
                 <a:solidFill>
                   <a:srgbClr val="6C4CF5"/>
                 </a:solidFill>
@@ -6319,7 +6297,7 @@
                 <a:ea typeface="Poppins" pitchFamily="34" charset="-122"/>
                 <a:cs typeface="Poppins" pitchFamily="34" charset="-120"/>
               </a:rPr>
-              <a:t>MOBILE · APP STORE RELEASE</a:t>
+              <a:t>Mobile · App Store Release</a:t>
             </a:r>
             <a:endParaRPr lang="en-US" sz="1150" dirty="0"/>
           </a:p>
@@ -6368,7 +6346,7 @@
       </p:sp>
       <p:pic>
         <p:nvPicPr>
-          <p:cNvPr id="6" name="Image 1" descr="/sessions/beautiful-vigilant-darwin/tmp/showship-deck-1uRcfa/trail_mark.png">    </p:cNvPr>
+          <p:cNvPr id="6" name="Image 1" descr="/var/folders/lw/rmylcyvd5rjfxk9g1z9rrm8w0000gq/T/showship-deck-SxFlm7/trail_mark.png">    </p:cNvPr>
           <p:cNvPicPr>
             <a:picLocks noChangeAspect="1"/>
           </p:cNvPicPr>
@@ -6415,7 +6393,7 @@
               <a:buNone/>
             </a:pPr>
             <a:r>
-              <a:rPr lang="en-US" sz="900" dirty="0">
+              <a:rPr lang="en-US" sz="1100" dirty="0">
                 <a:solidFill>
                   <a:srgbClr val="9A98B0"/>
                 </a:solidFill>
@@ -6429,7 +6407,7 @@
               <a:buNone/>
             </a:pPr>
             <a:r>
-              <a:rPr lang="en-US" sz="900" b="1" dirty="0">
+              <a:rPr lang="en-US" sz="1100" b="1" dirty="0">
                 <a:solidFill>
                   <a:srgbClr val="17153A"/>
                 </a:solidFill>
@@ -6439,7 +6417,7 @@
               </a:rPr>
               <a:t>Showship</a:t>
             </a:r>
-            <a:endParaRPr lang="en-US" sz="900" dirty="0"/>
+            <a:endParaRPr lang="en-US" sz="1100" dirty="0"/>
           </a:p>
         </p:txBody>
       </p:sp>
@@ -6468,7 +6446,7 @@
               <a:buNone/>
             </a:pPr>
             <a:r>
-              <a:rPr lang="en-US" sz="900" b="1" dirty="0">
+              <a:rPr lang="en-US" sz="1100" b="1" dirty="0">
                 <a:solidFill>
                   <a:srgbClr val="9A98B0"/>
                 </a:solidFill>
@@ -6478,7 +6456,7 @@
               </a:rPr>
               <a:t>3</a:t>
             </a:r>
-            <a:endParaRPr lang="en-US" sz="900" dirty="0"/>
+            <a:endParaRPr lang="en-US" sz="1100" dirty="0"/>
           </a:p>
         </p:txBody>
       </p:sp>
@@ -6529,7 +6507,7 @@
               <a:buNone/>
             </a:pPr>
             <a:r>
-              <a:rPr lang="en-US" sz="900" b="1" spc="100" kern="0" dirty="0">
+              <a:rPr lang="en-US" sz="1100" b="1" dirty="0">
                 <a:solidFill>
                   <a:srgbClr val="FFFFFF"/>
                 </a:solidFill>
@@ -6537,15 +6515,15 @@
                 <a:ea typeface="Poppins" pitchFamily="34" charset="-122"/>
                 <a:cs typeface="Poppins" pitchFamily="34" charset="-120"/>
               </a:rPr>
-              <a:t>BLOCKER RESOLVED</a:t>
-            </a:r>
-            <a:endParaRPr lang="en-US" sz="900" dirty="0"/>
+              <a:t>Blocker resolved</a:t>
+            </a:r>
+            <a:endParaRPr lang="en-US" sz="1100" dirty="0"/>
           </a:p>
         </p:txBody>
       </p:sp>
       <p:pic>
         <p:nvPicPr>
-          <p:cNvPr id="11" name="Image 2" descr="/sessions/beautiful-vigilant-darwin/tmp/showship-deck-1uRcfa/trail_tl_1.png">    </p:cNvPr>
+          <p:cNvPr id="11" name="Image 2" descr="/var/folders/lw/rmylcyvd5rjfxk9g1z9rrm8w0000gq/T/showship-deck-SxFlm7/trail_tl_1.png">    </p:cNvPr>
           <p:cNvPicPr>
             <a:picLocks noChangeAspect="1"/>
           </p:cNvPicPr>
@@ -6575,7 +6553,7 @@
         </p:nvSpPr>
         <p:spPr>
           <a:xfrm>
-            <a:off x="1005840" y="2404872"/>
+            <a:off x="1645920" y="2404872"/>
             <a:ext cx="548640" cy="548640"/>
           </a:xfrm>
           <a:prstGeom prst="ellipse">
@@ -6607,7 +6585,7 @@
         </p:nvSpPr>
         <p:spPr>
           <a:xfrm>
-            <a:off x="1005840" y="2404872"/>
+            <a:off x="1645920" y="2404872"/>
             <a:ext cx="548640" cy="548640"/>
           </a:xfrm>
           <a:prstGeom prst="rect">
@@ -6646,7 +6624,7 @@
         </p:nvSpPr>
         <p:spPr>
           <a:xfrm>
-            <a:off x="0" y="3794760"/>
+            <a:off x="640080" y="3794760"/>
             <a:ext cx="2560320" cy="237744"/>
           </a:xfrm>
           <a:prstGeom prst="rect">
@@ -6663,7 +6641,7 @@
               <a:buNone/>
             </a:pPr>
             <a:r>
-              <a:rPr lang="en-US" sz="950" b="1" spc="150" kern="0" dirty="0">
+              <a:rPr lang="en-US" sz="1100" b="1" dirty="0">
                 <a:solidFill>
                   <a:srgbClr val="F0503C"/>
                 </a:solidFill>
@@ -6671,9 +6649,9 @@
                 <a:ea typeface="Poppins" pitchFamily="34" charset="-122"/>
                 <a:cs typeface="Poppins" pitchFamily="34" charset="-120"/>
               </a:rPr>
-              <a:t>LAST WEEK</a:t>
-            </a:r>
-            <a:endParaRPr lang="en-US" sz="950" dirty="0"/>
+              <a:t>Last week</a:t>
+            </a:r>
+            <a:endParaRPr lang="en-US" sz="1100" dirty="0"/>
           </a:p>
         </p:txBody>
       </p:sp>
@@ -6685,7 +6663,7 @@
         </p:nvSpPr>
         <p:spPr>
           <a:xfrm>
-            <a:off x="0" y="4050792"/>
+            <a:off x="640080" y="4050792"/>
             <a:ext cx="2560320" cy="365760"/>
           </a:xfrm>
           <a:prstGeom prst="rect">
@@ -6726,7 +6704,7 @@
         </p:nvSpPr>
         <p:spPr>
           <a:xfrm>
-            <a:off x="0" y="4434840"/>
+            <a:off x="640080" y="4434840"/>
             <a:ext cx="2560320" cy="731520"/>
           </a:xfrm>
           <a:prstGeom prst="rect">
@@ -6770,7 +6748,7 @@
         </p:nvSpPr>
         <p:spPr>
           <a:xfrm>
-            <a:off x="4206240" y="2807208"/>
+            <a:off x="4429658" y="2807208"/>
             <a:ext cx="548640" cy="548640"/>
           </a:xfrm>
           <a:prstGeom prst="ellipse">
@@ -6802,7 +6780,7 @@
         </p:nvSpPr>
         <p:spPr>
           <a:xfrm>
-            <a:off x="4206240" y="2807208"/>
+            <a:off x="4429658" y="2807208"/>
             <a:ext cx="548640" cy="548640"/>
           </a:xfrm>
           <a:prstGeom prst="rect">
@@ -6841,7 +6819,7 @@
         </p:nvSpPr>
         <p:spPr>
           <a:xfrm>
-            <a:off x="3200400" y="3794760"/>
+            <a:off x="3423818" y="3794760"/>
             <a:ext cx="2560320" cy="237744"/>
           </a:xfrm>
           <a:prstGeom prst="rect">
@@ -6858,7 +6836,7 @@
               <a:buNone/>
             </a:pPr>
             <a:r>
-              <a:rPr lang="en-US" sz="950" b="1" spc="150" kern="0" dirty="0">
+              <a:rPr lang="en-US" sz="1100" b="1" dirty="0">
                 <a:solidFill>
                   <a:srgbClr val="6C4CF5"/>
                 </a:solidFill>
@@ -6866,9 +6844,9 @@
                 <a:ea typeface="Poppins" pitchFamily="34" charset="-122"/>
                 <a:cs typeface="Poppins" pitchFamily="34" charset="-120"/>
               </a:rPr>
-              <a:t>THIS WEEK</a:t>
-            </a:r>
-            <a:endParaRPr lang="en-US" sz="950" dirty="0"/>
+              <a:t>This week</a:t>
+            </a:r>
+            <a:endParaRPr lang="en-US" sz="1100" dirty="0"/>
           </a:p>
         </p:txBody>
       </p:sp>
@@ -6880,7 +6858,7 @@
         </p:nvSpPr>
         <p:spPr>
           <a:xfrm>
-            <a:off x="3200400" y="4050792"/>
+            <a:off x="3423818" y="4050792"/>
             <a:ext cx="2560320" cy="365760"/>
           </a:xfrm>
           <a:prstGeom prst="rect">
@@ -6921,7 +6899,7 @@
         </p:nvSpPr>
         <p:spPr>
           <a:xfrm>
-            <a:off x="3200400" y="4434840"/>
+            <a:off x="3423818" y="4434840"/>
             <a:ext cx="2560320" cy="731520"/>
           </a:xfrm>
           <a:prstGeom prst="rect">
@@ -6965,7 +6943,7 @@
         </p:nvSpPr>
         <p:spPr>
           <a:xfrm>
-            <a:off x="7406640" y="2404872"/>
+            <a:off x="7213397" y="2404872"/>
             <a:ext cx="548640" cy="548640"/>
           </a:xfrm>
           <a:prstGeom prst="ellipse">
@@ -6997,7 +6975,7 @@
         </p:nvSpPr>
         <p:spPr>
           <a:xfrm>
-            <a:off x="7406640" y="2404872"/>
+            <a:off x="7213397" y="2404872"/>
             <a:ext cx="548640" cy="548640"/>
           </a:xfrm>
           <a:prstGeom prst="rect">
@@ -7036,7 +7014,7 @@
         </p:nvSpPr>
         <p:spPr>
           <a:xfrm>
-            <a:off x="6400800" y="3794760"/>
+            <a:off x="6207557" y="3794760"/>
             <a:ext cx="2560320" cy="237744"/>
           </a:xfrm>
           <a:prstGeom prst="rect">
@@ -7053,7 +7031,7 @@
               <a:buNone/>
             </a:pPr>
             <a:r>
-              <a:rPr lang="en-US" sz="950" b="1" spc="150" kern="0" dirty="0">
+              <a:rPr lang="en-US" sz="1100" b="1" dirty="0">
                 <a:solidFill>
                   <a:srgbClr val="6C4CF5"/>
                 </a:solidFill>
@@ -7061,9 +7039,9 @@
                 <a:ea typeface="Poppins" pitchFamily="34" charset="-122"/>
                 <a:cs typeface="Poppins" pitchFamily="34" charset="-120"/>
               </a:rPr>
-              <a:t>THIS WEEK</a:t>
-            </a:r>
-            <a:endParaRPr lang="en-US" sz="950" dirty="0"/>
+              <a:t>This week</a:t>
+            </a:r>
+            <a:endParaRPr lang="en-US" sz="1100" dirty="0"/>
           </a:p>
         </p:txBody>
       </p:sp>
@@ -7075,7 +7053,7 @@
         </p:nvSpPr>
         <p:spPr>
           <a:xfrm>
-            <a:off x="6400800" y="4050792"/>
+            <a:off x="6207557" y="4050792"/>
             <a:ext cx="2560320" cy="365760"/>
           </a:xfrm>
           <a:prstGeom prst="rect">
@@ -7116,7 +7094,7 @@
         </p:nvSpPr>
         <p:spPr>
           <a:xfrm>
-            <a:off x="6400800" y="4434840"/>
+            <a:off x="6207557" y="4434840"/>
             <a:ext cx="2560320" cy="731520"/>
           </a:xfrm>
           <a:prstGeom prst="rect">
@@ -7160,7 +7138,7 @@
         </p:nvSpPr>
         <p:spPr>
           <a:xfrm>
-            <a:off x="10607040" y="2807208"/>
+            <a:off x="9997135" y="2807208"/>
             <a:ext cx="548640" cy="548640"/>
           </a:xfrm>
           <a:prstGeom prst="ellipse">
@@ -7192,7 +7170,7 @@
         </p:nvSpPr>
         <p:spPr>
           <a:xfrm>
-            <a:off x="10607040" y="2807208"/>
+            <a:off x="9997135" y="2807208"/>
             <a:ext cx="548640" cy="548640"/>
           </a:xfrm>
           <a:prstGeom prst="rect">
@@ -7231,7 +7209,7 @@
         </p:nvSpPr>
         <p:spPr>
           <a:xfrm>
-            <a:off x="9601200" y="3794760"/>
+            <a:off x="8991295" y="3794760"/>
             <a:ext cx="2560320" cy="237744"/>
           </a:xfrm>
           <a:prstGeom prst="rect">
@@ -7248,7 +7226,7 @@
               <a:buNone/>
             </a:pPr>
             <a:r>
-              <a:rPr lang="en-US" sz="950" b="1" spc="150" kern="0" dirty="0">
+              <a:rPr lang="en-US" sz="1100" b="1" dirty="0">
                 <a:solidFill>
                   <a:srgbClr val="6C4CF5"/>
                 </a:solidFill>
@@ -7256,9 +7234,9 @@
                 <a:ea typeface="Poppins" pitchFamily="34" charset="-122"/>
                 <a:cs typeface="Poppins" pitchFamily="34" charset="-120"/>
               </a:rPr>
-              <a:t>THIS WEEK</a:t>
-            </a:r>
-            <a:endParaRPr lang="en-US" sz="950" dirty="0"/>
+              <a:t>This week</a:t>
+            </a:r>
+            <a:endParaRPr lang="en-US" sz="1100" dirty="0"/>
           </a:p>
         </p:txBody>
       </p:sp>
@@ -7270,7 +7248,7 @@
         </p:nvSpPr>
         <p:spPr>
           <a:xfrm>
-            <a:off x="9601200" y="4050792"/>
+            <a:off x="8991295" y="4050792"/>
             <a:ext cx="2560320" cy="365760"/>
           </a:xfrm>
           <a:prstGeom prst="rect">
@@ -7311,7 +7289,7 @@
         </p:nvSpPr>
         <p:spPr>
           <a:xfrm>
-            <a:off x="9601200" y="4434840"/>
+            <a:off x="8991295" y="4434840"/>
             <a:ext cx="2560320" cy="731520"/>
           </a:xfrm>
           <a:prstGeom prst="rect">
@@ -7416,7 +7394,7 @@
               <a:buNone/>
             </a:pPr>
             <a:r>
-              <a:rPr lang="en-US" sz="950" b="1" spc="100" kern="0" dirty="0">
+              <a:rPr lang="en-US" sz="1100" b="1" dirty="0">
                 <a:solidFill>
                   <a:srgbClr val="FFFFFF"/>
                 </a:solidFill>
@@ -7424,9 +7402,9 @@
                 <a:ea typeface="Poppins" pitchFamily="34" charset="-122"/>
                 <a:cs typeface="Poppins" pitchFamily="34" charset="-120"/>
               </a:rPr>
-              <a:t>BUSINESS IMPACT</a:t>
-            </a:r>
-            <a:endParaRPr lang="en-US" sz="950" dirty="0"/>
+              <a:t>Business impact</a:t>
+            </a:r>
+            <a:endParaRPr lang="en-US" sz="1100" dirty="0"/>
           </a:p>
         </p:txBody>
       </p:sp>
@@ -7505,7 +7483,7 @@
       </p:grpSpPr>
       <p:pic>
         <p:nvPicPr>
-          <p:cNvPr id="2" name="Image 0" descr="/sessions/beautiful-vigilant-darwin/tmp/showship-deck-1uRcfa/trail_corner.png">    </p:cNvPr>
+          <p:cNvPr id="2" name="Image 0" descr="/var/folders/lw/rmylcyvd5rjfxk9g1z9rrm8w0000gq/T/showship-deck-SxFlm7/trail_corner.png">    </p:cNvPr>
           <p:cNvPicPr>
             <a:picLocks noChangeAspect="1"/>
           </p:cNvPicPr>
@@ -7572,7 +7550,7 @@
               <a:buNone/>
             </a:pPr>
             <a:r>
-              <a:rPr lang="en-US" sz="1150" b="1" spc="200" kern="0" dirty="0">
+              <a:rPr lang="en-US" sz="1150" b="1" dirty="0">
                 <a:solidFill>
                   <a:srgbClr val="6C4CF5"/>
                 </a:solidFill>
@@ -7580,7 +7558,7 @@
                 <a:ea typeface="Poppins" pitchFamily="34" charset="-122"/>
                 <a:cs typeface="Poppins" pitchFamily="34" charset="-120"/>
               </a:rPr>
-              <a:t>CLINICBOOK · PROGRESS OVERVIEW</a:t>
+              <a:t>ClinicBook · Progress Overview</a:t>
             </a:r>
             <a:endParaRPr lang="en-US" sz="1150" dirty="0"/>
           </a:p>
@@ -7629,7 +7607,7 @@
       </p:sp>
       <p:pic>
         <p:nvPicPr>
-          <p:cNvPr id="6" name="Image 1" descr="/sessions/beautiful-vigilant-darwin/tmp/showship-deck-1uRcfa/trail_mark.png">    </p:cNvPr>
+          <p:cNvPr id="6" name="Image 1" descr="/var/folders/lw/rmylcyvd5rjfxk9g1z9rrm8w0000gq/T/showship-deck-SxFlm7/trail_mark.png">    </p:cNvPr>
           <p:cNvPicPr>
             <a:picLocks noChangeAspect="1"/>
           </p:cNvPicPr>
@@ -7676,7 +7654,7 @@
               <a:buNone/>
             </a:pPr>
             <a:r>
-              <a:rPr lang="en-US" sz="900" dirty="0">
+              <a:rPr lang="en-US" sz="1100" dirty="0">
                 <a:solidFill>
                   <a:srgbClr val="9A98B0"/>
                 </a:solidFill>
@@ -7690,7 +7668,7 @@
               <a:buNone/>
             </a:pPr>
             <a:r>
-              <a:rPr lang="en-US" sz="900" b="1" dirty="0">
+              <a:rPr lang="en-US" sz="1100" b="1" dirty="0">
                 <a:solidFill>
                   <a:srgbClr val="17153A"/>
                 </a:solidFill>
@@ -7700,7 +7678,7 @@
               </a:rPr>
               <a:t>Showship</a:t>
             </a:r>
-            <a:endParaRPr lang="en-US" sz="900" dirty="0"/>
+            <a:endParaRPr lang="en-US" sz="1100" dirty="0"/>
           </a:p>
         </p:txBody>
       </p:sp>
@@ -7729,7 +7707,7 @@
               <a:buNone/>
             </a:pPr>
             <a:r>
-              <a:rPr lang="en-US" sz="900" b="1" dirty="0">
+              <a:rPr lang="en-US" sz="1100" b="1" dirty="0">
                 <a:solidFill>
                   <a:srgbClr val="9A98B0"/>
                 </a:solidFill>
@@ -7739,7 +7717,7 @@
               </a:rPr>
               <a:t>4</a:t>
             </a:r>
-            <a:endParaRPr lang="en-US" sz="900" dirty="0"/>
+            <a:endParaRPr lang="en-US" sz="1100" dirty="0"/>
           </a:p>
         </p:txBody>
       </p:sp>
@@ -7969,7 +7947,7 @@
               <a:buNone/>
             </a:pPr>
             <a:r>
-              <a:rPr lang="en-US" sz="950" i="1" dirty="0">
+              <a:rPr lang="en-US" sz="1100" i="1" dirty="0">
                 <a:solidFill>
                   <a:srgbClr val="9A98B0"/>
                 </a:solidFill>
@@ -7979,7 +7957,7 @@
               </a:rPr>
               <a:t>Progress = average completion of each track's four phases.</a:t>
             </a:r>
-            <a:endParaRPr lang="en-US" sz="950" dirty="0"/>
+            <a:endParaRPr lang="en-US" sz="1100" dirty="0"/>
           </a:p>
         </p:txBody>
       </p:sp>
@@ -8170,7 +8148,7 @@
               <a:buNone/>
             </a:pPr>
             <a:r>
-              <a:rPr lang="en-US" sz="1000" dirty="0">
+              <a:rPr lang="en-US" sz="1100" dirty="0">
                 <a:solidFill>
                   <a:srgbClr val="9A98B0"/>
                 </a:solidFill>
@@ -8180,7 +8158,7 @@
               </a:rPr>
               <a:t>Owner: Leo Park @Leo</a:t>
             </a:r>
-            <a:endParaRPr lang="en-US" sz="1000" dirty="0"/>
+            <a:endParaRPr lang="en-US" sz="1100" dirty="0"/>
           </a:p>
         </p:txBody>
       </p:sp>
@@ -8371,7 +8349,7 @@
               <a:buNone/>
             </a:pPr>
             <a:r>
-              <a:rPr lang="en-US" sz="1000" dirty="0">
+              <a:rPr lang="en-US" sz="1100" dirty="0">
                 <a:solidFill>
                   <a:srgbClr val="9A98B0"/>
                 </a:solidFill>
@@ -8381,7 +8359,7 @@
               </a:rPr>
               <a:t>Owner: Nina Rao @Nina</a:t>
             </a:r>
-            <a:endParaRPr lang="en-US" sz="1000" dirty="0"/>
+            <a:endParaRPr lang="en-US" sz="1100" dirty="0"/>
           </a:p>
         </p:txBody>
       </p:sp>
@@ -8444,7 +8422,7 @@
               <a:buNone/>
             </a:pPr>
             <a:r>
-              <a:rPr lang="en-US" sz="950" b="1" spc="200" kern="0" dirty="0">
+              <a:rPr lang="en-US" sz="1100" b="1" dirty="0">
                 <a:solidFill>
                   <a:srgbClr val="9A98B0"/>
                 </a:solidFill>
@@ -8452,9 +8430,9 @@
                 <a:ea typeface="Poppins" pitchFamily="34" charset="-122"/>
                 <a:cs typeface="Poppins" pitchFamily="34" charset="-120"/>
               </a:rPr>
-              <a:t>PHASES</a:t>
-            </a:r>
-            <a:endParaRPr lang="en-US" sz="950" dirty="0"/>
+              <a:t>Phases</a:t>
+            </a:r>
+            <a:endParaRPr lang="en-US" sz="1100" dirty="0"/>
           </a:p>
         </p:txBody>
       </p:sp>
@@ -8673,18 +8651,16 @@
         <p:spPr>
           <a:xfrm>
             <a:off x="6236208" y="5394960"/>
-            <a:ext cx="1517904" cy="457200"/>
-          </a:xfrm>
-          <a:prstGeom prst="rect">
-            <a:avLst/>
-          </a:prstGeom>
-          <a:noFill/>
-          <a:ln/>
-        </p:spPr>
-        <p:txBody>
-          <a:bodyPr wrap="square" lIns="0" tIns="0" rIns="0" bIns="0" rtlCol="0" anchor="ctr">
-            <a:normAutofit/>
-          </a:bodyPr>
+            <a:ext cx="1517904" cy="777240"/>
+          </a:xfrm>
+          <a:prstGeom prst="rect">
+            <a:avLst/>
+          </a:prstGeom>
+          <a:noFill/>
+          <a:ln/>
+        </p:spPr>
+        <p:txBody>
+          <a:bodyPr wrap="square" lIns="0" tIns="0" rIns="0" bIns="0" rtlCol="0" anchor="t"/>
           <a:lstStyle/>
           <a:p>
             <a:pPr indent="0" marL="0">
@@ -8701,11 +8677,14 @@
               </a:rPr>
               <a:t>4</a:t>
             </a:r>
+            <a:endParaRPr lang="en-US" sz="2000" dirty="0"/>
+          </a:p>
+          <a:p>
             <a:pPr indent="0" marL="0">
               <a:buNone/>
             </a:pPr>
             <a:r>
-              <a:rPr lang="en-US" sz="1050" dirty="0">
+              <a:rPr lang="en-US" sz="1100" dirty="0">
                 <a:solidFill>
                   <a:srgbClr val="55536E"/>
                 </a:solidFill>
@@ -8713,7 +8692,7 @@
                 <a:ea typeface="Poppins" pitchFamily="34" charset="-122"/>
                 <a:cs typeface="Poppins" pitchFamily="34" charset="-120"/>
               </a:rPr>
-              <a:t>  Phases Completed</a:t>
+              <a:t>Phases Completed</a:t>
             </a:r>
             <a:endParaRPr lang="en-US" sz="2000" dirty="0"/>
           </a:p>
@@ -8748,18 +8727,16 @@
         <p:spPr>
           <a:xfrm>
             <a:off x="7982712" y="5394960"/>
-            <a:ext cx="1517904" cy="457200"/>
-          </a:xfrm>
-          <a:prstGeom prst="rect">
-            <a:avLst/>
-          </a:prstGeom>
-          <a:noFill/>
-          <a:ln/>
-        </p:spPr>
-        <p:txBody>
-          <a:bodyPr wrap="square" lIns="0" tIns="0" rIns="0" bIns="0" rtlCol="0" anchor="ctr">
-            <a:normAutofit/>
-          </a:bodyPr>
+            <a:ext cx="1517904" cy="777240"/>
+          </a:xfrm>
+          <a:prstGeom prst="rect">
+            <a:avLst/>
+          </a:prstGeom>
+          <a:noFill/>
+          <a:ln/>
+        </p:spPr>
+        <p:txBody>
+          <a:bodyPr wrap="square" lIns="0" tIns="0" rIns="0" bIns="0" rtlCol="0" anchor="t"/>
           <a:lstStyle/>
           <a:p>
             <a:pPr indent="0" marL="0">
@@ -8776,11 +8753,14 @@
               </a:rPr>
               <a:t>2</a:t>
             </a:r>
+            <a:endParaRPr lang="en-US" sz="2000" dirty="0"/>
+          </a:p>
+          <a:p>
             <a:pPr indent="0" marL="0">
               <a:buNone/>
             </a:pPr>
             <a:r>
-              <a:rPr lang="en-US" sz="1050" dirty="0">
+              <a:rPr lang="en-US" sz="1100" dirty="0">
                 <a:solidFill>
                   <a:srgbClr val="55536E"/>
                 </a:solidFill>
@@ -8788,7 +8768,7 @@
                 <a:ea typeface="Poppins" pitchFamily="34" charset="-122"/>
                 <a:cs typeface="Poppins" pitchFamily="34" charset="-120"/>
               </a:rPr>
-              <a:t>  Phases In Progress</a:t>
+              <a:t>Phases In Progress</a:t>
             </a:r>
             <a:endParaRPr lang="en-US" sz="2000" dirty="0"/>
           </a:p>
@@ -8823,18 +8803,16 @@
         <p:spPr>
           <a:xfrm>
             <a:off x="9729216" y="5394960"/>
-            <a:ext cx="1517904" cy="457200"/>
-          </a:xfrm>
-          <a:prstGeom prst="rect">
-            <a:avLst/>
-          </a:prstGeom>
-          <a:noFill/>
-          <a:ln/>
-        </p:spPr>
-        <p:txBody>
-          <a:bodyPr wrap="square" lIns="0" tIns="0" rIns="0" bIns="0" rtlCol="0" anchor="ctr">
-            <a:normAutofit/>
-          </a:bodyPr>
+            <a:ext cx="1517904" cy="777240"/>
+          </a:xfrm>
+          <a:prstGeom prst="rect">
+            <a:avLst/>
+          </a:prstGeom>
+          <a:noFill/>
+          <a:ln/>
+        </p:spPr>
+        <p:txBody>
+          <a:bodyPr wrap="square" lIns="0" tIns="0" rIns="0" bIns="0" rtlCol="0" anchor="t"/>
           <a:lstStyle/>
           <a:p>
             <a:pPr indent="0" marL="0">
@@ -8851,11 +8829,14 @@
               </a:rPr>
               <a:t>2</a:t>
             </a:r>
+            <a:endParaRPr lang="en-US" sz="2000" dirty="0"/>
+          </a:p>
+          <a:p>
             <a:pPr indent="0" marL="0">
               <a:buNone/>
             </a:pPr>
             <a:r>
-              <a:rPr lang="en-US" sz="1050" dirty="0">
+              <a:rPr lang="en-US" sz="1100" dirty="0">
                 <a:solidFill>
                   <a:srgbClr val="55536E"/>
                 </a:solidFill>
@@ -8863,7 +8844,7 @@
                 <a:ea typeface="Poppins" pitchFamily="34" charset="-122"/>
                 <a:cs typeface="Poppins" pitchFamily="34" charset="-120"/>
               </a:rPr>
-              <a:t>  Phases Not Started</a:t>
+              <a:t>Phases Not Started</a:t>
             </a:r>
             <a:endParaRPr lang="en-US" sz="2000" dirty="0"/>
           </a:p>
@@ -8903,7 +8884,7 @@
       </p:grpSpPr>
       <p:pic>
         <p:nvPicPr>
-          <p:cNvPr id="2" name="Image 0" descr="/sessions/beautiful-vigilant-darwin/tmp/showship-deck-1uRcfa/trail_corner.png">    </p:cNvPr>
+          <p:cNvPr id="2" name="Image 0" descr="/var/folders/lw/rmylcyvd5rjfxk9g1z9rrm8w0000gq/T/showship-deck-SxFlm7/trail_corner.png">    </p:cNvPr>
           <p:cNvPicPr>
             <a:picLocks noChangeAspect="1"/>
           </p:cNvPicPr>
@@ -8970,7 +8951,7 @@
               <a:buNone/>
             </a:pPr>
             <a:r>
-              <a:rPr lang="en-US" sz="1150" b="1" spc="200" kern="0" dirty="0">
+              <a:rPr lang="en-US" sz="1150" b="1" dirty="0">
                 <a:solidFill>
                   <a:srgbClr val="6C4CF5"/>
                 </a:solidFill>
@@ -8978,7 +8959,7 @@
                 <a:ea typeface="Poppins" pitchFamily="34" charset="-122"/>
                 <a:cs typeface="Poppins" pitchFamily="34" charset="-120"/>
               </a:rPr>
-              <a:t>CLINICBOOK · PHASE BREAKDOWN</a:t>
+              <a:t>ClinicBook · Phase Breakdown</a:t>
             </a:r>
             <a:endParaRPr lang="en-US" sz="1150" dirty="0"/>
           </a:p>
@@ -9027,7 +9008,7 @@
       </p:sp>
       <p:pic>
         <p:nvPicPr>
-          <p:cNvPr id="6" name="Image 1" descr="/sessions/beautiful-vigilant-darwin/tmp/showship-deck-1uRcfa/trail_mark.png">    </p:cNvPr>
+          <p:cNvPr id="6" name="Image 1" descr="/var/folders/lw/rmylcyvd5rjfxk9g1z9rrm8w0000gq/T/showship-deck-SxFlm7/trail_mark.png">    </p:cNvPr>
           <p:cNvPicPr>
             <a:picLocks noChangeAspect="1"/>
           </p:cNvPicPr>
@@ -9074,7 +9055,7 @@
               <a:buNone/>
             </a:pPr>
             <a:r>
-              <a:rPr lang="en-US" sz="900" dirty="0">
+              <a:rPr lang="en-US" sz="1100" dirty="0">
                 <a:solidFill>
                   <a:srgbClr val="9A98B0"/>
                 </a:solidFill>
@@ -9088,7 +9069,7 @@
               <a:buNone/>
             </a:pPr>
             <a:r>
-              <a:rPr lang="en-US" sz="900" b="1" dirty="0">
+              <a:rPr lang="en-US" sz="1100" b="1" dirty="0">
                 <a:solidFill>
                   <a:srgbClr val="17153A"/>
                 </a:solidFill>
@@ -9098,7 +9079,7 @@
               </a:rPr>
               <a:t>Showship</a:t>
             </a:r>
-            <a:endParaRPr lang="en-US" sz="900" dirty="0"/>
+            <a:endParaRPr lang="en-US" sz="1100" dirty="0"/>
           </a:p>
         </p:txBody>
       </p:sp>
@@ -9127,7 +9108,7 @@
               <a:buNone/>
             </a:pPr>
             <a:r>
-              <a:rPr lang="en-US" sz="900" b="1" dirty="0">
+              <a:rPr lang="en-US" sz="1100" b="1" dirty="0">
                 <a:solidFill>
                   <a:srgbClr val="9A98B0"/>
                 </a:solidFill>
@@ -9137,7 +9118,7 @@
               </a:rPr>
               <a:t>5</a:t>
             </a:r>
-            <a:endParaRPr lang="en-US" sz="900" dirty="0"/>
+            <a:endParaRPr lang="en-US" sz="1100" dirty="0"/>
           </a:p>
         </p:txBody>
       </p:sp>
@@ -9388,7 +9369,7 @@
               <a:buNone/>
             </a:pPr>
             <a:r>
-              <a:rPr lang="en-US" sz="1050" b="1" dirty="0">
+              <a:rPr lang="en-US" sz="1100" b="1" dirty="0">
                 <a:solidFill>
                   <a:srgbClr val="FFFFFF"/>
                 </a:solidFill>
@@ -9398,7 +9379,7 @@
               </a:rPr>
               <a:t>✓  100%</a:t>
             </a:r>
-            <a:endParaRPr lang="en-US" sz="1050" dirty="0"/>
+            <a:endParaRPr lang="en-US" sz="1100" dirty="0"/>
           </a:p>
         </p:txBody>
       </p:sp>
@@ -9429,7 +9410,7 @@
               <a:buNone/>
             </a:pPr>
             <a:r>
-              <a:rPr lang="en-US" sz="1050" dirty="0">
+              <a:rPr lang="en-US" sz="1100" dirty="0">
                 <a:solidFill>
                   <a:srgbClr val="17153A"/>
                 </a:solidFill>
@@ -9439,7 +9420,7 @@
               </a:rPr>
               <a:t>P1 · Accounts &amp; Sign-in</a:t>
             </a:r>
-            <a:endParaRPr lang="en-US" sz="1050" dirty="0"/>
+            <a:endParaRPr lang="en-US" sz="1100" dirty="0"/>
           </a:p>
         </p:txBody>
       </p:sp>
@@ -9512,7 +9493,7 @@
               <a:buNone/>
             </a:pPr>
             <a:r>
-              <a:rPr lang="en-US" sz="1050" b="1" dirty="0">
+              <a:rPr lang="en-US" sz="1100" b="1" dirty="0">
                 <a:solidFill>
                   <a:srgbClr val="FFFFFF"/>
                 </a:solidFill>
@@ -9522,7 +9503,7 @@
               </a:rPr>
               <a:t>✓  100%</a:t>
             </a:r>
-            <a:endParaRPr lang="en-US" sz="1050" dirty="0"/>
+            <a:endParaRPr lang="en-US" sz="1100" dirty="0"/>
           </a:p>
         </p:txBody>
       </p:sp>
@@ -9553,7 +9534,7 @@
               <a:buNone/>
             </a:pPr>
             <a:r>
-              <a:rPr lang="en-US" sz="1050" dirty="0">
+              <a:rPr lang="en-US" sz="1100" dirty="0">
                 <a:solidFill>
                   <a:srgbClr val="17153A"/>
                 </a:solidFill>
@@ -9563,7 +9544,7 @@
               </a:rPr>
               <a:t>P2 · Clinic Search &amp; Maps</a:t>
             </a:r>
-            <a:endParaRPr lang="en-US" sz="1050" dirty="0"/>
+            <a:endParaRPr lang="en-US" sz="1100" dirty="0"/>
           </a:p>
         </p:txBody>
       </p:sp>
@@ -9636,7 +9617,7 @@
               <a:buNone/>
             </a:pPr>
             <a:r>
-              <a:rPr lang="en-US" sz="1050" b="1" dirty="0">
+              <a:rPr lang="en-US" sz="1100" b="1" dirty="0">
                 <a:solidFill>
                   <a:srgbClr val="10A6A0"/>
                 </a:solidFill>
@@ -9646,7 +9627,7 @@
               </a:rPr>
               <a:t>40%</a:t>
             </a:r>
-            <a:endParaRPr lang="en-US" sz="1050" dirty="0"/>
+            <a:endParaRPr lang="en-US" sz="1100" dirty="0"/>
           </a:p>
         </p:txBody>
       </p:sp>
@@ -9677,7 +9658,7 @@
               <a:buNone/>
             </a:pPr>
             <a:r>
-              <a:rPr lang="en-US" sz="1050" dirty="0">
+              <a:rPr lang="en-US" sz="1100" dirty="0">
                 <a:solidFill>
                   <a:srgbClr val="17153A"/>
                 </a:solidFill>
@@ -9687,7 +9668,7 @@
               </a:rPr>
               <a:t>P3 · Booking Calendar</a:t>
             </a:r>
-            <a:endParaRPr lang="en-US" sz="1050" dirty="0"/>
+            <a:endParaRPr lang="en-US" sz="1100" dirty="0"/>
           </a:p>
         </p:txBody>
       </p:sp>
@@ -9743,7 +9724,7 @@
               <a:buNone/>
             </a:pPr>
             <a:r>
-              <a:rPr lang="en-US" sz="1050" b="1" dirty="0">
+              <a:rPr lang="en-US" sz="1100" b="1" dirty="0">
                 <a:solidFill>
                   <a:srgbClr val="9A98B0"/>
                 </a:solidFill>
@@ -9753,7 +9734,7 @@
               </a:rPr>
               <a:t>Not started</a:t>
             </a:r>
-            <a:endParaRPr lang="en-US" sz="1050" dirty="0"/>
+            <a:endParaRPr lang="en-US" sz="1100" dirty="0"/>
           </a:p>
         </p:txBody>
       </p:sp>
@@ -9784,7 +9765,7 @@
               <a:buNone/>
             </a:pPr>
             <a:r>
-              <a:rPr lang="en-US" sz="1050" dirty="0">
+              <a:rPr lang="en-US" sz="1100" dirty="0">
                 <a:solidFill>
                   <a:srgbClr val="9A98B0"/>
                 </a:solidFill>
@@ -9794,7 +9775,7 @@
               </a:rPr>
               <a:t>P4 · Payments &amp; Receipts</a:t>
             </a:r>
-            <a:endParaRPr lang="en-US" sz="1050" dirty="0"/>
+            <a:endParaRPr lang="en-US" sz="1100" dirty="0"/>
           </a:p>
         </p:txBody>
       </p:sp>
@@ -10084,7 +10065,7 @@
               <a:buNone/>
             </a:pPr>
             <a:r>
-              <a:rPr lang="en-US" sz="1050" b="1" dirty="0">
+              <a:rPr lang="en-US" sz="1100" b="1" dirty="0">
                 <a:solidFill>
                   <a:srgbClr val="FFFFFF"/>
                 </a:solidFill>
@@ -10094,7 +10075,7 @@
               </a:rPr>
               <a:t>✓  100%</a:t>
             </a:r>
-            <a:endParaRPr lang="en-US" sz="1050" dirty="0"/>
+            <a:endParaRPr lang="en-US" sz="1100" dirty="0"/>
           </a:p>
         </p:txBody>
       </p:sp>
@@ -10125,7 +10106,7 @@
               <a:buNone/>
             </a:pPr>
             <a:r>
-              <a:rPr lang="en-US" sz="1050" dirty="0">
+              <a:rPr lang="en-US" sz="1100" dirty="0">
                 <a:solidFill>
                   <a:srgbClr val="17153A"/>
                 </a:solidFill>
@@ -10135,7 +10116,7 @@
               </a:rPr>
               <a:t>P1 · Clinic Onboarding</a:t>
             </a:r>
-            <a:endParaRPr lang="en-US" sz="1050" dirty="0"/>
+            <a:endParaRPr lang="en-US" sz="1100" dirty="0"/>
           </a:p>
         </p:txBody>
       </p:sp>
@@ -10208,7 +10189,7 @@
               <a:buNone/>
             </a:pPr>
             <a:r>
-              <a:rPr lang="en-US" sz="1050" b="1" dirty="0">
+              <a:rPr lang="en-US" sz="1100" b="1" dirty="0">
                 <a:solidFill>
                   <a:srgbClr val="FFFFFF"/>
                 </a:solidFill>
@@ -10218,7 +10199,7 @@
               </a:rPr>
               <a:t>✓  100%</a:t>
             </a:r>
-            <a:endParaRPr lang="en-US" sz="1050" dirty="0"/>
+            <a:endParaRPr lang="en-US" sz="1100" dirty="0"/>
           </a:p>
         </p:txBody>
       </p:sp>
@@ -10249,7 +10230,7 @@
               <a:buNone/>
             </a:pPr>
             <a:r>
-              <a:rPr lang="en-US" sz="1050" dirty="0">
+              <a:rPr lang="en-US" sz="1100" dirty="0">
                 <a:solidFill>
                   <a:srgbClr val="17153A"/>
                 </a:solidFill>
@@ -10259,7 +10240,7 @@
               </a:rPr>
               <a:t>P2 · Doctor Schedules</a:t>
             </a:r>
-            <a:endParaRPr lang="en-US" sz="1050" dirty="0"/>
+            <a:endParaRPr lang="en-US" sz="1100" dirty="0"/>
           </a:p>
         </p:txBody>
       </p:sp>
@@ -10315,7 +10296,7 @@
               <a:buNone/>
             </a:pPr>
             <a:r>
-              <a:rPr lang="en-US" sz="1050" b="1" dirty="0">
+              <a:rPr lang="en-US" sz="1100" b="1" dirty="0">
                 <a:solidFill>
                   <a:srgbClr val="9A98B0"/>
                 </a:solidFill>
@@ -10325,7 +10306,7 @@
               </a:rPr>
               <a:t>Not started</a:t>
             </a:r>
-            <a:endParaRPr lang="en-US" sz="1050" dirty="0"/>
+            <a:endParaRPr lang="en-US" sz="1100" dirty="0"/>
           </a:p>
         </p:txBody>
       </p:sp>
@@ -10356,7 +10337,7 @@
               <a:buNone/>
             </a:pPr>
             <a:r>
-              <a:rPr lang="en-US" sz="1050" dirty="0">
+              <a:rPr lang="en-US" sz="1100" dirty="0">
                 <a:solidFill>
                   <a:srgbClr val="9A98B0"/>
                 </a:solidFill>
@@ -10366,7 +10347,7 @@
               </a:rPr>
               <a:t>P3 · Reports &amp; Exports</a:t>
             </a:r>
-            <a:endParaRPr lang="en-US" sz="1050" dirty="0"/>
+            <a:endParaRPr lang="en-US" sz="1100" dirty="0"/>
           </a:p>
         </p:txBody>
       </p:sp>
@@ -10439,7 +10420,7 @@
               <a:buNone/>
             </a:pPr>
             <a:r>
-              <a:rPr lang="en-US" sz="1050" b="1" dirty="0">
+              <a:rPr lang="en-US" sz="1100" b="1" dirty="0">
                 <a:solidFill>
                   <a:srgbClr val="FFFFFF"/>
                 </a:solidFill>
@@ -10449,7 +10430,7 @@
               </a:rPr>
               <a:t>80%</a:t>
             </a:r>
-            <a:endParaRPr lang="en-US" sz="1050" dirty="0"/>
+            <a:endParaRPr lang="en-US" sz="1100" dirty="0"/>
           </a:p>
         </p:txBody>
       </p:sp>
@@ -10480,7 +10461,7 @@
               <a:buNone/>
             </a:pPr>
             <a:r>
-              <a:rPr lang="en-US" sz="1050" dirty="0">
+              <a:rPr lang="en-US" sz="1100" dirty="0">
                 <a:solidFill>
                   <a:srgbClr val="17153A"/>
                 </a:solidFill>
@@ -10490,7 +10471,7 @@
               </a:rPr>
               <a:t>P4 · Reminders &amp; Notifications</a:t>
             </a:r>
-            <a:endParaRPr lang="en-US" sz="1050" dirty="0"/>
+            <a:endParaRPr lang="en-US" sz="1100" dirty="0"/>
           </a:p>
         </p:txBody>
       </p:sp>
@@ -10567,7 +10548,7 @@
       </p:grpSpPr>
       <p:pic>
         <p:nvPicPr>
-          <p:cNvPr id="2" name="Image 0" descr="/sessions/beautiful-vigilant-darwin/tmp/showship-deck-1uRcfa/trail_corner.png">    </p:cNvPr>
+          <p:cNvPr id="2" name="Image 0" descr="/var/folders/lw/rmylcyvd5rjfxk9g1z9rrm8w0000gq/T/showship-deck-SxFlm7/trail_corner.png">    </p:cNvPr>
           <p:cNvPicPr>
             <a:picLocks noChangeAspect="1"/>
           </p:cNvPicPr>
@@ -10634,7 +10615,7 @@
               <a:buNone/>
             </a:pPr>
             <a:r>
-              <a:rPr lang="en-US" sz="1150" b="1" spc="200" kern="0" dirty="0">
+              <a:rPr lang="en-US" sz="1150" b="1" dirty="0">
                 <a:solidFill>
                   <a:srgbClr val="6C4CF5"/>
                 </a:solidFill>
@@ -10642,7 +10623,7 @@
                 <a:ea typeface="Poppins" pitchFamily="34" charset="-122"/>
                 <a:cs typeface="Poppins" pitchFamily="34" charset="-120"/>
               </a:rPr>
-              <a:t>QUALITY · CODE REVIEW</a:t>
+              <a:t>Quality · Code Review</a:t>
             </a:r>
             <a:endParaRPr lang="en-US" sz="1150" dirty="0"/>
           </a:p>
@@ -10691,7 +10672,7 @@
       </p:sp>
       <p:pic>
         <p:nvPicPr>
-          <p:cNvPr id="6" name="Image 1" descr="/sessions/beautiful-vigilant-darwin/tmp/showship-deck-1uRcfa/trail_mark.png">    </p:cNvPr>
+          <p:cNvPr id="6" name="Image 1" descr="/var/folders/lw/rmylcyvd5rjfxk9g1z9rrm8w0000gq/T/showship-deck-SxFlm7/trail_mark.png">    </p:cNvPr>
           <p:cNvPicPr>
             <a:picLocks noChangeAspect="1"/>
           </p:cNvPicPr>
@@ -10738,7 +10719,7 @@
               <a:buNone/>
             </a:pPr>
             <a:r>
-              <a:rPr lang="en-US" sz="900" dirty="0">
+              <a:rPr lang="en-US" sz="1100" dirty="0">
                 <a:solidFill>
                   <a:srgbClr val="9A98B0"/>
                 </a:solidFill>
@@ -10752,7 +10733,7 @@
               <a:buNone/>
             </a:pPr>
             <a:r>
-              <a:rPr lang="en-US" sz="900" b="1" dirty="0">
+              <a:rPr lang="en-US" sz="1100" b="1" dirty="0">
                 <a:solidFill>
                   <a:srgbClr val="17153A"/>
                 </a:solidFill>
@@ -10762,7 +10743,7 @@
               </a:rPr>
               <a:t>Showship</a:t>
             </a:r>
-            <a:endParaRPr lang="en-US" sz="900" dirty="0"/>
+            <a:endParaRPr lang="en-US" sz="1100" dirty="0"/>
           </a:p>
         </p:txBody>
       </p:sp>
@@ -10791,7 +10772,7 @@
               <a:buNone/>
             </a:pPr>
             <a:r>
-              <a:rPr lang="en-US" sz="900" b="1" dirty="0">
+              <a:rPr lang="en-US" sz="1100" b="1" dirty="0">
                 <a:solidFill>
                   <a:srgbClr val="9A98B0"/>
                 </a:solidFill>
@@ -10801,7 +10782,7 @@
               </a:rPr>
               <a:t>6</a:t>
             </a:r>
-            <a:endParaRPr lang="en-US" sz="900" dirty="0"/>
+            <a:endParaRPr lang="en-US" sz="1100" dirty="0"/>
           </a:p>
         </p:txBody>
       </p:sp>
@@ -11183,7 +11164,7 @@
       </p:sp>
       <p:pic>
         <p:nvPicPr>
-          <p:cNvPr id="20" name="Image 2" descr="/sessions/beautiful-vigilant-darwin/tmp/showship-deck-1uRcfa/iconc_Check_FFFFFF.png">    </p:cNvPr>
+          <p:cNvPr id="20" name="Image 2" descr="/var/folders/lw/rmylcyvd5rjfxk9g1z9rrm8w0000gq/T/showship-deck-SxFlm7/iconc_Check_FFFFFF.png">    </p:cNvPr>
           <p:cNvPicPr>
             <a:picLocks noChangeAspect="1"/>
           </p:cNvPicPr>
@@ -11230,7 +11211,7 @@
               <a:buNone/>
             </a:pPr>
             <a:r>
-              <a:rPr lang="en-US" sz="950" b="1" spc="150" kern="0" dirty="0">
+              <a:rPr lang="en-US" sz="1100" b="1" dirty="0">
                 <a:solidFill>
                   <a:srgbClr val="10A6A0"/>
                 </a:solidFill>
@@ -11238,9 +11219,9 @@
                 <a:ea typeface="Poppins" pitchFamily="34" charset="-122"/>
                 <a:cs typeface="Poppins" pitchFamily="34" charset="-120"/>
               </a:rPr>
-              <a:t>APPOINTMENT REMINDERS</a:t>
-            </a:r>
-            <a:endParaRPr lang="en-US" sz="950" dirty="0"/>
+              <a:t>Appointment Reminders</a:t>
+            </a:r>
+            <a:endParaRPr lang="en-US" sz="1100" dirty="0"/>
           </a:p>
         </p:txBody>
       </p:sp>
@@ -11335,7 +11316,7 @@
               <a:buNone/>
             </a:pPr>
             <a:r>
-              <a:rPr lang="en-US" sz="900" b="1" spc="100" kern="0" dirty="0">
+              <a:rPr lang="en-US" sz="1100" b="1" dirty="0">
                 <a:solidFill>
                   <a:srgbClr val="FFFFFF"/>
                 </a:solidFill>
@@ -11343,9 +11324,9 @@
                 <a:ea typeface="Poppins" pitchFamily="34" charset="-122"/>
                 <a:cs typeface="Poppins" pitchFamily="34" charset="-120"/>
               </a:rPr>
-              <a:t>VERIFIED</a:t>
-            </a:r>
-            <a:endParaRPr lang="en-US" sz="900" dirty="0"/>
+              <a:t>Verified</a:t>
+            </a:r>
+            <a:endParaRPr lang="en-US" sz="1100" dirty="0"/>
           </a:p>
         </p:txBody>
       </p:sp>
@@ -11405,7 +11386,7 @@
       </p:sp>
       <p:pic>
         <p:nvPicPr>
-          <p:cNvPr id="27" name="Image 3" descr="/sessions/beautiful-vigilant-darwin/tmp/showship-deck-1uRcfa/iconc_Wrench_FFFFFF.png">    </p:cNvPr>
+          <p:cNvPr id="27" name="Image 3" descr="/var/folders/lw/rmylcyvd5rjfxk9g1z9rrm8w0000gq/T/showship-deck-SxFlm7/iconc_Wrench_FFFFFF.png">    </p:cNvPr>
           <p:cNvPicPr>
             <a:picLocks noChangeAspect="1"/>
           </p:cNvPicPr>
@@ -11452,7 +11433,7 @@
               <a:buNone/>
             </a:pPr>
             <a:r>
-              <a:rPr lang="en-US" sz="950" b="1" spc="150" kern="0" dirty="0">
+              <a:rPr lang="en-US" sz="1100" b="1" dirty="0">
                 <a:solidFill>
                   <a:srgbClr val="F5A524"/>
                 </a:solidFill>
@@ -11460,9 +11441,9 @@
                 <a:ea typeface="Poppins" pitchFamily="34" charset="-122"/>
                 <a:cs typeface="Poppins" pitchFamily="34" charset="-120"/>
               </a:rPr>
-              <a:t>RELIABILITY</a:t>
-            </a:r>
-            <a:endParaRPr lang="en-US" sz="950" dirty="0"/>
+              <a:t>Reliability</a:t>
+            </a:r>
+            <a:endParaRPr lang="en-US" sz="1100" dirty="0"/>
           </a:p>
         </p:txBody>
       </p:sp>
@@ -11557,7 +11538,7 @@
               <a:buNone/>
             </a:pPr>
             <a:r>
-              <a:rPr lang="en-US" sz="900" b="1" spc="100" kern="0" dirty="0">
+              <a:rPr lang="en-US" sz="1100" b="1" dirty="0">
                 <a:solidFill>
                   <a:srgbClr val="F5A524"/>
                 </a:solidFill>
@@ -11565,9 +11546,9 @@
                 <a:ea typeface="Poppins" pitchFamily="34" charset="-122"/>
                 <a:cs typeface="Poppins" pitchFamily="34" charset="-120"/>
               </a:rPr>
-              <a:t>FIX BEFORE RELEASE</a:t>
-            </a:r>
-            <a:endParaRPr lang="en-US" sz="900" dirty="0"/>
+              <a:t>Fix before release</a:t>
+            </a:r>
+            <a:endParaRPr lang="en-US" sz="1100" dirty="0"/>
           </a:p>
         </p:txBody>
       </p:sp>
@@ -11627,7 +11608,7 @@
       </p:sp>
       <p:pic>
         <p:nvPicPr>
-          <p:cNvPr id="34" name="Image 4" descr="/sessions/beautiful-vigilant-darwin/tmp/showship-deck-1uRcfa/iconc_Check_FFFFFF.png">    </p:cNvPr>
+          <p:cNvPr id="34" name="Image 4" descr="/var/folders/lw/rmylcyvd5rjfxk9g1z9rrm8w0000gq/T/showship-deck-SxFlm7/iconc_Check_FFFFFF.png">    </p:cNvPr>
           <p:cNvPicPr>
             <a:picLocks noChangeAspect="1"/>
           </p:cNvPicPr>
@@ -11674,7 +11655,7 @@
               <a:buNone/>
             </a:pPr>
             <a:r>
-              <a:rPr lang="en-US" sz="950" b="1" spc="150" kern="0" dirty="0">
+              <a:rPr lang="en-US" sz="1100" b="1" dirty="0">
                 <a:solidFill>
                   <a:srgbClr val="10A6A0"/>
                 </a:solidFill>
@@ -11682,9 +11663,9 @@
                 <a:ea typeface="Poppins" pitchFamily="34" charset="-122"/>
                 <a:cs typeface="Poppins" pitchFamily="34" charset="-120"/>
               </a:rPr>
-              <a:t>PRIVACY</a:t>
-            </a:r>
-            <a:endParaRPr lang="en-US" sz="950" dirty="0"/>
+              <a:t>Privacy</a:t>
+            </a:r>
+            <a:endParaRPr lang="en-US" sz="1100" dirty="0"/>
           </a:p>
         </p:txBody>
       </p:sp>
@@ -11779,7 +11760,7 @@
               <a:buNone/>
             </a:pPr>
             <a:r>
-              <a:rPr lang="en-US" sz="900" b="1" spc="100" kern="0" dirty="0">
+              <a:rPr lang="en-US" sz="1100" b="1" dirty="0">
                 <a:solidFill>
                   <a:srgbClr val="FFFFFF"/>
                 </a:solidFill>
@@ -11787,9 +11768,9 @@
                 <a:ea typeface="Poppins" pitchFamily="34" charset="-122"/>
                 <a:cs typeface="Poppins" pitchFamily="34" charset="-120"/>
               </a:rPr>
-              <a:t>VERIFIED</a:t>
-            </a:r>
-            <a:endParaRPr lang="en-US" sz="900" dirty="0"/>
+              <a:t>Verified</a:t>
+            </a:r>
+            <a:endParaRPr lang="en-US" sz="1100" dirty="0"/>
           </a:p>
         </p:txBody>
       </p:sp>
@@ -11818,7 +11799,7 @@
               <a:buNone/>
             </a:pPr>
             <a:r>
-              <a:rPr lang="en-US" sz="1050" i="1" dirty="0">
+              <a:rPr lang="en-US" sz="1100" i="1" dirty="0">
                 <a:solidFill>
                   <a:srgbClr val="9A98B0"/>
                 </a:solidFill>
@@ -11828,7 +11809,7 @@
               </a:rPr>
               <a:t>Source: lead's code reviews this week.</a:t>
             </a:r>
-            <a:endParaRPr lang="en-US" sz="1050" dirty="0"/>
+            <a:endParaRPr lang="en-US" sz="1100" dirty="0"/>
           </a:p>
         </p:txBody>
       </p:sp>
@@ -11866,7 +11847,7 @@
       </p:grpSpPr>
       <p:pic>
         <p:nvPicPr>
-          <p:cNvPr id="2" name="Image 0" descr="/sessions/beautiful-vigilant-darwin/tmp/showship-deck-1uRcfa/trail_corner.png">    </p:cNvPr>
+          <p:cNvPr id="2" name="Image 0" descr="/var/folders/lw/rmylcyvd5rjfxk9g1z9rrm8w0000gq/T/showship-deck-SxFlm7/trail_corner.png">    </p:cNvPr>
           <p:cNvPicPr>
             <a:picLocks noChangeAspect="1"/>
           </p:cNvPicPr>
@@ -11933,7 +11914,7 @@
               <a:buNone/>
             </a:pPr>
             <a:r>
-              <a:rPr lang="en-US" sz="1150" b="1" spc="200" kern="0" dirty="0">
+              <a:rPr lang="en-US" sz="1150" b="1" dirty="0">
                 <a:solidFill>
                   <a:srgbClr val="6C4CF5"/>
                 </a:solidFill>
@@ -11941,7 +11922,7 @@
                 <a:ea typeface="Poppins" pitchFamily="34" charset="-122"/>
                 <a:cs typeface="Poppins" pitchFamily="34" charset="-120"/>
               </a:rPr>
-              <a:t>NEEDS ATTENTION</a:t>
+              <a:t>Needs Attention</a:t>
             </a:r>
             <a:endParaRPr lang="en-US" sz="1150" dirty="0"/>
           </a:p>
@@ -11990,7 +11971,7 @@
       </p:sp>
       <p:pic>
         <p:nvPicPr>
-          <p:cNvPr id="6" name="Image 1" descr="/sessions/beautiful-vigilant-darwin/tmp/showship-deck-1uRcfa/trail_mark.png">    </p:cNvPr>
+          <p:cNvPr id="6" name="Image 1" descr="/var/folders/lw/rmylcyvd5rjfxk9g1z9rrm8w0000gq/T/showship-deck-SxFlm7/trail_mark.png">    </p:cNvPr>
           <p:cNvPicPr>
             <a:picLocks noChangeAspect="1"/>
           </p:cNvPicPr>
@@ -12037,7 +12018,7 @@
               <a:buNone/>
             </a:pPr>
             <a:r>
-              <a:rPr lang="en-US" sz="900" dirty="0">
+              <a:rPr lang="en-US" sz="1100" dirty="0">
                 <a:solidFill>
                   <a:srgbClr val="9A98B0"/>
                 </a:solidFill>
@@ -12051,7 +12032,7 @@
               <a:buNone/>
             </a:pPr>
             <a:r>
-              <a:rPr lang="en-US" sz="900" b="1" dirty="0">
+              <a:rPr lang="en-US" sz="1100" b="1" dirty="0">
                 <a:solidFill>
                   <a:srgbClr val="17153A"/>
                 </a:solidFill>
@@ -12061,7 +12042,7 @@
               </a:rPr>
               <a:t>Showship</a:t>
             </a:r>
-            <a:endParaRPr lang="en-US" sz="900" dirty="0"/>
+            <a:endParaRPr lang="en-US" sz="1100" dirty="0"/>
           </a:p>
         </p:txBody>
       </p:sp>
@@ -12090,7 +12071,7 @@
               <a:buNone/>
             </a:pPr>
             <a:r>
-              <a:rPr lang="en-US" sz="900" b="1" dirty="0">
+              <a:rPr lang="en-US" sz="1100" b="1" dirty="0">
                 <a:solidFill>
                   <a:srgbClr val="9A98B0"/>
                 </a:solidFill>
@@ -12100,7 +12081,7 @@
               </a:rPr>
               <a:t>7</a:t>
             </a:r>
-            <a:endParaRPr lang="en-US" sz="900" dirty="0"/>
+            <a:endParaRPr lang="en-US" sz="1100" dirty="0"/>
           </a:p>
         </p:txBody>
       </p:sp>
@@ -12113,11 +12094,11 @@
         <p:spPr>
           <a:xfrm>
             <a:off x="640080" y="1783080"/>
-            <a:ext cx="5294376" cy="4434840"/>
+            <a:ext cx="5294376" cy="2651760"/>
           </a:xfrm>
           <a:prstGeom prst="roundRect">
             <a:avLst>
-              <a:gd name="adj" fmla="val 4536"/>
+              <a:gd name="adj" fmla="val 7586"/>
             </a:avLst>
           </a:prstGeom>
           <a:solidFill>
@@ -12182,7 +12163,7 @@
       </p:sp>
       <p:pic>
         <p:nvPicPr>
-          <p:cNvPr id="12" name="Image 2" descr="/sessions/beautiful-vigilant-darwin/tmp/showship-deck-1uRcfa/iconc_TriangleAlert_FFFFFF.png">    </p:cNvPr>
+          <p:cNvPr id="12" name="Image 2" descr="/var/folders/lw/rmylcyvd5rjfxk9g1z9rrm8w0000gq/T/showship-deck-SxFlm7/iconc_TriangleAlert_FFFFFF.png">    </p:cNvPr>
           <p:cNvPicPr>
             <a:picLocks noChangeAspect="1"/>
           </p:cNvPicPr>
@@ -12420,7 +12401,7 @@
               <a:buNone/>
             </a:pPr>
             <a:r>
-              <a:rPr lang="en-US" sz="1000" i="1" dirty="0">
+              <a:rPr lang="en-US" sz="1100" i="1" dirty="0">
                 <a:solidFill>
                   <a:srgbClr val="9A98B0"/>
                 </a:solidFill>
@@ -12443,11 +12424,11 @@
         <p:spPr>
           <a:xfrm>
             <a:off x="6254496" y="1783080"/>
-            <a:ext cx="5294376" cy="4434840"/>
+            <a:ext cx="5294376" cy="2651760"/>
           </a:xfrm>
           <a:prstGeom prst="roundRect">
             <a:avLst>
-              <a:gd name="adj" fmla="val 4536"/>
+              <a:gd name="adj" fmla="val 7586"/>
             </a:avLst>
           </a:prstGeom>
           <a:solidFill>
@@ -12512,7 +12493,7 @@
       </p:sp>
       <p:pic>
         <p:nvPicPr>
-          <p:cNvPr id="21" name="Image 3" descr="/sessions/beautiful-vigilant-darwin/tmp/showship-deck-1uRcfa/iconc_MessageCircleQuestion_FFFFFF.png">    </p:cNvPr>
+          <p:cNvPr id="21" name="Image 3" descr="/var/folders/lw/rmylcyvd5rjfxk9g1z9rrm8w0000gq/T/showship-deck-SxFlm7/iconc_MessageCircleQuestion_FFFFFF.png">    </p:cNvPr>
           <p:cNvPicPr>
             <a:picLocks noChangeAspect="1"/>
           </p:cNvPicPr>
@@ -12750,7 +12731,7 @@
               <a:buNone/>
             </a:pPr>
             <a:r>
-              <a:rPr lang="en-US" sz="1000" i="1" dirty="0">
+              <a:rPr lang="en-US" sz="1100" i="1" dirty="0">
                 <a:solidFill>
                   <a:srgbClr val="9A98B0"/>
                 </a:solidFill>
@@ -12798,7 +12779,7 @@
       </p:grpSpPr>
       <p:pic>
         <p:nvPicPr>
-          <p:cNvPr id="2" name="Image 0" descr="/sessions/beautiful-vigilant-darwin/tmp/showship-deck-1uRcfa/trail_corner.png">    </p:cNvPr>
+          <p:cNvPr id="2" name="Image 0" descr="/var/folders/lw/rmylcyvd5rjfxk9g1z9rrm8w0000gq/T/showship-deck-SxFlm7/trail_corner.png">    </p:cNvPr>
           <p:cNvPicPr>
             <a:picLocks noChangeAspect="1"/>
           </p:cNvPicPr>
@@ -12865,7 +12846,7 @@
               <a:buNone/>
             </a:pPr>
             <a:r>
-              <a:rPr lang="en-US" sz="1150" b="1" spc="200" kern="0" dirty="0">
+              <a:rPr lang="en-US" sz="1150" b="1" dirty="0">
                 <a:solidFill>
                   <a:srgbClr val="6C4CF5"/>
                 </a:solidFill>
@@ -12873,7 +12854,7 @@
                 <a:ea typeface="Poppins" pitchFamily="34" charset="-122"/>
                 <a:cs typeface="Poppins" pitchFamily="34" charset="-120"/>
               </a:rPr>
-              <a:t>TEAM · TASK TRACKER</a:t>
+              <a:t>Team · Task Tracker</a:t>
             </a:r>
             <a:endParaRPr lang="en-US" sz="1150" dirty="0"/>
           </a:p>
@@ -12922,7 +12903,7 @@
       </p:sp>
       <p:pic>
         <p:nvPicPr>
-          <p:cNvPr id="6" name="Image 1" descr="/sessions/beautiful-vigilant-darwin/tmp/showship-deck-1uRcfa/trail_mark.png">    </p:cNvPr>
+          <p:cNvPr id="6" name="Image 1" descr="/var/folders/lw/rmylcyvd5rjfxk9g1z9rrm8w0000gq/T/showship-deck-SxFlm7/trail_mark.png">    </p:cNvPr>
           <p:cNvPicPr>
             <a:picLocks noChangeAspect="1"/>
           </p:cNvPicPr>
@@ -12969,7 +12950,7 @@
               <a:buNone/>
             </a:pPr>
             <a:r>
-              <a:rPr lang="en-US" sz="900" dirty="0">
+              <a:rPr lang="en-US" sz="1100" dirty="0">
                 <a:solidFill>
                   <a:srgbClr val="9A98B0"/>
                 </a:solidFill>
@@ -12983,7 +12964,7 @@
               <a:buNone/>
             </a:pPr>
             <a:r>
-              <a:rPr lang="en-US" sz="900" b="1" dirty="0">
+              <a:rPr lang="en-US" sz="1100" b="1" dirty="0">
                 <a:solidFill>
                   <a:srgbClr val="17153A"/>
                 </a:solidFill>
@@ -12993,7 +12974,7 @@
               </a:rPr>
               <a:t>Showship</a:t>
             </a:r>
-            <a:endParaRPr lang="en-US" sz="900" dirty="0"/>
+            <a:endParaRPr lang="en-US" sz="1100" dirty="0"/>
           </a:p>
         </p:txBody>
       </p:sp>
@@ -13022,7 +13003,7 @@
               <a:buNone/>
             </a:pPr>
             <a:r>
-              <a:rPr lang="en-US" sz="900" b="1" dirty="0">
+              <a:rPr lang="en-US" sz="1100" b="1" dirty="0">
                 <a:solidFill>
                   <a:srgbClr val="9A98B0"/>
                 </a:solidFill>
@@ -13032,7 +13013,7 @@
               </a:rPr>
               <a:t>8</a:t>
             </a:r>
-            <a:endParaRPr lang="en-US" sz="900" dirty="0"/>
+            <a:endParaRPr lang="en-US" sz="1100" dirty="0"/>
           </a:p>
         </p:txBody>
       </p:sp>
@@ -13197,7 +13178,7 @@
               <a:buNone/>
             </a:pPr>
             <a:r>
-              <a:rPr lang="en-US" sz="1000" b="1" dirty="0">
+              <a:rPr lang="en-US" sz="1100" b="1" dirty="0">
                 <a:solidFill>
                   <a:srgbClr val="10A6A0"/>
                 </a:solidFill>
@@ -13207,7 +13188,7 @@
               </a:rPr>
               <a:t>ClinicBook · Patient App</a:t>
             </a:r>
-            <a:endParaRPr lang="en-US" sz="1000" dirty="0"/>
+            <a:endParaRPr lang="en-US" sz="1100" dirty="0"/>
           </a:p>
         </p:txBody>
       </p:sp>
@@ -13346,7 +13327,7 @@
               <a:buNone/>
             </a:pPr>
             <a:r>
-              <a:rPr lang="en-US" sz="1050" b="1" dirty="0">
+              <a:rPr lang="en-US" sz="1100" b="1" dirty="0">
                 <a:solidFill>
                   <a:srgbClr val="17153A"/>
                 </a:solidFill>
@@ -13360,7 +13341,7 @@
               <a:buNone/>
             </a:pPr>
             <a:r>
-              <a:rPr lang="en-US" sz="1050" dirty="0">
+              <a:rPr lang="en-US" sz="1100" dirty="0">
                 <a:solidFill>
                   <a:srgbClr val="9A98B0"/>
                 </a:solidFill>
@@ -13374,7 +13355,7 @@
               <a:buNone/>
             </a:pPr>
             <a:r>
-              <a:rPr lang="en-US" sz="1050" b="1" dirty="0">
+              <a:rPr lang="en-US" sz="1100" b="1" dirty="0">
                 <a:solidFill>
                   <a:srgbClr val="17153A"/>
                 </a:solidFill>
@@ -13388,7 +13369,7 @@
               <a:buNone/>
             </a:pPr>
             <a:r>
-              <a:rPr lang="en-US" sz="1050" dirty="0">
+              <a:rPr lang="en-US" sz="1100" dirty="0">
                 <a:solidFill>
                   <a:srgbClr val="9A98B0"/>
                 </a:solidFill>
@@ -13398,7 +13379,7 @@
               </a:rPr>
               <a:t> open</a:t>
             </a:r>
-            <a:endParaRPr lang="en-US" sz="1050" dirty="0"/>
+            <a:endParaRPr lang="en-US" sz="1100" dirty="0"/>
           </a:p>
         </p:txBody>
       </p:sp>
@@ -13512,7 +13493,7 @@
               <a:buNone/>
             </a:pPr>
             <a:r>
-              <a:rPr lang="en-US" sz="1050" i="1" dirty="0">
+              <a:rPr lang="en-US" sz="1100" i="1" dirty="0">
                 <a:solidFill>
                   <a:srgbClr val="55536E"/>
                 </a:solidFill>
@@ -13522,7 +13503,7 @@
               </a:rPr>
               <a:t>Sign-in and clinic search done; booking calendar in progress.</a:t>
             </a:r>
-            <a:endParaRPr lang="en-US" sz="1050" dirty="0"/>
+            <a:endParaRPr lang="en-US" sz="1100" dirty="0"/>
           </a:p>
         </p:txBody>
       </p:sp>
@@ -13573,7 +13554,7 @@
               <a:buNone/>
             </a:pPr>
             <a:r>
-              <a:rPr lang="en-US" sz="1000" dirty="0">
+              <a:rPr lang="en-US" sz="1100" dirty="0">
                 <a:solidFill>
                   <a:srgbClr val="17153A"/>
                 </a:solidFill>
@@ -13583,7 +13564,7 @@
               </a:rPr>
               <a:t>P1 · Accounts &amp; Sign-in (3/3)</a:t>
             </a:r>
-            <a:endParaRPr lang="en-US" sz="1000" dirty="0"/>
+            <a:endParaRPr lang="en-US" sz="1100" dirty="0"/>
           </a:p>
         </p:txBody>
       </p:sp>
@@ -13634,7 +13615,7 @@
               <a:buNone/>
             </a:pPr>
             <a:r>
-              <a:rPr lang="en-US" sz="1000" dirty="0">
+              <a:rPr lang="en-US" sz="1100" dirty="0">
                 <a:solidFill>
                   <a:srgbClr val="17153A"/>
                 </a:solidFill>
@@ -13644,7 +13625,7 @@
               </a:rPr>
               <a:t>P2 · Clinic Search &amp; Maps (5/5)</a:t>
             </a:r>
-            <a:endParaRPr lang="en-US" sz="1000" dirty="0"/>
+            <a:endParaRPr lang="en-US" sz="1100" dirty="0"/>
           </a:p>
         </p:txBody>
       </p:sp>
@@ -13695,7 +13676,7 @@
               <a:buNone/>
             </a:pPr>
             <a:r>
-              <a:rPr lang="en-US" sz="1000" dirty="0">
+              <a:rPr lang="en-US" sz="1100" dirty="0">
                 <a:solidFill>
                   <a:srgbClr val="17153A"/>
                 </a:solidFill>
@@ -13705,7 +13686,7 @@
               </a:rPr>
               <a:t>P3 · Booking Calendar (2/5)</a:t>
             </a:r>
-            <a:endParaRPr lang="en-US" sz="1000" dirty="0"/>
+            <a:endParaRPr lang="en-US" sz="1100" dirty="0"/>
           </a:p>
         </p:txBody>
       </p:sp>
@@ -13761,7 +13742,7 @@
               <a:buNone/>
             </a:pPr>
             <a:r>
-              <a:rPr lang="en-US" sz="1000" dirty="0">
+              <a:rPr lang="en-US" sz="1100" dirty="0">
                 <a:solidFill>
                   <a:srgbClr val="9A98B0"/>
                 </a:solidFill>
@@ -13771,7 +13752,7 @@
               </a:rPr>
               <a:t>P4 · Payments &amp; Receipts (0/4)</a:t>
             </a:r>
-            <a:endParaRPr lang="en-US" sz="1000" dirty="0"/>
+            <a:endParaRPr lang="en-US" sz="1100" dirty="0"/>
           </a:p>
         </p:txBody>
       </p:sp>
@@ -13936,7 +13917,7 @@
               <a:buNone/>
             </a:pPr>
             <a:r>
-              <a:rPr lang="en-US" sz="1000" b="1" dirty="0">
+              <a:rPr lang="en-US" sz="1100" b="1" dirty="0">
                 <a:solidFill>
                   <a:srgbClr val="10A6A0"/>
                 </a:solidFill>
@@ -13946,7 +13927,7 @@
               </a:rPr>
               <a:t>ClinicBook · Clinic Dashboard</a:t>
             </a:r>
-            <a:endParaRPr lang="en-US" sz="1000" dirty="0"/>
+            <a:endParaRPr lang="en-US" sz="1100" dirty="0"/>
           </a:p>
         </p:txBody>
       </p:sp>
@@ -14085,7 +14066,7 @@
               <a:buNone/>
             </a:pPr>
             <a:r>
-              <a:rPr lang="en-US" sz="1050" b="1" dirty="0">
+              <a:rPr lang="en-US" sz="1100" b="1" dirty="0">
                 <a:solidFill>
                   <a:srgbClr val="17153A"/>
                 </a:solidFill>
@@ -14099,7 +14080,7 @@
               <a:buNone/>
             </a:pPr>
             <a:r>
-              <a:rPr lang="en-US" sz="1050" dirty="0">
+              <a:rPr lang="en-US" sz="1100" dirty="0">
                 <a:solidFill>
                   <a:srgbClr val="9A98B0"/>
                 </a:solidFill>
@@ -14113,7 +14094,7 @@
               <a:buNone/>
             </a:pPr>
             <a:r>
-              <a:rPr lang="en-US" sz="1050" b="1" dirty="0">
+              <a:rPr lang="en-US" sz="1100" b="1" dirty="0">
                 <a:solidFill>
                   <a:srgbClr val="17153A"/>
                 </a:solidFill>
@@ -14127,7 +14108,7 @@
               <a:buNone/>
             </a:pPr>
             <a:r>
-              <a:rPr lang="en-US" sz="1050" dirty="0">
+              <a:rPr lang="en-US" sz="1100" dirty="0">
                 <a:solidFill>
                   <a:srgbClr val="9A98B0"/>
                 </a:solidFill>
@@ -14137,7 +14118,7 @@
               </a:rPr>
               <a:t> open</a:t>
             </a:r>
-            <a:endParaRPr lang="en-US" sz="1050" dirty="0"/>
+            <a:endParaRPr lang="en-US" sz="1100" dirty="0"/>
           </a:p>
         </p:txBody>
       </p:sp>
@@ -14251,7 +14232,7 @@
               <a:buNone/>
             </a:pPr>
             <a:r>
-              <a:rPr lang="en-US" sz="1050" i="1" dirty="0">
+              <a:rPr lang="en-US" sz="1100" i="1" dirty="0">
                 <a:solidFill>
                   <a:srgbClr val="55536E"/>
                 </a:solidFill>
@@ -14261,7 +14242,7 @@
               </a:rPr>
               <a:t>Onboarding and schedules done; reminders in final review.</a:t>
             </a:r>
-            <a:endParaRPr lang="en-US" sz="1050" dirty="0"/>
+            <a:endParaRPr lang="en-US" sz="1100" dirty="0"/>
           </a:p>
         </p:txBody>
       </p:sp>
@@ -14312,7 +14293,7 @@
               <a:buNone/>
             </a:pPr>
             <a:r>
-              <a:rPr lang="en-US" sz="1000" dirty="0">
+              <a:rPr lang="en-US" sz="1100" dirty="0">
                 <a:solidFill>
                   <a:srgbClr val="17153A"/>
                 </a:solidFill>
@@ -14322,7 +14303,7 @@
               </a:rPr>
               <a:t>P1 · Clinic Onboarding (3/3)</a:t>
             </a:r>
-            <a:endParaRPr lang="en-US" sz="1000" dirty="0"/>
+            <a:endParaRPr lang="en-US" sz="1100" dirty="0"/>
           </a:p>
         </p:txBody>
       </p:sp>
@@ -14373,7 +14354,7 @@
               <a:buNone/>
             </a:pPr>
             <a:r>
-              <a:rPr lang="en-US" sz="1000" dirty="0">
+              <a:rPr lang="en-US" sz="1100" dirty="0">
                 <a:solidFill>
                   <a:srgbClr val="17153A"/>
                 </a:solidFill>
@@ -14383,7 +14364,7 @@
               </a:rPr>
               <a:t>P2 · Doctor Schedules (5/5)</a:t>
             </a:r>
-            <a:endParaRPr lang="en-US" sz="1000" dirty="0"/>
+            <a:endParaRPr lang="en-US" sz="1100" dirty="0"/>
           </a:p>
         </p:txBody>
       </p:sp>
@@ -14434,7 +14415,7 @@
               <a:buNone/>
             </a:pPr>
             <a:r>
-              <a:rPr lang="en-US" sz="1000" dirty="0">
+              <a:rPr lang="en-US" sz="1100" dirty="0">
                 <a:solidFill>
                   <a:srgbClr val="17153A"/>
                 </a:solidFill>
@@ -14444,7 +14425,7 @@
               </a:rPr>
               <a:t>P4 · Reminders, in review (5/5)</a:t>
             </a:r>
-            <a:endParaRPr lang="en-US" sz="1000" dirty="0"/>
+            <a:endParaRPr lang="en-US" sz="1100" dirty="0"/>
           </a:p>
         </p:txBody>
       </p:sp>
@@ -14500,7 +14481,7 @@
               <a:buNone/>
             </a:pPr>
             <a:r>
-              <a:rPr lang="en-US" sz="1000" dirty="0">
+              <a:rPr lang="en-US" sz="1100" dirty="0">
                 <a:solidFill>
                   <a:srgbClr val="9A98B0"/>
                 </a:solidFill>
@@ -14508,9 +14489,9 @@
                 <a:ea typeface="Poppins" pitchFamily="34" charset="-122"/>
                 <a:cs typeface="Poppins" pitchFamily="34" charset="-120"/>
               </a:rPr>
-              <a:t>P3 · Reports &amp; Exports (0/4)</a:t>
-            </a:r>
-            <a:endParaRPr lang="en-US" sz="1000" dirty="0"/>
+              <a:t>P3 · Reports &amp; Exports (0/3)</a:t>
+            </a:r>
+            <a:endParaRPr lang="en-US" sz="1100" dirty="0"/>
           </a:p>
         </p:txBody>
       </p:sp>
@@ -14675,7 +14656,7 @@
               <a:buNone/>
             </a:pPr>
             <a:r>
-              <a:rPr lang="en-US" sz="1000" b="1" dirty="0">
+              <a:rPr lang="en-US" sz="1100" b="1" dirty="0">
                 <a:solidFill>
                   <a:srgbClr val="FF6B4A"/>
                 </a:solidFill>
@@ -14685,7 +14666,7 @@
               </a:rPr>
               <a:t>PulseBoard · Analytics</a:t>
             </a:r>
-            <a:endParaRPr lang="en-US" sz="1000" dirty="0"/>
+            <a:endParaRPr lang="en-US" sz="1100" dirty="0"/>
           </a:p>
         </p:txBody>
       </p:sp>
@@ -14846,7 +14827,7 @@
               <a:buNone/>
             </a:pPr>
             <a:r>
-              <a:rPr lang="en-US" sz="1050" b="1" dirty="0">
+              <a:rPr lang="en-US" sz="1100" b="1" dirty="0">
                 <a:solidFill>
                   <a:srgbClr val="17153A"/>
                 </a:solidFill>
@@ -14860,7 +14841,7 @@
               <a:buNone/>
             </a:pPr>
             <a:r>
-              <a:rPr lang="en-US" sz="1050" dirty="0">
+              <a:rPr lang="en-US" sz="1100" dirty="0">
                 <a:solidFill>
                   <a:srgbClr val="9A98B0"/>
                 </a:solidFill>
@@ -14874,7 +14855,7 @@
               <a:buNone/>
             </a:pPr>
             <a:r>
-              <a:rPr lang="en-US" sz="1050" b="1" dirty="0">
+              <a:rPr lang="en-US" sz="1100" b="1" dirty="0">
                 <a:solidFill>
                   <a:srgbClr val="17153A"/>
                 </a:solidFill>
@@ -14888,7 +14869,7 @@
               <a:buNone/>
             </a:pPr>
             <a:r>
-              <a:rPr lang="en-US" sz="1050" dirty="0">
+              <a:rPr lang="en-US" sz="1100" dirty="0">
                 <a:solidFill>
                   <a:srgbClr val="9A98B0"/>
                 </a:solidFill>
@@ -14898,7 +14879,7 @@
               </a:rPr>
               <a:t> open</a:t>
             </a:r>
-            <a:endParaRPr lang="en-US" sz="1050" dirty="0"/>
+            <a:endParaRPr lang="en-US" sz="1100" dirty="0"/>
           </a:p>
         </p:txBody>
       </p:sp>
@@ -15012,7 +14993,7 @@
               <a:buNone/>
             </a:pPr>
             <a:r>
-              <a:rPr lang="en-US" sz="1050" i="1" dirty="0">
+              <a:rPr lang="en-US" sz="1100" i="1" dirty="0">
                 <a:solidFill>
                   <a:srgbClr val="55536E"/>
                 </a:solidFill>
@@ -15020,9 +15001,9 @@
                 <a:ea typeface="Poppins" pitchFamily="34" charset="-122"/>
                 <a:cs typeface="Poppins" pitchFamily="34" charset="-120"/>
               </a:rPr>
-              <a:t>Data transfer finished; usage tracking being rolled out.</a:t>
-            </a:r>
-            <a:endParaRPr lang="en-US" sz="1050" dirty="0"/>
+              <a:t>Data transfer done; usage tracking rolling out.</a:t>
+            </a:r>
+            <a:endParaRPr lang="en-US" sz="1100" dirty="0"/>
           </a:p>
         </p:txBody>
       </p:sp>
@@ -15073,7 +15054,7 @@
               <a:buNone/>
             </a:pPr>
             <a:r>
-              <a:rPr lang="en-US" sz="1000" dirty="0">
+              <a:rPr lang="en-US" sz="1100" dirty="0">
                 <a:solidFill>
                   <a:srgbClr val="17153A"/>
                 </a:solidFill>
@@ -15083,7 +15064,7 @@
               </a:rPr>
               <a:t>Data transfer to new system</a:t>
             </a:r>
-            <a:endParaRPr lang="en-US" sz="1000" dirty="0"/>
+            <a:endParaRPr lang="en-US" sz="1100" dirty="0"/>
           </a:p>
         </p:txBody>
       </p:sp>
@@ -15134,7 +15115,7 @@
               <a:buNone/>
             </a:pPr>
             <a:r>
-              <a:rPr lang="en-US" sz="1000" dirty="0">
+              <a:rPr lang="en-US" sz="1100" dirty="0">
                 <a:solidFill>
                   <a:srgbClr val="17153A"/>
                 </a:solidFill>
@@ -15144,7 +15125,7 @@
               </a:rPr>
               <a:t>Event plan agreed</a:t>
             </a:r>
-            <a:endParaRPr lang="en-US" sz="1000" dirty="0"/>
+            <a:endParaRPr lang="en-US" sz="1100" dirty="0"/>
           </a:p>
         </p:txBody>
       </p:sp>
@@ -15195,7 +15176,7 @@
               <a:buNone/>
             </a:pPr>
             <a:r>
-              <a:rPr lang="en-US" sz="1000" dirty="0">
+              <a:rPr lang="en-US" sz="1100" dirty="0">
                 <a:solidFill>
                   <a:srgbClr val="17153A"/>
                 </a:solidFill>
@@ -15205,7 +15186,7 @@
               </a:rPr>
               <a:t>Usage tracking rollout</a:t>
             </a:r>
-            <a:endParaRPr lang="en-US" sz="1000" dirty="0"/>
+            <a:endParaRPr lang="en-US" sz="1100" dirty="0"/>
           </a:p>
         </p:txBody>
       </p:sp>
@@ -15256,7 +15237,7 @@
               <a:buNone/>
             </a:pPr>
             <a:r>
-              <a:rPr lang="en-US" sz="1000" dirty="0">
+              <a:rPr lang="en-US" sz="1100" dirty="0">
                 <a:solidFill>
                   <a:srgbClr val="17153A"/>
                 </a:solidFill>
@@ -15264,9 +15245,9 @@
                 <a:ea typeface="Poppins" pitchFamily="34" charset="-122"/>
                 <a:cs typeface="Poppins" pitchFamily="34" charset="-120"/>
               </a:rPr>
-              <a:t>Code reviews · 3 features</a:t>
-            </a:r>
-            <a:endParaRPr lang="en-US" sz="1000" dirty="0"/>
+              <a:t>Code reviews, 3 features</a:t>
+            </a:r>
+            <a:endParaRPr lang="en-US" sz="1100" dirty="0"/>
           </a:p>
         </p:txBody>
       </p:sp>
@@ -15295,7 +15276,7 @@
               <a:buNone/>
             </a:pPr>
             <a:r>
-              <a:rPr lang="en-US" sz="950" i="1" dirty="0">
+              <a:rPr lang="en-US" sz="1100" i="1" dirty="0">
                 <a:solidFill>
                   <a:srgbClr val="9A98B0"/>
                 </a:solidFill>
@@ -15305,7 +15286,7 @@
               </a:rPr>
               <a:t>Done/Open = planned tasks this week; work in review stays open until approved.</a:t>
             </a:r>
-            <a:endParaRPr lang="en-US" sz="950" dirty="0"/>
+            <a:endParaRPr lang="en-US" sz="1100" dirty="0"/>
           </a:p>
         </p:txBody>
       </p:sp>
@@ -15343,7 +15324,7 @@
       </p:grpSpPr>
       <p:pic>
         <p:nvPicPr>
-          <p:cNvPr id="2" name="Image 0" descr="/sessions/beautiful-vigilant-darwin/tmp/showship-deck-1uRcfa/trail_corner.png">    </p:cNvPr>
+          <p:cNvPr id="2" name="Image 0" descr="/var/folders/lw/rmylcyvd5rjfxk9g1z9rrm8w0000gq/T/showship-deck-SxFlm7/trail_corner.png">    </p:cNvPr>
           <p:cNvPicPr>
             <a:picLocks noChangeAspect="1"/>
           </p:cNvPicPr>
@@ -15410,7 +15391,7 @@
               <a:buNone/>
             </a:pPr>
             <a:r>
-              <a:rPr lang="en-US" sz="1150" b="1" spc="200" kern="0" dirty="0">
+              <a:rPr lang="en-US" sz="1150" b="1" dirty="0">
                 <a:solidFill>
                   <a:srgbClr val="6C4CF5"/>
                 </a:solidFill>
@@ -15418,7 +15399,7 @@
                 <a:ea typeface="Poppins" pitchFamily="34" charset="-122"/>
                 <a:cs typeface="Poppins" pitchFamily="34" charset="-120"/>
               </a:rPr>
-              <a:t>ENGINEERING ACTIVITY · GITHUB</a:t>
+              <a:t>Engineering Activity · GitHub</a:t>
             </a:r>
             <a:endParaRPr lang="en-US" sz="1150" dirty="0"/>
           </a:p>
@@ -15467,7 +15448,7 @@
       </p:sp>
       <p:pic>
         <p:nvPicPr>
-          <p:cNvPr id="6" name="Image 1" descr="/sessions/beautiful-vigilant-darwin/tmp/showship-deck-1uRcfa/trail_mark.png">    </p:cNvPr>
+          <p:cNvPr id="6" name="Image 1" descr="/var/folders/lw/rmylcyvd5rjfxk9g1z9rrm8w0000gq/T/showship-deck-SxFlm7/trail_mark.png">    </p:cNvPr>
           <p:cNvPicPr>
             <a:picLocks noChangeAspect="1"/>
           </p:cNvPicPr>
@@ -15514,7 +15495,7 @@
               <a:buNone/>
             </a:pPr>
             <a:r>
-              <a:rPr lang="en-US" sz="900" dirty="0">
+              <a:rPr lang="en-US" sz="1100" dirty="0">
                 <a:solidFill>
                   <a:srgbClr val="9A98B0"/>
                 </a:solidFill>
@@ -15528,7 +15509,7 @@
               <a:buNone/>
             </a:pPr>
             <a:r>
-              <a:rPr lang="en-US" sz="900" b="1" dirty="0">
+              <a:rPr lang="en-US" sz="1100" b="1" dirty="0">
                 <a:solidFill>
                   <a:srgbClr val="17153A"/>
                 </a:solidFill>
@@ -15538,7 +15519,7 @@
               </a:rPr>
               <a:t>Showship</a:t>
             </a:r>
-            <a:endParaRPr lang="en-US" sz="900" dirty="0"/>
+            <a:endParaRPr lang="en-US" sz="1100" dirty="0"/>
           </a:p>
         </p:txBody>
       </p:sp>
@@ -15567,7 +15548,7 @@
               <a:buNone/>
             </a:pPr>
             <a:r>
-              <a:rPr lang="en-US" sz="900" b="1" dirty="0">
+              <a:rPr lang="en-US" sz="1100" b="1" dirty="0">
                 <a:solidFill>
                   <a:srgbClr val="9A98B0"/>
                 </a:solidFill>
@@ -15577,7 +15558,7 @@
               </a:rPr>
               <a:t>9</a:t>
             </a:r>
-            <a:endParaRPr lang="en-US" sz="900" dirty="0"/>
+            <a:endParaRPr lang="en-US" sz="1100" dirty="0"/>
           </a:p>
         </p:txBody>
       </p:sp>
@@ -15656,7 +15637,7 @@
               <a:buNone/>
             </a:pPr>
             <a:r>
-              <a:rPr lang="en-US" sz="1050" i="1" dirty="0">
+              <a:rPr lang="en-US" sz="1100" i="1" dirty="0">
                 <a:solidFill>
                   <a:srgbClr val="9A98B0"/>
                 </a:solidFill>
@@ -15666,7 +15647,7 @@
               </a:rPr>
               <a:t>Source: GitHub activity this week.</a:t>
             </a:r>
-            <a:endParaRPr lang="en-US" sz="1050" dirty="0"/>
+            <a:endParaRPr lang="en-US" sz="1100" dirty="0"/>
           </a:p>
         </p:txBody>
       </p:sp>
@@ -15707,8 +15688,8 @@
         </p:nvSpPr>
         <p:spPr>
           <a:xfrm>
-            <a:off x="8915400" y="1892808"/>
-            <a:ext cx="2359152" cy="739292"/>
+            <a:off x="8915400" y="1874520"/>
+            <a:ext cx="2359152" cy="604876"/>
           </a:xfrm>
           <a:prstGeom prst="rect">
             <a:avLst/>
@@ -15724,7 +15705,7 @@
               <a:buNone/>
             </a:pPr>
             <a:r>
-              <a:rPr lang="en-US" sz="3400" b="1" dirty="0">
+              <a:rPr lang="en-US" sz="3000" b="1" dirty="0">
                 <a:solidFill>
                   <a:srgbClr val="FFFFFF"/>
                 </a:solidFill>
@@ -15734,7 +15715,7 @@
               </a:rPr>
               <a:t>3</a:t>
             </a:r>
-            <a:endParaRPr lang="en-US" sz="3400" dirty="0"/>
+            <a:endParaRPr lang="en-US" sz="3000" dirty="0"/>
           </a:p>
         </p:txBody>
       </p:sp>
@@ -15746,7 +15727,7 @@
         </p:nvSpPr>
         <p:spPr>
           <a:xfrm>
-            <a:off x="8915400" y="2589581"/>
+            <a:off x="8915400" y="2562697"/>
             <a:ext cx="2359152" cy="470459"/>
           </a:xfrm>
           <a:prstGeom prst="rect">
@@ -15821,8 +15802,8 @@
         </p:nvSpPr>
         <p:spPr>
           <a:xfrm>
-            <a:off x="8915400" y="3438144"/>
-            <a:ext cx="2359152" cy="739292"/>
+            <a:off x="8915400" y="3419856"/>
+            <a:ext cx="2359152" cy="604876"/>
           </a:xfrm>
           <a:prstGeom prst="rect">
             <a:avLst/>
@@ -15838,7 +15819,7 @@
               <a:buNone/>
             </a:pPr>
             <a:r>
-              <a:rPr lang="en-US" sz="3400" b="1" dirty="0">
+              <a:rPr lang="en-US" sz="3000" b="1" dirty="0">
                 <a:solidFill>
                   <a:srgbClr val="6C4CF5"/>
                 </a:solidFill>
@@ -15848,7 +15829,7 @@
               </a:rPr>
               <a:t>2</a:t>
             </a:r>
-            <a:endParaRPr lang="en-US" sz="3400" dirty="0"/>
+            <a:endParaRPr lang="en-US" sz="3000" dirty="0"/>
           </a:p>
         </p:txBody>
       </p:sp>
@@ -15860,7 +15841,7 @@
         </p:nvSpPr>
         <p:spPr>
           <a:xfrm>
-            <a:off x="8915400" y="4134917"/>
+            <a:off x="8915400" y="4108033"/>
             <a:ext cx="2359152" cy="470459"/>
           </a:xfrm>
           <a:prstGeom prst="rect">
@@ -15935,8 +15916,8 @@
         </p:nvSpPr>
         <p:spPr>
           <a:xfrm>
-            <a:off x="8915400" y="4983480"/>
-            <a:ext cx="2359152" cy="739292"/>
+            <a:off x="8915400" y="4965192"/>
+            <a:ext cx="2359152" cy="604876"/>
           </a:xfrm>
           <a:prstGeom prst="rect">
             <a:avLst/>
@@ -15952,7 +15933,7 @@
               <a:buNone/>
             </a:pPr>
             <a:r>
-              <a:rPr lang="en-US" sz="3400" b="1" dirty="0">
+              <a:rPr lang="en-US" sz="3000" b="1" dirty="0">
                 <a:solidFill>
                   <a:srgbClr val="6C4CF5"/>
                 </a:solidFill>
@@ -15962,7 +15943,7 @@
               </a:rPr>
               <a:t>7</a:t>
             </a:r>
-            <a:endParaRPr lang="en-US" sz="3400" dirty="0"/>
+            <a:endParaRPr lang="en-US" sz="3000" dirty="0"/>
           </a:p>
         </p:txBody>
       </p:sp>
@@ -15974,7 +15955,7 @@
         </p:nvSpPr>
         <p:spPr>
           <a:xfrm>
-            <a:off x="8915400" y="5680253"/>
+            <a:off x="8915400" y="5653369"/>
             <a:ext cx="2359152" cy="470459"/>
           </a:xfrm>
           <a:prstGeom prst="rect">

--- a/docs/example-deck-showship.pptx
+++ b/docs/example-deck-showship.pptx
@@ -2360,7 +2360,7 @@
       </p:grpSpPr>
       <p:pic>
         <p:nvPicPr>
-          <p:cNvPr id="2" name="Image 0" descr="/var/folders/lw/rmylcyvd5rjfxk9g1z9rrm8w0000gq/T/showship-deck-o8V0pU/trail_bookend.png">    </p:cNvPr>
+          <p:cNvPr id="2" name="Image 0" descr="/var/folders/lw/rmylcyvd5rjfxk9g1z9rrm8w0000gq/T/showship-deck-dePtSj/trail_bookend.png">    </p:cNvPr>
           <p:cNvPicPr>
             <a:picLocks noChangeAspect="1"/>
           </p:cNvPicPr>
@@ -2384,7 +2384,7 @@
       </p:pic>
       <p:pic>
         <p:nvPicPr>
-          <p:cNvPr id="3" name="Image 1" descr="/var/folders/lw/rmylcyvd5rjfxk9g1z9rrm8w0000gq/T/showship-deck-o8V0pU/logo_trimmed.png">    </p:cNvPr>
+          <p:cNvPr id="3" name="Image 1" descr="/var/folders/lw/rmylcyvd5rjfxk9g1z9rrm8w0000gq/T/showship-deck-dePtSj/logo_trimmed.png">    </p:cNvPr>
           <p:cNvPicPr>
             <a:picLocks noChangeAspect="1"/>
           </p:cNvPicPr>
@@ -2705,7 +2705,7 @@
       </p:sp>
       <p:pic>
         <p:nvPicPr>
-          <p:cNvPr id="11" name="Image 2" descr="/var/folders/lw/rmylcyvd5rjfxk9g1z9rrm8w0000gq/T/showship-deck-o8V0pU/trail_mark.png">    </p:cNvPr>
+          <p:cNvPr id="11" name="Image 2" descr="/var/folders/lw/rmylcyvd5rjfxk9g1z9rrm8w0000gq/T/showship-deck-dePtSj/trail_mark.png">    </p:cNvPr>
           <p:cNvPicPr>
             <a:picLocks noChangeAspect="1"/>
           </p:cNvPicPr>
@@ -2814,7 +2814,7 @@
       </p:grpSpPr>
       <p:pic>
         <p:nvPicPr>
-          <p:cNvPr id="2" name="Image 0" descr="/var/folders/lw/rmylcyvd5rjfxk9g1z9rrm8w0000gq/T/showship-deck-o8V0pU/trail_corner.png">    </p:cNvPr>
+          <p:cNvPr id="2" name="Image 0" descr="/var/folders/lw/rmylcyvd5rjfxk9g1z9rrm8w0000gq/T/showship-deck-dePtSj/trail_corner.png">    </p:cNvPr>
           <p:cNvPicPr>
             <a:picLocks noChangeAspect="1"/>
           </p:cNvPicPr>
@@ -2938,7 +2938,7 @@
       </p:sp>
       <p:pic>
         <p:nvPicPr>
-          <p:cNvPr id="6" name="Image 1" descr="/var/folders/lw/rmylcyvd5rjfxk9g1z9rrm8w0000gq/T/showship-deck-o8V0pU/trail_mark.png">    </p:cNvPr>
+          <p:cNvPr id="6" name="Image 1" descr="/var/folders/lw/rmylcyvd5rjfxk9g1z9rrm8w0000gq/T/showship-deck-dePtSj/trail_mark.png">    </p:cNvPr>
           <p:cNvPicPr>
             <a:picLocks noChangeAspect="1"/>
           </p:cNvPicPr>
@@ -3512,7 +3512,7 @@
       </p:grpSpPr>
       <p:pic>
         <p:nvPicPr>
-          <p:cNvPr id="2" name="Image 0" descr="/var/folders/lw/rmylcyvd5rjfxk9g1z9rrm8w0000gq/T/showship-deck-o8V0pU/trail_corner.png">    </p:cNvPr>
+          <p:cNvPr id="2" name="Image 0" descr="/var/folders/lw/rmylcyvd5rjfxk9g1z9rrm8w0000gq/T/showship-deck-dePtSj/trail_corner.png">    </p:cNvPr>
           <p:cNvPicPr>
             <a:picLocks noChangeAspect="1"/>
           </p:cNvPicPr>
@@ -3636,7 +3636,7 @@
       </p:sp>
       <p:pic>
         <p:nvPicPr>
-          <p:cNvPr id="6" name="Image 1" descr="/var/folders/lw/rmylcyvd5rjfxk9g1z9rrm8w0000gq/T/showship-deck-o8V0pU/trail_mark.png">    </p:cNvPr>
+          <p:cNvPr id="6" name="Image 1" descr="/var/folders/lw/rmylcyvd5rjfxk9g1z9rrm8w0000gq/T/showship-deck-dePtSj/trail_mark.png">    </p:cNvPr>
           <p:cNvPicPr>
             <a:picLocks noChangeAspect="1"/>
           </p:cNvPicPr>
@@ -5136,7 +5136,7 @@
       </p:grpSpPr>
       <p:pic>
         <p:nvPicPr>
-          <p:cNvPr id="2" name="Image 0" descr="/var/folders/lw/rmylcyvd5rjfxk9g1z9rrm8w0000gq/T/showship-deck-o8V0pU/trail_bookend.png">    </p:cNvPr>
+          <p:cNvPr id="2" name="Image 0" descr="/var/folders/lw/rmylcyvd5rjfxk9g1z9rrm8w0000gq/T/showship-deck-dePtSj/trail_bookend.png">    </p:cNvPr>
           <p:cNvPicPr>
             <a:picLocks noChangeAspect="1"/>
           </p:cNvPicPr>
@@ -5160,7 +5160,7 @@
       </p:pic>
       <p:pic>
         <p:nvPicPr>
-          <p:cNvPr id="3" name="Image 1" descr="/var/folders/lw/rmylcyvd5rjfxk9g1z9rrm8w0000gq/T/showship-deck-o8V0pU/logo_trimmed.png">    </p:cNvPr>
+          <p:cNvPr id="3" name="Image 1" descr="/var/folders/lw/rmylcyvd5rjfxk9g1z9rrm8w0000gq/T/showship-deck-dePtSj/logo_trimmed.png">    </p:cNvPr>
           <p:cNvPicPr>
             <a:picLocks noChangeAspect="1"/>
           </p:cNvPicPr>
@@ -5458,7 +5458,7 @@
       </p:sp>
       <p:pic>
         <p:nvPicPr>
-          <p:cNvPr id="11" name="Image 2" descr="/var/folders/lw/rmylcyvd5rjfxk9g1z9rrm8w0000gq/T/showship-deck-o8V0pU/trail_mark.png">    </p:cNvPr>
+          <p:cNvPr id="11" name="Image 2" descr="/var/folders/lw/rmylcyvd5rjfxk9g1z9rrm8w0000gq/T/showship-deck-dePtSj/trail_mark.png">    </p:cNvPr>
           <p:cNvPicPr>
             <a:picLocks noChangeAspect="1"/>
           </p:cNvPicPr>
@@ -5567,7 +5567,7 @@
       </p:grpSpPr>
       <p:pic>
         <p:nvPicPr>
-          <p:cNvPr id="2" name="Image 0" descr="/var/folders/lw/rmylcyvd5rjfxk9g1z9rrm8w0000gq/T/showship-deck-o8V0pU/trail_corner.png">    </p:cNvPr>
+          <p:cNvPr id="2" name="Image 0" descr="/var/folders/lw/rmylcyvd5rjfxk9g1z9rrm8w0000gq/T/showship-deck-dePtSj/trail_corner.png">    </p:cNvPr>
           <p:cNvPicPr>
             <a:picLocks noChangeAspect="1"/>
           </p:cNvPicPr>
@@ -5691,7 +5691,7 @@
       </p:sp>
       <p:pic>
         <p:nvPicPr>
-          <p:cNvPr id="6" name="Image 1" descr="/var/folders/lw/rmylcyvd5rjfxk9g1z9rrm8w0000gq/T/showship-deck-o8V0pU/trail_mark.png">    </p:cNvPr>
+          <p:cNvPr id="6" name="Image 1" descr="/var/folders/lw/rmylcyvd5rjfxk9g1z9rrm8w0000gq/T/showship-deck-dePtSj/trail_mark.png">    </p:cNvPr>
           <p:cNvPicPr>
             <a:picLocks noChangeAspect="1"/>
           </p:cNvPicPr>
@@ -7009,7 +7009,7 @@
       </p:grpSpPr>
       <p:pic>
         <p:nvPicPr>
-          <p:cNvPr id="2" name="Image 0" descr="/var/folders/lw/rmylcyvd5rjfxk9g1z9rrm8w0000gq/T/showship-deck-o8V0pU/trail_corner.png">    </p:cNvPr>
+          <p:cNvPr id="2" name="Image 0" descr="/var/folders/lw/rmylcyvd5rjfxk9g1z9rrm8w0000gq/T/showship-deck-dePtSj/trail_corner.png">    </p:cNvPr>
           <p:cNvPicPr>
             <a:picLocks noChangeAspect="1"/>
           </p:cNvPicPr>
@@ -7133,7 +7133,7 @@
       </p:sp>
       <p:pic>
         <p:nvPicPr>
-          <p:cNvPr id="6" name="Image 1" descr="/var/folders/lw/rmylcyvd5rjfxk9g1z9rrm8w0000gq/T/showship-deck-o8V0pU/trail_mark.png">    </p:cNvPr>
+          <p:cNvPr id="6" name="Image 1" descr="/var/folders/lw/rmylcyvd5rjfxk9g1z9rrm8w0000gq/T/showship-deck-dePtSj/trail_mark.png">    </p:cNvPr>
           <p:cNvPicPr>
             <a:picLocks noChangeAspect="1"/>
           </p:cNvPicPr>
@@ -7310,7 +7310,7 @@
       </p:sp>
       <p:pic>
         <p:nvPicPr>
-          <p:cNvPr id="11" name="Image 2" descr="/var/folders/lw/rmylcyvd5rjfxk9g1z9rrm8w0000gq/T/showship-deck-o8V0pU/trail_tl_1.png">    </p:cNvPr>
+          <p:cNvPr id="11" name="Image 2" descr="/var/folders/lw/rmylcyvd5rjfxk9g1z9rrm8w0000gq/T/showship-deck-dePtSj/trail_tl_1.png">    </p:cNvPr>
           <p:cNvPicPr>
             <a:picLocks noChangeAspect="1"/>
           </p:cNvPicPr>
@@ -8270,7 +8270,7 @@
       </p:grpSpPr>
       <p:pic>
         <p:nvPicPr>
-          <p:cNvPr id="2" name="Image 0" descr="/var/folders/lw/rmylcyvd5rjfxk9g1z9rrm8w0000gq/T/showship-deck-o8V0pU/trail_corner.png">    </p:cNvPr>
+          <p:cNvPr id="2" name="Image 0" descr="/var/folders/lw/rmylcyvd5rjfxk9g1z9rrm8w0000gq/T/showship-deck-dePtSj/trail_corner.png">    </p:cNvPr>
           <p:cNvPicPr>
             <a:picLocks noChangeAspect="1"/>
           </p:cNvPicPr>
@@ -8394,7 +8394,7 @@
       </p:sp>
       <p:pic>
         <p:nvPicPr>
-          <p:cNvPr id="6" name="Image 1" descr="/var/folders/lw/rmylcyvd5rjfxk9g1z9rrm8w0000gq/T/showship-deck-o8V0pU/trail_mark.png">    </p:cNvPr>
+          <p:cNvPr id="6" name="Image 1" descr="/var/folders/lw/rmylcyvd5rjfxk9g1z9rrm8w0000gq/T/showship-deck-dePtSj/trail_mark.png">    </p:cNvPr>
           <p:cNvPicPr>
             <a:picLocks noChangeAspect="1"/>
           </p:cNvPicPr>
@@ -9671,7 +9671,7 @@
       </p:grpSpPr>
       <p:pic>
         <p:nvPicPr>
-          <p:cNvPr id="2" name="Image 0" descr="/var/folders/lw/rmylcyvd5rjfxk9g1z9rrm8w0000gq/T/showship-deck-o8V0pU/trail_corner.png">    </p:cNvPr>
+          <p:cNvPr id="2" name="Image 0" descr="/var/folders/lw/rmylcyvd5rjfxk9g1z9rrm8w0000gq/T/showship-deck-dePtSj/trail_corner.png">    </p:cNvPr>
           <p:cNvPicPr>
             <a:picLocks noChangeAspect="1"/>
           </p:cNvPicPr>
@@ -9795,7 +9795,7 @@
       </p:sp>
       <p:pic>
         <p:nvPicPr>
-          <p:cNvPr id="6" name="Image 1" descr="/var/folders/lw/rmylcyvd5rjfxk9g1z9rrm8w0000gq/T/showship-deck-o8V0pU/trail_mark.png">    </p:cNvPr>
+          <p:cNvPr id="6" name="Image 1" descr="/var/folders/lw/rmylcyvd5rjfxk9g1z9rrm8w0000gq/T/showship-deck-dePtSj/trail_mark.png">    </p:cNvPr>
           <p:cNvPicPr>
             <a:picLocks noChangeAspect="1"/>
           </p:cNvPicPr>
@@ -11335,7 +11335,7 @@
       </p:grpSpPr>
       <p:pic>
         <p:nvPicPr>
-          <p:cNvPr id="2" name="Image 0" descr="/var/folders/lw/rmylcyvd5rjfxk9g1z9rrm8w0000gq/T/showship-deck-o8V0pU/trail_corner.png">    </p:cNvPr>
+          <p:cNvPr id="2" name="Image 0" descr="/var/folders/lw/rmylcyvd5rjfxk9g1z9rrm8w0000gq/T/showship-deck-dePtSj/trail_corner.png">    </p:cNvPr>
           <p:cNvPicPr>
             <a:picLocks noChangeAspect="1"/>
           </p:cNvPicPr>
@@ -11459,7 +11459,7 @@
       </p:sp>
       <p:pic>
         <p:nvPicPr>
-          <p:cNvPr id="6" name="Image 1" descr="/var/folders/lw/rmylcyvd5rjfxk9g1z9rrm8w0000gq/T/showship-deck-o8V0pU/trail_mark.png">    </p:cNvPr>
+          <p:cNvPr id="6" name="Image 1" descr="/var/folders/lw/rmylcyvd5rjfxk9g1z9rrm8w0000gq/T/showship-deck-dePtSj/trail_mark.png">    </p:cNvPr>
           <p:cNvPicPr>
             <a:picLocks noChangeAspect="1"/>
           </p:cNvPicPr>
@@ -11582,7 +11582,7 @@
         <p:spPr>
           <a:xfrm>
             <a:off x="640080" y="1783080"/>
-            <a:ext cx="3453384" cy="4160520"/>
+            <a:ext cx="3453384" cy="3694938"/>
           </a:xfrm>
           <a:prstGeom prst="roundRect">
             <a:avLst>
@@ -12157,7 +12157,7 @@
         <p:spPr>
           <a:xfrm>
             <a:off x="4367784" y="1783080"/>
-            <a:ext cx="3453384" cy="4160520"/>
+            <a:ext cx="3453384" cy="3694938"/>
           </a:xfrm>
           <a:prstGeom prst="roundRect">
             <a:avLst>
@@ -12510,7 +12510,7 @@
         <p:spPr>
           <a:xfrm>
             <a:off x="4843272" y="4536186"/>
-            <a:ext cx="2749296" cy="390144"/>
+            <a:ext cx="2749296" cy="222504"/>
           </a:xfrm>
           <a:prstGeom prst="rect">
             <a:avLst/>
@@ -12548,7 +12548,7 @@
         </p:nvSpPr>
         <p:spPr>
           <a:xfrm>
-            <a:off x="4596384" y="4981194"/>
+            <a:off x="4596384" y="4813554"/>
             <a:ext cx="118872" cy="118872"/>
           </a:xfrm>
           <a:prstGeom prst="ellipse">
@@ -12568,7 +12568,7 @@
         </p:nvSpPr>
         <p:spPr>
           <a:xfrm>
-            <a:off x="4843272" y="4926330"/>
+            <a:off x="4843272" y="4758690"/>
             <a:ext cx="2749296" cy="222504"/>
           </a:xfrm>
           <a:prstGeom prst="rect">
@@ -12607,7 +12607,7 @@
         </p:nvSpPr>
         <p:spPr>
           <a:xfrm>
-            <a:off x="4596384" y="5203698"/>
+            <a:off x="4596384" y="5036058"/>
             <a:ext cx="118872" cy="118872"/>
           </a:xfrm>
           <a:prstGeom prst="ellipse">
@@ -12627,7 +12627,7 @@
         </p:nvSpPr>
         <p:spPr>
           <a:xfrm>
-            <a:off x="4843272" y="5148834"/>
+            <a:off x="4843272" y="4981194"/>
             <a:ext cx="2749296" cy="222504"/>
           </a:xfrm>
           <a:prstGeom prst="rect">
@@ -12667,7 +12667,7 @@
         <p:spPr>
           <a:xfrm>
             <a:off x="8095488" y="1783080"/>
-            <a:ext cx="3453384" cy="4160520"/>
+            <a:ext cx="3453384" cy="3694938"/>
           </a:xfrm>
           <a:prstGeom prst="roundRect">
             <a:avLst>
@@ -12860,7 +12860,7 @@
         <p:spPr>
           <a:xfrm>
             <a:off x="8324088" y="2871597"/>
-            <a:ext cx="2996184" cy="792480"/>
+            <a:ext cx="2996184" cy="594360"/>
           </a:xfrm>
           <a:prstGeom prst="rect">
             <a:avLst/>
@@ -12901,7 +12901,7 @@
         </p:nvSpPr>
         <p:spPr>
           <a:xfrm>
-            <a:off x="8324088" y="3801237"/>
+            <a:off x="8324088" y="3603117"/>
             <a:ext cx="2996184" cy="228600"/>
           </a:xfrm>
           <a:prstGeom prst="rect">
@@ -12940,7 +12940,7 @@
         </p:nvSpPr>
         <p:spPr>
           <a:xfrm>
-            <a:off x="8324088" y="4130421"/>
+            <a:off x="8324088" y="3932301"/>
             <a:ext cx="118872" cy="118872"/>
           </a:xfrm>
           <a:prstGeom prst="ellipse">
@@ -12962,7 +12962,7 @@
         </p:nvSpPr>
         <p:spPr>
           <a:xfrm>
-            <a:off x="8570976" y="4075557"/>
+            <a:off x="8570976" y="3877437"/>
             <a:ext cx="2749296" cy="222504"/>
           </a:xfrm>
           <a:prstGeom prst="rect">
@@ -13001,7 +13001,7 @@
         </p:nvSpPr>
         <p:spPr>
           <a:xfrm>
-            <a:off x="8324088" y="4352925"/>
+            <a:off x="8324088" y="4154805"/>
             <a:ext cx="118872" cy="118872"/>
           </a:xfrm>
           <a:prstGeom prst="ellipse">
@@ -13023,7 +13023,7 @@
         </p:nvSpPr>
         <p:spPr>
           <a:xfrm>
-            <a:off x="8570976" y="4298061"/>
+            <a:off x="8570976" y="4099941"/>
             <a:ext cx="2749296" cy="222504"/>
           </a:xfrm>
           <a:prstGeom prst="rect">
@@ -13062,7 +13062,7 @@
         </p:nvSpPr>
         <p:spPr>
           <a:xfrm>
-            <a:off x="8324088" y="4575429"/>
+            <a:off x="8324088" y="4377309"/>
             <a:ext cx="118872" cy="118872"/>
           </a:xfrm>
           <a:prstGeom prst="ellipse">
@@ -13084,7 +13084,7 @@
         </p:nvSpPr>
         <p:spPr>
           <a:xfrm>
-            <a:off x="8570976" y="4520565"/>
+            <a:off x="8570976" y="4322445"/>
             <a:ext cx="2749296" cy="222504"/>
           </a:xfrm>
           <a:prstGeom prst="rect">
@@ -13123,7 +13123,7 @@
         </p:nvSpPr>
         <p:spPr>
           <a:xfrm>
-            <a:off x="640080" y="5989320"/>
+            <a:off x="640080" y="5615178"/>
             <a:ext cx="10908792" cy="274320"/>
           </a:xfrm>
           <a:prstGeom prst="rect">
@@ -13188,7 +13188,7 @@
       </p:grpSpPr>
       <p:pic>
         <p:nvPicPr>
-          <p:cNvPr id="2" name="Image 0" descr="/var/folders/lw/rmylcyvd5rjfxk9g1z9rrm8w0000gq/T/showship-deck-o8V0pU/trail_corner.png">    </p:cNvPr>
+          <p:cNvPr id="2" name="Image 0" descr="/var/folders/lw/rmylcyvd5rjfxk9g1z9rrm8w0000gq/T/showship-deck-dePtSj/trail_corner.png">    </p:cNvPr>
           <p:cNvPicPr>
             <a:picLocks noChangeAspect="1"/>
           </p:cNvPicPr>
@@ -13312,7 +13312,7 @@
       </p:sp>
       <p:pic>
         <p:nvPicPr>
-          <p:cNvPr id="6" name="Image 1" descr="/var/folders/lw/rmylcyvd5rjfxk9g1z9rrm8w0000gq/T/showship-deck-o8V0pU/trail_mark.png">    </p:cNvPr>
+          <p:cNvPr id="6" name="Image 1" descr="/var/folders/lw/rmylcyvd5rjfxk9g1z9rrm8w0000gq/T/showship-deck-dePtSj/trail_mark.png">    </p:cNvPr>
           <p:cNvPicPr>
             <a:picLocks noChangeAspect="1"/>
           </p:cNvPicPr>
@@ -13804,7 +13804,7 @@
       </p:sp>
       <p:pic>
         <p:nvPicPr>
-          <p:cNvPr id="20" name="Image 2" descr="/var/folders/lw/rmylcyvd5rjfxk9g1z9rrm8w0000gq/T/showship-deck-o8V0pU/iconc_Check_FFFFFF.png">    </p:cNvPr>
+          <p:cNvPr id="20" name="Image 2" descr="/var/folders/lw/rmylcyvd5rjfxk9g1z9rrm8w0000gq/T/showship-deck-dePtSj/iconc_Check_FFFFFF.png">    </p:cNvPr>
           <p:cNvPicPr>
             <a:picLocks noChangeAspect="1"/>
           </p:cNvPicPr>
@@ -14026,7 +14026,7 @@
       </p:sp>
       <p:pic>
         <p:nvPicPr>
-          <p:cNvPr id="27" name="Image 3" descr="/var/folders/lw/rmylcyvd5rjfxk9g1z9rrm8w0000gq/T/showship-deck-o8V0pU/iconc_Wrench_FFFFFF.png">    </p:cNvPr>
+          <p:cNvPr id="27" name="Image 3" descr="/var/folders/lw/rmylcyvd5rjfxk9g1z9rrm8w0000gq/T/showship-deck-dePtSj/iconc_Wrench_FFFFFF.png">    </p:cNvPr>
           <p:cNvPicPr>
             <a:picLocks noChangeAspect="1"/>
           </p:cNvPicPr>
@@ -14248,7 +14248,7 @@
       </p:sp>
       <p:pic>
         <p:nvPicPr>
-          <p:cNvPr id="34" name="Image 4" descr="/var/folders/lw/rmylcyvd5rjfxk9g1z9rrm8w0000gq/T/showship-deck-o8V0pU/iconc_Check_FFFFFF.png">    </p:cNvPr>
+          <p:cNvPr id="34" name="Image 4" descr="/var/folders/lw/rmylcyvd5rjfxk9g1z9rrm8w0000gq/T/showship-deck-dePtSj/iconc_Check_FFFFFF.png">    </p:cNvPr>
           <p:cNvPicPr>
             <a:picLocks noChangeAspect="1"/>
           </p:cNvPicPr>
@@ -14487,7 +14487,7 @@
       </p:grpSpPr>
       <p:pic>
         <p:nvPicPr>
-          <p:cNvPr id="2" name="Image 0" descr="/var/folders/lw/rmylcyvd5rjfxk9g1z9rrm8w0000gq/T/showship-deck-o8V0pU/trail_corner.png">    </p:cNvPr>
+          <p:cNvPr id="2" name="Image 0" descr="/var/folders/lw/rmylcyvd5rjfxk9g1z9rrm8w0000gq/T/showship-deck-dePtSj/trail_corner.png">    </p:cNvPr>
           <p:cNvPicPr>
             <a:picLocks noChangeAspect="1"/>
           </p:cNvPicPr>
@@ -14611,7 +14611,7 @@
       </p:sp>
       <p:pic>
         <p:nvPicPr>
-          <p:cNvPr id="6" name="Image 1" descr="/var/folders/lw/rmylcyvd5rjfxk9g1z9rrm8w0000gq/T/showship-deck-o8V0pU/trail_mark.png">    </p:cNvPr>
+          <p:cNvPr id="6" name="Image 1" descr="/var/folders/lw/rmylcyvd5rjfxk9g1z9rrm8w0000gq/T/showship-deck-dePtSj/trail_mark.png">    </p:cNvPr>
           <p:cNvPicPr>
             <a:picLocks noChangeAspect="1"/>
           </p:cNvPicPr>
@@ -14803,7 +14803,7 @@
       </p:sp>
       <p:pic>
         <p:nvPicPr>
-          <p:cNvPr id="12" name="Image 2" descr="/var/folders/lw/rmylcyvd5rjfxk9g1z9rrm8w0000gq/T/showship-deck-o8V0pU/iconc_TriangleAlert_FFFFFF.png">    </p:cNvPr>
+          <p:cNvPr id="12" name="Image 2" descr="/var/folders/lw/rmylcyvd5rjfxk9g1z9rrm8w0000gq/T/showship-deck-dePtSj/iconc_TriangleAlert_FFFFFF.png">    </p:cNvPr>
           <p:cNvPicPr>
             <a:picLocks noChangeAspect="1"/>
           </p:cNvPicPr>
@@ -15133,7 +15133,7 @@
       </p:sp>
       <p:pic>
         <p:nvPicPr>
-          <p:cNvPr id="21" name="Image 3" descr="/var/folders/lw/rmylcyvd5rjfxk9g1z9rrm8w0000gq/T/showship-deck-o8V0pU/iconc_MessageCircleQuestion_FFFFFF.png">    </p:cNvPr>
+          <p:cNvPr id="21" name="Image 3" descr="/var/folders/lw/rmylcyvd5rjfxk9g1z9rrm8w0000gq/T/showship-deck-dePtSj/iconc_MessageCircleQuestion_FFFFFF.png">    </p:cNvPr>
           <p:cNvPicPr>
             <a:picLocks noChangeAspect="1"/>
           </p:cNvPicPr>
@@ -15419,7 +15419,7 @@
       </p:grpSpPr>
       <p:pic>
         <p:nvPicPr>
-          <p:cNvPr id="2" name="Image 0" descr="/var/folders/lw/rmylcyvd5rjfxk9g1z9rrm8w0000gq/T/showship-deck-o8V0pU/trail_corner.png">    </p:cNvPr>
+          <p:cNvPr id="2" name="Image 0" descr="/var/folders/lw/rmylcyvd5rjfxk9g1z9rrm8w0000gq/T/showship-deck-dePtSj/trail_corner.png">    </p:cNvPr>
           <p:cNvPicPr>
             <a:picLocks noChangeAspect="1"/>
           </p:cNvPicPr>
@@ -15543,7 +15543,7 @@
       </p:sp>
       <p:pic>
         <p:nvPicPr>
-          <p:cNvPr id="6" name="Image 1" descr="/var/folders/lw/rmylcyvd5rjfxk9g1z9rrm8w0000gq/T/showship-deck-o8V0pU/trail_mark.png">    </p:cNvPr>
+          <p:cNvPr id="6" name="Image 1" descr="/var/folders/lw/rmylcyvd5rjfxk9g1z9rrm8w0000gq/T/showship-deck-dePtSj/trail_mark.png">    </p:cNvPr>
           <p:cNvPicPr>
             <a:picLocks noChangeAspect="1"/>
           </p:cNvPicPr>

--- a/docs/example-deck-showship.pptx
+++ b/docs/example-deck-showship.pptx
@@ -2360,7 +2360,7 @@
       </p:grpSpPr>
       <p:pic>
         <p:nvPicPr>
-          <p:cNvPr id="2" name="Image 0" descr="/var/folders/lw/rmylcyvd5rjfxk9g1z9rrm8w0000gq/T/showship-deck-dePtSj/trail_bookend.png">    </p:cNvPr>
+          <p:cNvPr id="2" name="Image 0" descr="/var/folders/lw/rmylcyvd5rjfxk9g1z9rrm8w0000gq/T/showship-deck-hW3qWQ/trail_bookend.png">    </p:cNvPr>
           <p:cNvPicPr>
             <a:picLocks noChangeAspect="1"/>
           </p:cNvPicPr>
@@ -2384,7 +2384,7 @@
       </p:pic>
       <p:pic>
         <p:nvPicPr>
-          <p:cNvPr id="3" name="Image 1" descr="/var/folders/lw/rmylcyvd5rjfxk9g1z9rrm8w0000gq/T/showship-deck-dePtSj/logo_trimmed.png">    </p:cNvPr>
+          <p:cNvPr id="3" name="Image 1" descr="/var/folders/lw/rmylcyvd5rjfxk9g1z9rrm8w0000gq/T/showship-deck-hW3qWQ/logo_trimmed.png">    </p:cNvPr>
           <p:cNvPicPr>
             <a:picLocks noChangeAspect="1"/>
           </p:cNvPicPr>
@@ -2705,7 +2705,7 @@
       </p:sp>
       <p:pic>
         <p:nvPicPr>
-          <p:cNvPr id="11" name="Image 2" descr="/var/folders/lw/rmylcyvd5rjfxk9g1z9rrm8w0000gq/T/showship-deck-dePtSj/trail_mark.png">    </p:cNvPr>
+          <p:cNvPr id="11" name="Image 2" descr="/var/folders/lw/rmylcyvd5rjfxk9g1z9rrm8w0000gq/T/showship-deck-hW3qWQ/trail_mark.png">    </p:cNvPr>
           <p:cNvPicPr>
             <a:picLocks noChangeAspect="1"/>
           </p:cNvPicPr>
@@ -2814,7 +2814,7 @@
       </p:grpSpPr>
       <p:pic>
         <p:nvPicPr>
-          <p:cNvPr id="2" name="Image 0" descr="/var/folders/lw/rmylcyvd5rjfxk9g1z9rrm8w0000gq/T/showship-deck-dePtSj/trail_corner.png">    </p:cNvPr>
+          <p:cNvPr id="2" name="Image 0" descr="/var/folders/lw/rmylcyvd5rjfxk9g1z9rrm8w0000gq/T/showship-deck-hW3qWQ/trail_corner.png">    </p:cNvPr>
           <p:cNvPicPr>
             <a:picLocks noChangeAspect="1"/>
           </p:cNvPicPr>
@@ -2938,7 +2938,7 @@
       </p:sp>
       <p:pic>
         <p:nvPicPr>
-          <p:cNvPr id="6" name="Image 1" descr="/var/folders/lw/rmylcyvd5rjfxk9g1z9rrm8w0000gq/T/showship-deck-dePtSj/trail_mark.png">    </p:cNvPr>
+          <p:cNvPr id="6" name="Image 1" descr="/var/folders/lw/rmylcyvd5rjfxk9g1z9rrm8w0000gq/T/showship-deck-hW3qWQ/trail_mark.png">    </p:cNvPr>
           <p:cNvPicPr>
             <a:picLocks noChangeAspect="1"/>
           </p:cNvPicPr>
@@ -3512,7 +3512,7 @@
       </p:grpSpPr>
       <p:pic>
         <p:nvPicPr>
-          <p:cNvPr id="2" name="Image 0" descr="/var/folders/lw/rmylcyvd5rjfxk9g1z9rrm8w0000gq/T/showship-deck-dePtSj/trail_corner.png">    </p:cNvPr>
+          <p:cNvPr id="2" name="Image 0" descr="/var/folders/lw/rmylcyvd5rjfxk9g1z9rrm8w0000gq/T/showship-deck-hW3qWQ/trail_corner.png">    </p:cNvPr>
           <p:cNvPicPr>
             <a:picLocks noChangeAspect="1"/>
           </p:cNvPicPr>
@@ -3636,7 +3636,7 @@
       </p:sp>
       <p:pic>
         <p:nvPicPr>
-          <p:cNvPr id="6" name="Image 1" descr="/var/folders/lw/rmylcyvd5rjfxk9g1z9rrm8w0000gq/T/showship-deck-dePtSj/trail_mark.png">    </p:cNvPr>
+          <p:cNvPr id="6" name="Image 1" descr="/var/folders/lw/rmylcyvd5rjfxk9g1z9rrm8w0000gq/T/showship-deck-hW3qWQ/trail_mark.png">    </p:cNvPr>
           <p:cNvPicPr>
             <a:picLocks noChangeAspect="1"/>
           </p:cNvPicPr>
@@ -5049,8 +5049,8 @@
         </p:nvSpPr>
         <p:spPr>
           <a:xfrm>
-            <a:off x="10735056" y="5344668"/>
-            <a:ext cx="585216" cy="274320"/>
+            <a:off x="10190988" y="5344668"/>
+            <a:ext cx="1129284" cy="274320"/>
           </a:xfrm>
           <a:prstGeom prst="roundRect">
             <a:avLst>
@@ -5058,7 +5058,7 @@
             </a:avLst>
           </a:prstGeom>
           <a:solidFill>
-            <a:srgbClr val="6C4CF5"/>
+            <a:srgbClr val="F0F0F3"/>
           </a:solidFill>
           <a:ln/>
         </p:spPr>
@@ -5071,8 +5071,8 @@
         </p:nvSpPr>
         <p:spPr>
           <a:xfrm>
-            <a:off x="10735056" y="5344668"/>
-            <a:ext cx="585216" cy="274320"/>
+            <a:off x="10190988" y="5344668"/>
+            <a:ext cx="1129284" cy="274320"/>
           </a:xfrm>
           <a:prstGeom prst="rect">
             <a:avLst/>
@@ -5090,13 +5090,13 @@
             <a:r>
               <a:rPr lang="en-US" sz="1100" b="1" dirty="0">
                 <a:solidFill>
-                  <a:srgbClr val="FFFFFF"/>
-                </a:solidFill>
-                <a:latin typeface="Poppins" pitchFamily="34" charset="0"/>
-                <a:ea typeface="Poppins" pitchFamily="34" charset="-122"/>
-                <a:cs typeface="Poppins" pitchFamily="34" charset="-120"/>
-              </a:rPr>
-              <a:t>Done</a:t>
+                  <a:srgbClr val="9A98B0"/>
+                </a:solidFill>
+                <a:latin typeface="Poppins" pitchFamily="34" charset="0"/>
+                <a:ea typeface="Poppins" pitchFamily="34" charset="-122"/>
+                <a:cs typeface="Poppins" pitchFamily="34" charset="-120"/>
+              </a:rPr>
+              <a:t>Not started</a:t>
             </a:r>
             <a:endParaRPr lang="en-US" sz="1100" dirty="0"/>
           </a:p>
@@ -5136,7 +5136,7 @@
       </p:grpSpPr>
       <p:pic>
         <p:nvPicPr>
-          <p:cNvPr id="2" name="Image 0" descr="/var/folders/lw/rmylcyvd5rjfxk9g1z9rrm8w0000gq/T/showship-deck-dePtSj/trail_bookend.png">    </p:cNvPr>
+          <p:cNvPr id="2" name="Image 0" descr="/var/folders/lw/rmylcyvd5rjfxk9g1z9rrm8w0000gq/T/showship-deck-hW3qWQ/trail_bookend.png">    </p:cNvPr>
           <p:cNvPicPr>
             <a:picLocks noChangeAspect="1"/>
           </p:cNvPicPr>
@@ -5160,7 +5160,7 @@
       </p:pic>
       <p:pic>
         <p:nvPicPr>
-          <p:cNvPr id="3" name="Image 1" descr="/var/folders/lw/rmylcyvd5rjfxk9g1z9rrm8w0000gq/T/showship-deck-dePtSj/logo_trimmed.png">    </p:cNvPr>
+          <p:cNvPr id="3" name="Image 1" descr="/var/folders/lw/rmylcyvd5rjfxk9g1z9rrm8w0000gq/T/showship-deck-hW3qWQ/logo_trimmed.png">    </p:cNvPr>
           <p:cNvPicPr>
             <a:picLocks noChangeAspect="1"/>
           </p:cNvPicPr>
@@ -5458,7 +5458,7 @@
       </p:sp>
       <p:pic>
         <p:nvPicPr>
-          <p:cNvPr id="11" name="Image 2" descr="/var/folders/lw/rmylcyvd5rjfxk9g1z9rrm8w0000gq/T/showship-deck-dePtSj/trail_mark.png">    </p:cNvPr>
+          <p:cNvPr id="11" name="Image 2" descr="/var/folders/lw/rmylcyvd5rjfxk9g1z9rrm8w0000gq/T/showship-deck-hW3qWQ/trail_mark.png">    </p:cNvPr>
           <p:cNvPicPr>
             <a:picLocks noChangeAspect="1"/>
           </p:cNvPicPr>
@@ -5567,7 +5567,7 @@
       </p:grpSpPr>
       <p:pic>
         <p:nvPicPr>
-          <p:cNvPr id="2" name="Image 0" descr="/var/folders/lw/rmylcyvd5rjfxk9g1z9rrm8w0000gq/T/showship-deck-dePtSj/trail_corner.png">    </p:cNvPr>
+          <p:cNvPr id="2" name="Image 0" descr="/var/folders/lw/rmylcyvd5rjfxk9g1z9rrm8w0000gq/T/showship-deck-hW3qWQ/trail_corner.png">    </p:cNvPr>
           <p:cNvPicPr>
             <a:picLocks noChangeAspect="1"/>
           </p:cNvPicPr>
@@ -5691,7 +5691,7 @@
       </p:sp>
       <p:pic>
         <p:nvPicPr>
-          <p:cNvPr id="6" name="Image 1" descr="/var/folders/lw/rmylcyvd5rjfxk9g1z9rrm8w0000gq/T/showship-deck-dePtSj/trail_mark.png">    </p:cNvPr>
+          <p:cNvPr id="6" name="Image 1" descr="/var/folders/lw/rmylcyvd5rjfxk9g1z9rrm8w0000gq/T/showship-deck-hW3qWQ/trail_mark.png">    </p:cNvPr>
           <p:cNvPicPr>
             <a:picLocks noChangeAspect="1"/>
           </p:cNvPicPr>
@@ -7009,7 +7009,7 @@
       </p:grpSpPr>
       <p:pic>
         <p:nvPicPr>
-          <p:cNvPr id="2" name="Image 0" descr="/var/folders/lw/rmylcyvd5rjfxk9g1z9rrm8w0000gq/T/showship-deck-dePtSj/trail_corner.png">    </p:cNvPr>
+          <p:cNvPr id="2" name="Image 0" descr="/var/folders/lw/rmylcyvd5rjfxk9g1z9rrm8w0000gq/T/showship-deck-hW3qWQ/trail_corner.png">    </p:cNvPr>
           <p:cNvPicPr>
             <a:picLocks noChangeAspect="1"/>
           </p:cNvPicPr>
@@ -7133,7 +7133,7 @@
       </p:sp>
       <p:pic>
         <p:nvPicPr>
-          <p:cNvPr id="6" name="Image 1" descr="/var/folders/lw/rmylcyvd5rjfxk9g1z9rrm8w0000gq/T/showship-deck-dePtSj/trail_mark.png">    </p:cNvPr>
+          <p:cNvPr id="6" name="Image 1" descr="/var/folders/lw/rmylcyvd5rjfxk9g1z9rrm8w0000gq/T/showship-deck-hW3qWQ/trail_mark.png">    </p:cNvPr>
           <p:cNvPicPr>
             <a:picLocks noChangeAspect="1"/>
           </p:cNvPicPr>
@@ -7310,7 +7310,7 @@
       </p:sp>
       <p:pic>
         <p:nvPicPr>
-          <p:cNvPr id="11" name="Image 2" descr="/var/folders/lw/rmylcyvd5rjfxk9g1z9rrm8w0000gq/T/showship-deck-dePtSj/trail_tl_1.png">    </p:cNvPr>
+          <p:cNvPr id="11" name="Image 2" descr="/var/folders/lw/rmylcyvd5rjfxk9g1z9rrm8w0000gq/T/showship-deck-hW3qWQ/trail_tl_1.png">    </p:cNvPr>
           <p:cNvPicPr>
             <a:picLocks noChangeAspect="1"/>
           </p:cNvPicPr>
@@ -8270,7 +8270,7 @@
       </p:grpSpPr>
       <p:pic>
         <p:nvPicPr>
-          <p:cNvPr id="2" name="Image 0" descr="/var/folders/lw/rmylcyvd5rjfxk9g1z9rrm8w0000gq/T/showship-deck-dePtSj/trail_corner.png">    </p:cNvPr>
+          <p:cNvPr id="2" name="Image 0" descr="/var/folders/lw/rmylcyvd5rjfxk9g1z9rrm8w0000gq/T/showship-deck-hW3qWQ/trail_corner.png">    </p:cNvPr>
           <p:cNvPicPr>
             <a:picLocks noChangeAspect="1"/>
           </p:cNvPicPr>
@@ -8394,7 +8394,7 @@
       </p:sp>
       <p:pic>
         <p:nvPicPr>
-          <p:cNvPr id="6" name="Image 1" descr="/var/folders/lw/rmylcyvd5rjfxk9g1z9rrm8w0000gq/T/showship-deck-dePtSj/trail_mark.png">    </p:cNvPr>
+          <p:cNvPr id="6" name="Image 1" descr="/var/folders/lw/rmylcyvd5rjfxk9g1z9rrm8w0000gq/T/showship-deck-hW3qWQ/trail_mark.png">    </p:cNvPr>
           <p:cNvPicPr>
             <a:picLocks noChangeAspect="1"/>
           </p:cNvPicPr>
@@ -9671,7 +9671,7 @@
       </p:grpSpPr>
       <p:pic>
         <p:nvPicPr>
-          <p:cNvPr id="2" name="Image 0" descr="/var/folders/lw/rmylcyvd5rjfxk9g1z9rrm8w0000gq/T/showship-deck-dePtSj/trail_corner.png">    </p:cNvPr>
+          <p:cNvPr id="2" name="Image 0" descr="/var/folders/lw/rmylcyvd5rjfxk9g1z9rrm8w0000gq/T/showship-deck-hW3qWQ/trail_corner.png">    </p:cNvPr>
           <p:cNvPicPr>
             <a:picLocks noChangeAspect="1"/>
           </p:cNvPicPr>
@@ -9795,7 +9795,7 @@
       </p:sp>
       <p:pic>
         <p:nvPicPr>
-          <p:cNvPr id="6" name="Image 1" descr="/var/folders/lw/rmylcyvd5rjfxk9g1z9rrm8w0000gq/T/showship-deck-dePtSj/trail_mark.png">    </p:cNvPr>
+          <p:cNvPr id="6" name="Image 1" descr="/var/folders/lw/rmylcyvd5rjfxk9g1z9rrm8w0000gq/T/showship-deck-hW3qWQ/trail_mark.png">    </p:cNvPr>
           <p:cNvPicPr>
             <a:picLocks noChangeAspect="1"/>
           </p:cNvPicPr>
@@ -11335,7 +11335,7 @@
       </p:grpSpPr>
       <p:pic>
         <p:nvPicPr>
-          <p:cNvPr id="2" name="Image 0" descr="/var/folders/lw/rmylcyvd5rjfxk9g1z9rrm8w0000gq/T/showship-deck-dePtSj/trail_corner.png">    </p:cNvPr>
+          <p:cNvPr id="2" name="Image 0" descr="/var/folders/lw/rmylcyvd5rjfxk9g1z9rrm8w0000gq/T/showship-deck-hW3qWQ/trail_corner.png">    </p:cNvPr>
           <p:cNvPicPr>
             <a:picLocks noChangeAspect="1"/>
           </p:cNvPicPr>
@@ -11459,7 +11459,7 @@
       </p:sp>
       <p:pic>
         <p:nvPicPr>
-          <p:cNvPr id="6" name="Image 1" descr="/var/folders/lw/rmylcyvd5rjfxk9g1z9rrm8w0000gq/T/showship-deck-dePtSj/trail_mark.png">    </p:cNvPr>
+          <p:cNvPr id="6" name="Image 1" descr="/var/folders/lw/rmylcyvd5rjfxk9g1z9rrm8w0000gq/T/showship-deck-hW3qWQ/trail_mark.png">    </p:cNvPr>
           <p:cNvPicPr>
             <a:picLocks noChangeAspect="1"/>
           </p:cNvPicPr>
@@ -13188,7 +13188,7 @@
       </p:grpSpPr>
       <p:pic>
         <p:nvPicPr>
-          <p:cNvPr id="2" name="Image 0" descr="/var/folders/lw/rmylcyvd5rjfxk9g1z9rrm8w0000gq/T/showship-deck-dePtSj/trail_corner.png">    </p:cNvPr>
+          <p:cNvPr id="2" name="Image 0" descr="/var/folders/lw/rmylcyvd5rjfxk9g1z9rrm8w0000gq/T/showship-deck-hW3qWQ/trail_corner.png">    </p:cNvPr>
           <p:cNvPicPr>
             <a:picLocks noChangeAspect="1"/>
           </p:cNvPicPr>
@@ -13312,7 +13312,7 @@
       </p:sp>
       <p:pic>
         <p:nvPicPr>
-          <p:cNvPr id="6" name="Image 1" descr="/var/folders/lw/rmylcyvd5rjfxk9g1z9rrm8w0000gq/T/showship-deck-dePtSj/trail_mark.png">    </p:cNvPr>
+          <p:cNvPr id="6" name="Image 1" descr="/var/folders/lw/rmylcyvd5rjfxk9g1z9rrm8w0000gq/T/showship-deck-hW3qWQ/trail_mark.png">    </p:cNvPr>
           <p:cNvPicPr>
             <a:picLocks noChangeAspect="1"/>
           </p:cNvPicPr>
@@ -13804,7 +13804,7 @@
       </p:sp>
       <p:pic>
         <p:nvPicPr>
-          <p:cNvPr id="20" name="Image 2" descr="/var/folders/lw/rmylcyvd5rjfxk9g1z9rrm8w0000gq/T/showship-deck-dePtSj/iconc_Check_FFFFFF.png">    </p:cNvPr>
+          <p:cNvPr id="20" name="Image 2" descr="/var/folders/lw/rmylcyvd5rjfxk9g1z9rrm8w0000gq/T/showship-deck-hW3qWQ/iconc_Check_FFFFFF.png">    </p:cNvPr>
           <p:cNvPicPr>
             <a:picLocks noChangeAspect="1"/>
           </p:cNvPicPr>
@@ -14026,7 +14026,7 @@
       </p:sp>
       <p:pic>
         <p:nvPicPr>
-          <p:cNvPr id="27" name="Image 3" descr="/var/folders/lw/rmylcyvd5rjfxk9g1z9rrm8w0000gq/T/showship-deck-dePtSj/iconc_Wrench_FFFFFF.png">    </p:cNvPr>
+          <p:cNvPr id="27" name="Image 3" descr="/var/folders/lw/rmylcyvd5rjfxk9g1z9rrm8w0000gq/T/showship-deck-hW3qWQ/iconc_Wrench_FFFFFF.png">    </p:cNvPr>
           <p:cNvPicPr>
             <a:picLocks noChangeAspect="1"/>
           </p:cNvPicPr>
@@ -14248,7 +14248,7 @@
       </p:sp>
       <p:pic>
         <p:nvPicPr>
-          <p:cNvPr id="34" name="Image 4" descr="/var/folders/lw/rmylcyvd5rjfxk9g1z9rrm8w0000gq/T/showship-deck-dePtSj/iconc_Check_FFFFFF.png">    </p:cNvPr>
+          <p:cNvPr id="34" name="Image 4" descr="/var/folders/lw/rmylcyvd5rjfxk9g1z9rrm8w0000gq/T/showship-deck-hW3qWQ/iconc_Check_FFFFFF.png">    </p:cNvPr>
           <p:cNvPicPr>
             <a:picLocks noChangeAspect="1"/>
           </p:cNvPicPr>
@@ -14487,7 +14487,7 @@
       </p:grpSpPr>
       <p:pic>
         <p:nvPicPr>
-          <p:cNvPr id="2" name="Image 0" descr="/var/folders/lw/rmylcyvd5rjfxk9g1z9rrm8w0000gq/T/showship-deck-dePtSj/trail_corner.png">    </p:cNvPr>
+          <p:cNvPr id="2" name="Image 0" descr="/var/folders/lw/rmylcyvd5rjfxk9g1z9rrm8w0000gq/T/showship-deck-hW3qWQ/trail_corner.png">    </p:cNvPr>
           <p:cNvPicPr>
             <a:picLocks noChangeAspect="1"/>
           </p:cNvPicPr>
@@ -14611,7 +14611,7 @@
       </p:sp>
       <p:pic>
         <p:nvPicPr>
-          <p:cNvPr id="6" name="Image 1" descr="/var/folders/lw/rmylcyvd5rjfxk9g1z9rrm8w0000gq/T/showship-deck-dePtSj/trail_mark.png">    </p:cNvPr>
+          <p:cNvPr id="6" name="Image 1" descr="/var/folders/lw/rmylcyvd5rjfxk9g1z9rrm8w0000gq/T/showship-deck-hW3qWQ/trail_mark.png">    </p:cNvPr>
           <p:cNvPicPr>
             <a:picLocks noChangeAspect="1"/>
           </p:cNvPicPr>
@@ -14803,7 +14803,7 @@
       </p:sp>
       <p:pic>
         <p:nvPicPr>
-          <p:cNvPr id="12" name="Image 2" descr="/var/folders/lw/rmylcyvd5rjfxk9g1z9rrm8w0000gq/T/showship-deck-dePtSj/iconc_TriangleAlert_FFFFFF.png">    </p:cNvPr>
+          <p:cNvPr id="12" name="Image 2" descr="/var/folders/lw/rmylcyvd5rjfxk9g1z9rrm8w0000gq/T/showship-deck-hW3qWQ/iconc_TriangleAlert_FFFFFF.png">    </p:cNvPr>
           <p:cNvPicPr>
             <a:picLocks noChangeAspect="1"/>
           </p:cNvPicPr>
@@ -15133,7 +15133,7 @@
       </p:sp>
       <p:pic>
         <p:nvPicPr>
-          <p:cNvPr id="21" name="Image 3" descr="/var/folders/lw/rmylcyvd5rjfxk9g1z9rrm8w0000gq/T/showship-deck-dePtSj/iconc_MessageCircleQuestion_FFFFFF.png">    </p:cNvPr>
+          <p:cNvPr id="21" name="Image 3" descr="/var/folders/lw/rmylcyvd5rjfxk9g1z9rrm8w0000gq/T/showship-deck-hW3qWQ/iconc_MessageCircleQuestion_FFFFFF.png">    </p:cNvPr>
           <p:cNvPicPr>
             <a:picLocks noChangeAspect="1"/>
           </p:cNvPicPr>
@@ -15419,7 +15419,7 @@
       </p:grpSpPr>
       <p:pic>
         <p:nvPicPr>
-          <p:cNvPr id="2" name="Image 0" descr="/var/folders/lw/rmylcyvd5rjfxk9g1z9rrm8w0000gq/T/showship-deck-dePtSj/trail_corner.png">    </p:cNvPr>
+          <p:cNvPr id="2" name="Image 0" descr="/var/folders/lw/rmylcyvd5rjfxk9g1z9rrm8w0000gq/T/showship-deck-hW3qWQ/trail_corner.png">    </p:cNvPr>
           <p:cNvPicPr>
             <a:picLocks noChangeAspect="1"/>
           </p:cNvPicPr>
@@ -15543,7 +15543,7 @@
       </p:sp>
       <p:pic>
         <p:nvPicPr>
-          <p:cNvPr id="6" name="Image 1" descr="/var/folders/lw/rmylcyvd5rjfxk9g1z9rrm8w0000gq/T/showship-deck-dePtSj/trail_mark.png">    </p:cNvPr>
+          <p:cNvPr id="6" name="Image 1" descr="/var/folders/lw/rmylcyvd5rjfxk9g1z9rrm8w0000gq/T/showship-deck-hW3qWQ/trail_mark.png">    </p:cNvPr>
           <p:cNvPicPr>
             <a:picLocks noChangeAspect="1"/>
           </p:cNvPicPr>

--- a/docs/example-deck-showship.pptx
+++ b/docs/example-deck-showship.pptx
@@ -2360,7 +2360,7 @@
       </p:grpSpPr>
       <p:pic>
         <p:nvPicPr>
-          <p:cNvPr id="2" name="Image 0" descr="/var/folders/lw/rmylcyvd5rjfxk9g1z9rrm8w0000gq/T/showship-deck-hW3qWQ/trail_bookend.png">    </p:cNvPr>
+          <p:cNvPr id="2" name="Image 0" descr="/var/folders/lw/rmylcyvd5rjfxk9g1z9rrm8w0000gq/T/showship-deck-bRwUC6/trail_bookend.png">    </p:cNvPr>
           <p:cNvPicPr>
             <a:picLocks noChangeAspect="1"/>
           </p:cNvPicPr>
@@ -2384,7 +2384,7 @@
       </p:pic>
       <p:pic>
         <p:nvPicPr>
-          <p:cNvPr id="3" name="Image 1" descr="/var/folders/lw/rmylcyvd5rjfxk9g1z9rrm8w0000gq/T/showship-deck-hW3qWQ/logo_trimmed.png">    </p:cNvPr>
+          <p:cNvPr id="3" name="Image 1" descr="/var/folders/lw/rmylcyvd5rjfxk9g1z9rrm8w0000gq/T/showship-deck-bRwUC6/logo_trimmed.png">    </p:cNvPr>
           <p:cNvPicPr>
             <a:picLocks noChangeAspect="1"/>
           </p:cNvPicPr>
@@ -2705,7 +2705,7 @@
       </p:sp>
       <p:pic>
         <p:nvPicPr>
-          <p:cNvPr id="11" name="Image 2" descr="/var/folders/lw/rmylcyvd5rjfxk9g1z9rrm8w0000gq/T/showship-deck-hW3qWQ/trail_mark.png">    </p:cNvPr>
+          <p:cNvPr id="11" name="Image 2" descr="/var/folders/lw/rmylcyvd5rjfxk9g1z9rrm8w0000gq/T/showship-deck-bRwUC6/trail_mark.png">    </p:cNvPr>
           <p:cNvPicPr>
             <a:picLocks noChangeAspect="1"/>
           </p:cNvPicPr>
@@ -2814,7 +2814,7 @@
       </p:grpSpPr>
       <p:pic>
         <p:nvPicPr>
-          <p:cNvPr id="2" name="Image 0" descr="/var/folders/lw/rmylcyvd5rjfxk9g1z9rrm8w0000gq/T/showship-deck-hW3qWQ/trail_corner.png">    </p:cNvPr>
+          <p:cNvPr id="2" name="Image 0" descr="/var/folders/lw/rmylcyvd5rjfxk9g1z9rrm8w0000gq/T/showship-deck-bRwUC6/trail_corner.png">    </p:cNvPr>
           <p:cNvPicPr>
             <a:picLocks noChangeAspect="1"/>
           </p:cNvPicPr>
@@ -2938,7 +2938,7 @@
       </p:sp>
       <p:pic>
         <p:nvPicPr>
-          <p:cNvPr id="6" name="Image 1" descr="/var/folders/lw/rmylcyvd5rjfxk9g1z9rrm8w0000gq/T/showship-deck-hW3qWQ/trail_mark.png">    </p:cNvPr>
+          <p:cNvPr id="6" name="Image 1" descr="/var/folders/lw/rmylcyvd5rjfxk9g1z9rrm8w0000gq/T/showship-deck-bRwUC6/trail_mark.png">    </p:cNvPr>
           <p:cNvPicPr>
             <a:picLocks noChangeAspect="1"/>
           </p:cNvPicPr>
@@ -3512,7 +3512,7 @@
       </p:grpSpPr>
       <p:pic>
         <p:nvPicPr>
-          <p:cNvPr id="2" name="Image 0" descr="/var/folders/lw/rmylcyvd5rjfxk9g1z9rrm8w0000gq/T/showship-deck-hW3qWQ/trail_corner.png">    </p:cNvPr>
+          <p:cNvPr id="2" name="Image 0" descr="/var/folders/lw/rmylcyvd5rjfxk9g1z9rrm8w0000gq/T/showship-deck-bRwUC6/trail_corner.png">    </p:cNvPr>
           <p:cNvPicPr>
             <a:picLocks noChangeAspect="1"/>
           </p:cNvPicPr>
@@ -3636,7 +3636,7 @@
       </p:sp>
       <p:pic>
         <p:nvPicPr>
-          <p:cNvPr id="6" name="Image 1" descr="/var/folders/lw/rmylcyvd5rjfxk9g1z9rrm8w0000gq/T/showship-deck-hW3qWQ/trail_mark.png">    </p:cNvPr>
+          <p:cNvPr id="6" name="Image 1" descr="/var/folders/lw/rmylcyvd5rjfxk9g1z9rrm8w0000gq/T/showship-deck-bRwUC6/trail_mark.png">    </p:cNvPr>
           <p:cNvPicPr>
             <a:picLocks noChangeAspect="1"/>
           </p:cNvPicPr>
@@ -5136,7 +5136,7 @@
       </p:grpSpPr>
       <p:pic>
         <p:nvPicPr>
-          <p:cNvPr id="2" name="Image 0" descr="/var/folders/lw/rmylcyvd5rjfxk9g1z9rrm8w0000gq/T/showship-deck-hW3qWQ/trail_bookend.png">    </p:cNvPr>
+          <p:cNvPr id="2" name="Image 0" descr="/var/folders/lw/rmylcyvd5rjfxk9g1z9rrm8w0000gq/T/showship-deck-bRwUC6/trail_bookend.png">    </p:cNvPr>
           <p:cNvPicPr>
             <a:picLocks noChangeAspect="1"/>
           </p:cNvPicPr>
@@ -5160,7 +5160,7 @@
       </p:pic>
       <p:pic>
         <p:nvPicPr>
-          <p:cNvPr id="3" name="Image 1" descr="/var/folders/lw/rmylcyvd5rjfxk9g1z9rrm8w0000gq/T/showship-deck-hW3qWQ/logo_trimmed.png">    </p:cNvPr>
+          <p:cNvPr id="3" name="Image 1" descr="/var/folders/lw/rmylcyvd5rjfxk9g1z9rrm8w0000gq/T/showship-deck-bRwUC6/logo_trimmed.png">    </p:cNvPr>
           <p:cNvPicPr>
             <a:picLocks noChangeAspect="1"/>
           </p:cNvPicPr>
@@ -5458,7 +5458,7 @@
       </p:sp>
       <p:pic>
         <p:nvPicPr>
-          <p:cNvPr id="11" name="Image 2" descr="/var/folders/lw/rmylcyvd5rjfxk9g1z9rrm8w0000gq/T/showship-deck-hW3qWQ/trail_mark.png">    </p:cNvPr>
+          <p:cNvPr id="11" name="Image 2" descr="/var/folders/lw/rmylcyvd5rjfxk9g1z9rrm8w0000gq/T/showship-deck-bRwUC6/trail_mark.png">    </p:cNvPr>
           <p:cNvPicPr>
             <a:picLocks noChangeAspect="1"/>
           </p:cNvPicPr>
@@ -5567,7 +5567,7 @@
       </p:grpSpPr>
       <p:pic>
         <p:nvPicPr>
-          <p:cNvPr id="2" name="Image 0" descr="/var/folders/lw/rmylcyvd5rjfxk9g1z9rrm8w0000gq/T/showship-deck-hW3qWQ/trail_corner.png">    </p:cNvPr>
+          <p:cNvPr id="2" name="Image 0" descr="/var/folders/lw/rmylcyvd5rjfxk9g1z9rrm8w0000gq/T/showship-deck-bRwUC6/trail_corner.png">    </p:cNvPr>
           <p:cNvPicPr>
             <a:picLocks noChangeAspect="1"/>
           </p:cNvPicPr>
@@ -5691,7 +5691,7 @@
       </p:sp>
       <p:pic>
         <p:nvPicPr>
-          <p:cNvPr id="6" name="Image 1" descr="/var/folders/lw/rmylcyvd5rjfxk9g1z9rrm8w0000gq/T/showship-deck-hW3qWQ/trail_mark.png">    </p:cNvPr>
+          <p:cNvPr id="6" name="Image 1" descr="/var/folders/lw/rmylcyvd5rjfxk9g1z9rrm8w0000gq/T/showship-deck-bRwUC6/trail_mark.png">    </p:cNvPr>
           <p:cNvPicPr>
             <a:picLocks noChangeAspect="1"/>
           </p:cNvPicPr>
@@ -7009,7 +7009,7 @@
       </p:grpSpPr>
       <p:pic>
         <p:nvPicPr>
-          <p:cNvPr id="2" name="Image 0" descr="/var/folders/lw/rmylcyvd5rjfxk9g1z9rrm8w0000gq/T/showship-deck-hW3qWQ/trail_corner.png">    </p:cNvPr>
+          <p:cNvPr id="2" name="Image 0" descr="/var/folders/lw/rmylcyvd5rjfxk9g1z9rrm8w0000gq/T/showship-deck-bRwUC6/trail_corner.png">    </p:cNvPr>
           <p:cNvPicPr>
             <a:picLocks noChangeAspect="1"/>
           </p:cNvPicPr>
@@ -7133,7 +7133,7 @@
       </p:sp>
       <p:pic>
         <p:nvPicPr>
-          <p:cNvPr id="6" name="Image 1" descr="/var/folders/lw/rmylcyvd5rjfxk9g1z9rrm8w0000gq/T/showship-deck-hW3qWQ/trail_mark.png">    </p:cNvPr>
+          <p:cNvPr id="6" name="Image 1" descr="/var/folders/lw/rmylcyvd5rjfxk9g1z9rrm8w0000gq/T/showship-deck-bRwUC6/trail_mark.png">    </p:cNvPr>
           <p:cNvPicPr>
             <a:picLocks noChangeAspect="1"/>
           </p:cNvPicPr>
@@ -7310,7 +7310,7 @@
       </p:sp>
       <p:pic>
         <p:nvPicPr>
-          <p:cNvPr id="11" name="Image 2" descr="/var/folders/lw/rmylcyvd5rjfxk9g1z9rrm8w0000gq/T/showship-deck-hW3qWQ/trail_tl_1.png">    </p:cNvPr>
+          <p:cNvPr id="11" name="Image 2" descr="/var/folders/lw/rmylcyvd5rjfxk9g1z9rrm8w0000gq/T/showship-deck-bRwUC6/trail_tl_1.png">    </p:cNvPr>
           <p:cNvPicPr>
             <a:picLocks noChangeAspect="1"/>
           </p:cNvPicPr>
@@ -8270,7 +8270,7 @@
       </p:grpSpPr>
       <p:pic>
         <p:nvPicPr>
-          <p:cNvPr id="2" name="Image 0" descr="/var/folders/lw/rmylcyvd5rjfxk9g1z9rrm8w0000gq/T/showship-deck-hW3qWQ/trail_corner.png">    </p:cNvPr>
+          <p:cNvPr id="2" name="Image 0" descr="/var/folders/lw/rmylcyvd5rjfxk9g1z9rrm8w0000gq/T/showship-deck-bRwUC6/trail_corner.png">    </p:cNvPr>
           <p:cNvPicPr>
             <a:picLocks noChangeAspect="1"/>
           </p:cNvPicPr>
@@ -8394,7 +8394,7 @@
       </p:sp>
       <p:pic>
         <p:nvPicPr>
-          <p:cNvPr id="6" name="Image 1" descr="/var/folders/lw/rmylcyvd5rjfxk9g1z9rrm8w0000gq/T/showship-deck-hW3qWQ/trail_mark.png">    </p:cNvPr>
+          <p:cNvPr id="6" name="Image 1" descr="/var/folders/lw/rmylcyvd5rjfxk9g1z9rrm8w0000gq/T/showship-deck-bRwUC6/trail_mark.png">    </p:cNvPr>
           <p:cNvPicPr>
             <a:picLocks noChangeAspect="1"/>
           </p:cNvPicPr>
@@ -9671,7 +9671,7 @@
       </p:grpSpPr>
       <p:pic>
         <p:nvPicPr>
-          <p:cNvPr id="2" name="Image 0" descr="/var/folders/lw/rmylcyvd5rjfxk9g1z9rrm8w0000gq/T/showship-deck-hW3qWQ/trail_corner.png">    </p:cNvPr>
+          <p:cNvPr id="2" name="Image 0" descr="/var/folders/lw/rmylcyvd5rjfxk9g1z9rrm8w0000gq/T/showship-deck-bRwUC6/trail_corner.png">    </p:cNvPr>
           <p:cNvPicPr>
             <a:picLocks noChangeAspect="1"/>
           </p:cNvPicPr>
@@ -9795,7 +9795,7 @@
       </p:sp>
       <p:pic>
         <p:nvPicPr>
-          <p:cNvPr id="6" name="Image 1" descr="/var/folders/lw/rmylcyvd5rjfxk9g1z9rrm8w0000gq/T/showship-deck-hW3qWQ/trail_mark.png">    </p:cNvPr>
+          <p:cNvPr id="6" name="Image 1" descr="/var/folders/lw/rmylcyvd5rjfxk9g1z9rrm8w0000gq/T/showship-deck-bRwUC6/trail_mark.png">    </p:cNvPr>
           <p:cNvPicPr>
             <a:picLocks noChangeAspect="1"/>
           </p:cNvPicPr>
@@ -11335,7 +11335,7 @@
       </p:grpSpPr>
       <p:pic>
         <p:nvPicPr>
-          <p:cNvPr id="2" name="Image 0" descr="/var/folders/lw/rmylcyvd5rjfxk9g1z9rrm8w0000gq/T/showship-deck-hW3qWQ/trail_corner.png">    </p:cNvPr>
+          <p:cNvPr id="2" name="Image 0" descr="/var/folders/lw/rmylcyvd5rjfxk9g1z9rrm8w0000gq/T/showship-deck-bRwUC6/trail_corner.png">    </p:cNvPr>
           <p:cNvPicPr>
             <a:picLocks noChangeAspect="1"/>
           </p:cNvPicPr>
@@ -11459,7 +11459,7 @@
       </p:sp>
       <p:pic>
         <p:nvPicPr>
-          <p:cNvPr id="6" name="Image 1" descr="/var/folders/lw/rmylcyvd5rjfxk9g1z9rrm8w0000gq/T/showship-deck-hW3qWQ/trail_mark.png">    </p:cNvPr>
+          <p:cNvPr id="6" name="Image 1" descr="/var/folders/lw/rmylcyvd5rjfxk9g1z9rrm8w0000gq/T/showship-deck-bRwUC6/trail_mark.png">    </p:cNvPr>
           <p:cNvPicPr>
             <a:picLocks noChangeAspect="1"/>
           </p:cNvPicPr>
@@ -13188,7 +13188,7 @@
       </p:grpSpPr>
       <p:pic>
         <p:nvPicPr>
-          <p:cNvPr id="2" name="Image 0" descr="/var/folders/lw/rmylcyvd5rjfxk9g1z9rrm8w0000gq/T/showship-deck-hW3qWQ/trail_corner.png">    </p:cNvPr>
+          <p:cNvPr id="2" name="Image 0" descr="/var/folders/lw/rmylcyvd5rjfxk9g1z9rrm8w0000gq/T/showship-deck-bRwUC6/trail_corner.png">    </p:cNvPr>
           <p:cNvPicPr>
             <a:picLocks noChangeAspect="1"/>
           </p:cNvPicPr>
@@ -13312,7 +13312,7 @@
       </p:sp>
       <p:pic>
         <p:nvPicPr>
-          <p:cNvPr id="6" name="Image 1" descr="/var/folders/lw/rmylcyvd5rjfxk9g1z9rrm8w0000gq/T/showship-deck-hW3qWQ/trail_mark.png">    </p:cNvPr>
+          <p:cNvPr id="6" name="Image 1" descr="/var/folders/lw/rmylcyvd5rjfxk9g1z9rrm8w0000gq/T/showship-deck-bRwUC6/trail_mark.png">    </p:cNvPr>
           <p:cNvPicPr>
             <a:picLocks noChangeAspect="1"/>
           </p:cNvPicPr>
@@ -13804,7 +13804,7 @@
       </p:sp>
       <p:pic>
         <p:nvPicPr>
-          <p:cNvPr id="20" name="Image 2" descr="/var/folders/lw/rmylcyvd5rjfxk9g1z9rrm8w0000gq/T/showship-deck-hW3qWQ/iconc_Check_FFFFFF.png">    </p:cNvPr>
+          <p:cNvPr id="20" name="Image 2" descr="/var/folders/lw/rmylcyvd5rjfxk9g1z9rrm8w0000gq/T/showship-deck-bRwUC6/iconc_Check_FFFFFF.png">    </p:cNvPr>
           <p:cNvPicPr>
             <a:picLocks noChangeAspect="1"/>
           </p:cNvPicPr>
@@ -14026,7 +14026,7 @@
       </p:sp>
       <p:pic>
         <p:nvPicPr>
-          <p:cNvPr id="27" name="Image 3" descr="/var/folders/lw/rmylcyvd5rjfxk9g1z9rrm8w0000gq/T/showship-deck-hW3qWQ/iconc_Wrench_FFFFFF.png">    </p:cNvPr>
+          <p:cNvPr id="27" name="Image 3" descr="/var/folders/lw/rmylcyvd5rjfxk9g1z9rrm8w0000gq/T/showship-deck-bRwUC6/iconc_Wrench_FFFFFF.png">    </p:cNvPr>
           <p:cNvPicPr>
             <a:picLocks noChangeAspect="1"/>
           </p:cNvPicPr>
@@ -14248,7 +14248,7 @@
       </p:sp>
       <p:pic>
         <p:nvPicPr>
-          <p:cNvPr id="34" name="Image 4" descr="/var/folders/lw/rmylcyvd5rjfxk9g1z9rrm8w0000gq/T/showship-deck-hW3qWQ/iconc_Check_FFFFFF.png">    </p:cNvPr>
+          <p:cNvPr id="34" name="Image 4" descr="/var/folders/lw/rmylcyvd5rjfxk9g1z9rrm8w0000gq/T/showship-deck-bRwUC6/iconc_Check_FFFFFF.png">    </p:cNvPr>
           <p:cNvPicPr>
             <a:picLocks noChangeAspect="1"/>
           </p:cNvPicPr>
@@ -14487,7 +14487,7 @@
       </p:grpSpPr>
       <p:pic>
         <p:nvPicPr>
-          <p:cNvPr id="2" name="Image 0" descr="/var/folders/lw/rmylcyvd5rjfxk9g1z9rrm8w0000gq/T/showship-deck-hW3qWQ/trail_corner.png">    </p:cNvPr>
+          <p:cNvPr id="2" name="Image 0" descr="/var/folders/lw/rmylcyvd5rjfxk9g1z9rrm8w0000gq/T/showship-deck-bRwUC6/trail_corner.png">    </p:cNvPr>
           <p:cNvPicPr>
             <a:picLocks noChangeAspect="1"/>
           </p:cNvPicPr>
@@ -14611,7 +14611,7 @@
       </p:sp>
       <p:pic>
         <p:nvPicPr>
-          <p:cNvPr id="6" name="Image 1" descr="/var/folders/lw/rmylcyvd5rjfxk9g1z9rrm8w0000gq/T/showship-deck-hW3qWQ/trail_mark.png">    </p:cNvPr>
+          <p:cNvPr id="6" name="Image 1" descr="/var/folders/lw/rmylcyvd5rjfxk9g1z9rrm8w0000gq/T/showship-deck-bRwUC6/trail_mark.png">    </p:cNvPr>
           <p:cNvPicPr>
             <a:picLocks noChangeAspect="1"/>
           </p:cNvPicPr>
@@ -14803,7 +14803,7 @@
       </p:sp>
       <p:pic>
         <p:nvPicPr>
-          <p:cNvPr id="12" name="Image 2" descr="/var/folders/lw/rmylcyvd5rjfxk9g1z9rrm8w0000gq/T/showship-deck-hW3qWQ/iconc_TriangleAlert_FFFFFF.png">    </p:cNvPr>
+          <p:cNvPr id="12" name="Image 2" descr="/var/folders/lw/rmylcyvd5rjfxk9g1z9rrm8w0000gq/T/showship-deck-bRwUC6/iconc_TriangleAlert_FFFFFF.png">    </p:cNvPr>
           <p:cNvPicPr>
             <a:picLocks noChangeAspect="1"/>
           </p:cNvPicPr>
@@ -15133,7 +15133,7 @@
       </p:sp>
       <p:pic>
         <p:nvPicPr>
-          <p:cNvPr id="21" name="Image 3" descr="/var/folders/lw/rmylcyvd5rjfxk9g1z9rrm8w0000gq/T/showship-deck-hW3qWQ/iconc_MessageCircleQuestion_FFFFFF.png">    </p:cNvPr>
+          <p:cNvPr id="21" name="Image 3" descr="/var/folders/lw/rmylcyvd5rjfxk9g1z9rrm8w0000gq/T/showship-deck-bRwUC6/iconc_MessageCircleQuestion_FFFFFF.png">    </p:cNvPr>
           <p:cNvPicPr>
             <a:picLocks noChangeAspect="1"/>
           </p:cNvPicPr>
@@ -15419,7 +15419,7 @@
       </p:grpSpPr>
       <p:pic>
         <p:nvPicPr>
-          <p:cNvPr id="2" name="Image 0" descr="/var/folders/lw/rmylcyvd5rjfxk9g1z9rrm8w0000gq/T/showship-deck-hW3qWQ/trail_corner.png">    </p:cNvPr>
+          <p:cNvPr id="2" name="Image 0" descr="/var/folders/lw/rmylcyvd5rjfxk9g1z9rrm8w0000gq/T/showship-deck-bRwUC6/trail_corner.png">    </p:cNvPr>
           <p:cNvPicPr>
             <a:picLocks noChangeAspect="1"/>
           </p:cNvPicPr>
@@ -15543,7 +15543,7 @@
       </p:sp>
       <p:pic>
         <p:nvPicPr>
-          <p:cNvPr id="6" name="Image 1" descr="/var/folders/lw/rmylcyvd5rjfxk9g1z9rrm8w0000gq/T/showship-deck-hW3qWQ/trail_mark.png">    </p:cNvPr>
+          <p:cNvPr id="6" name="Image 1" descr="/var/folders/lw/rmylcyvd5rjfxk9g1z9rrm8w0000gq/T/showship-deck-bRwUC6/trail_mark.png">    </p:cNvPr>
           <p:cNvPicPr>
             <a:picLocks noChangeAspect="1"/>
           </p:cNvPicPr>
